--- a/Lectures/Week 11/11. Advanced Counting.pptx
+++ b/Lectures/Week 11/11. Advanced Counting.pptx
@@ -65,17 +65,11 @@
     <p:sldId id="561" r:id="rId59"/>
     <p:sldId id="562" r:id="rId60"/>
     <p:sldId id="563" r:id="rId61"/>
-    <p:sldId id="643" r:id="rId62"/>
-    <p:sldId id="535" r:id="rId63"/>
-    <p:sldId id="536" r:id="rId64"/>
-    <p:sldId id="607" r:id="rId65"/>
-    <p:sldId id="644" r:id="rId66"/>
-    <p:sldId id="609" r:id="rId67"/>
-    <p:sldId id="645" r:id="rId68"/>
-    <p:sldId id="610" r:id="rId69"/>
-    <p:sldId id="611" r:id="rId70"/>
-    <p:sldId id="612" r:id="rId71"/>
-    <p:sldId id="621" r:id="rId72"/>
+    <p:sldId id="610" r:id="rId62"/>
+    <p:sldId id="611" r:id="rId63"/>
+    <p:sldId id="646" r:id="rId64"/>
+    <p:sldId id="612" r:id="rId65"/>
+    <p:sldId id="643" r:id="rId66"/>
   </p:sldIdLst>
   <p:sldSz cx="12192000" cy="6858000"/>
   <p:notesSz cx="6858000" cy="9144000"/>
@@ -328,7 +322,7 @@
           <a:lstStyle/>
           <a:p>
             <a:fld id="{39706E35-983D-0347-A1AE-A115ADC385D9}" type="datetimeFigureOut">
-              <a:t>10/16/20</a:t>
+              <a:t>27.11.20</a:t>
             </a:fld>
             <a:endParaRPr lang="en-US"/>
           </a:p>
@@ -524,7 +518,7 @@
           <a:lstStyle/>
           <a:p>
             <a:fld id="{39706E35-983D-0347-A1AE-A115ADC385D9}" type="datetimeFigureOut">
-              <a:t>10/16/20</a:t>
+              <a:t>27.11.20</a:t>
             </a:fld>
             <a:endParaRPr lang="en-US"/>
           </a:p>
@@ -730,7 +724,7 @@
           <a:lstStyle/>
           <a:p>
             <a:fld id="{39706E35-983D-0347-A1AE-A115ADC385D9}" type="datetimeFigureOut">
-              <a:t>10/16/20</a:t>
+              <a:t>27.11.20</a:t>
             </a:fld>
             <a:endParaRPr lang="en-US"/>
           </a:p>
@@ -926,7 +920,7 @@
           <a:lstStyle/>
           <a:p>
             <a:fld id="{39706E35-983D-0347-A1AE-A115ADC385D9}" type="datetimeFigureOut">
-              <a:t>10/16/20</a:t>
+              <a:t>27.11.20</a:t>
             </a:fld>
             <a:endParaRPr lang="en-US"/>
           </a:p>
@@ -1199,7 +1193,7 @@
           <a:lstStyle/>
           <a:p>
             <a:fld id="{39706E35-983D-0347-A1AE-A115ADC385D9}" type="datetimeFigureOut">
-              <a:t>10/16/20</a:t>
+              <a:t>27.11.20</a:t>
             </a:fld>
             <a:endParaRPr lang="en-US"/>
           </a:p>
@@ -1462,7 +1456,7 @@
           <a:lstStyle/>
           <a:p>
             <a:fld id="{39706E35-983D-0347-A1AE-A115ADC385D9}" type="datetimeFigureOut">
-              <a:t>10/16/20</a:t>
+              <a:t>27.11.20</a:t>
             </a:fld>
             <a:endParaRPr lang="en-US"/>
           </a:p>
@@ -1872,7 +1866,7 @@
           <a:lstStyle/>
           <a:p>
             <a:fld id="{39706E35-983D-0347-A1AE-A115ADC385D9}" type="datetimeFigureOut">
-              <a:t>10/16/20</a:t>
+              <a:t>27.11.20</a:t>
             </a:fld>
             <a:endParaRPr lang="en-US"/>
           </a:p>
@@ -2011,7 +2005,7 @@
           <a:lstStyle/>
           <a:p>
             <a:fld id="{39706E35-983D-0347-A1AE-A115ADC385D9}" type="datetimeFigureOut">
-              <a:t>10/16/20</a:t>
+              <a:t>27.11.20</a:t>
             </a:fld>
             <a:endParaRPr lang="en-US"/>
           </a:p>
@@ -2122,7 +2116,7 @@
           <a:lstStyle/>
           <a:p>
             <a:fld id="{39706E35-983D-0347-A1AE-A115ADC385D9}" type="datetimeFigureOut">
-              <a:t>10/16/20</a:t>
+              <a:t>27.11.20</a:t>
             </a:fld>
             <a:endParaRPr lang="en-US"/>
           </a:p>
@@ -2431,7 +2425,7 @@
           <a:lstStyle/>
           <a:p>
             <a:fld id="{39706E35-983D-0347-A1AE-A115ADC385D9}" type="datetimeFigureOut">
-              <a:t>10/16/20</a:t>
+              <a:t>27.11.20</a:t>
             </a:fld>
             <a:endParaRPr lang="en-US"/>
           </a:p>
@@ -2717,7 +2711,7 @@
           <a:lstStyle/>
           <a:p>
             <a:fld id="{39706E35-983D-0347-A1AE-A115ADC385D9}" type="datetimeFigureOut">
-              <a:t>10/16/20</a:t>
+              <a:t>27.11.20</a:t>
             </a:fld>
             <a:endParaRPr lang="en-US"/>
           </a:p>
@@ -2956,7 +2950,7 @@
           </a:lstStyle>
           <a:p>
             <a:fld id="{39706E35-983D-0347-A1AE-A115ADC385D9}" type="datetimeFigureOut">
-              <a:t>10/16/20</a:t>
+              <a:t>27.11.20</a:t>
             </a:fld>
             <a:endParaRPr lang="en-US"/>
           </a:p>
@@ -8760,8 +8754,8 @@
           </a:p>
         </p:txBody>
       </p:sp>
-      <mc:AlternateContent xmlns:mc="http://schemas.openxmlformats.org/markup-compatibility/2006">
-        <mc:Choice xmlns:a14="http://schemas.microsoft.com/office/drawing/2010/main" Requires="a14">
+      <mc:AlternateContent xmlns:mc="http://schemas.openxmlformats.org/markup-compatibility/2006" xmlns:a14="http://schemas.microsoft.com/office/drawing/2010/main">
+        <mc:Choice Requires="a14">
           <p:sp>
             <p:nvSpPr>
               <p:cNvPr id="3" name="Content Placeholder 2"/>
@@ -9149,26 +9143,7 @@
                       <a:rPr lang="en-US" i="1" dirty="0">
                         <a:latin typeface="Cambria Math" panose="02040503050406030204" pitchFamily="18" charset="0"/>
                       </a:rPr>
-                      <m:t> = 0, 1</m:t>
-                    </m:r>
-                    <m:r>
-                      <a:rPr lang="en-US" i="1" dirty="0">
-                        <a:latin typeface="Cambria Math" panose="02040503050406030204" pitchFamily="18" charset="0"/>
-                      </a:rPr>
-                      <m:t>, </m:t>
-                    </m:r>
-                    <m:r>
-                      <a:rPr lang="en-US" i="1" dirty="0">
-                        <a:latin typeface="Cambria Math" panose="02040503050406030204" pitchFamily="18" charset="0"/>
-                        <a:ea typeface="Cambria Math" pitchFamily="18" charset="0"/>
-                      </a:rPr>
-                      <m:t>2</m:t>
-                    </m:r>
-                    <m:r>
-                      <a:rPr lang="en-US" i="1" dirty="0">
-                        <a:latin typeface="Cambria Math" panose="02040503050406030204" pitchFamily="18" charset="0"/>
-                      </a:rPr>
-                      <m:t>,… </m:t>
+                      <m:t> = 0, 1, 2,… </m:t>
                     </m:r>
                   </m:oMath>
                 </a14:m>
@@ -9237,7 +9212,7 @@
             </p:txBody>
           </p:sp>
         </mc:Choice>
-        <mc:Fallback>
+        <mc:Fallback xmlns="">
           <p:sp>
             <p:nvSpPr>
               <p:cNvPr id="3" name="Content Placeholder 2"/>
@@ -11199,7 +11174,7 @@
             </a:r>
             <a:r>
               <a:rPr lang="en-US" dirty="0"/>
-              <a:t>} is a solution to the recurrence  relation </a:t>
+              <a:t>}  is a solution to the recurrence  relation </a:t>
             </a:r>
             <a:r>
               <a:rPr lang="en-US" i="1" dirty="0"/>
@@ -11313,12 +11288,6 @@
             <a:r>
               <a:rPr lang="el-GR" dirty="0"/>
               <a:t>α</a:t>
-            </a:r>
-            <a:r>
-              <a:rPr lang="en-US" baseline="-25000" dirty="0">
-                <a:ea typeface="Cambria Math" pitchFamily="18" charset="0"/>
-              </a:rPr>
-              <a:t>1</a:t>
             </a:r>
             <a:r>
               <a:rPr lang="en-US" baseline="-25000" dirty="0"/>
@@ -12295,501 +12264,761 @@
           </a:p>
         </p:txBody>
       </p:sp>
-      <p:sp>
-        <p:nvSpPr>
-          <p:cNvPr id="3" name="Content Placeholder 2"/>
-          <p:cNvSpPr>
-            <a:spLocks noGrp="1"/>
-          </p:cNvSpPr>
-          <p:nvPr>
-            <p:ph idx="1"/>
-          </p:nvPr>
-        </p:nvSpPr>
-        <p:spPr/>
-        <p:txBody>
-          <a:bodyPr>
-            <a:normAutofit/>
-          </a:bodyPr>
-          <a:lstStyle/>
-          <a:p>
-            <a:pPr>
-              <a:buNone/>
-            </a:pPr>
-            <a:r>
-              <a:rPr lang="en-US" b="1" dirty="0"/>
-              <a:t>Theorem </a:t>
-            </a:r>
-            <a:r>
-              <a:rPr lang="en-US" b="1" dirty="0">
-                <a:ea typeface="Cambria Math" pitchFamily="18" charset="0"/>
-              </a:rPr>
-              <a:t>3</a:t>
-            </a:r>
-            <a:r>
-              <a:rPr lang="en-US" dirty="0"/>
-              <a:t>: Let </a:t>
-            </a:r>
-            <a:r>
-              <a:rPr lang="en-US" i="1" dirty="0"/>
-              <a:t>c</a:t>
-            </a:r>
-            <a:r>
-              <a:rPr lang="en-US" baseline="-25000" dirty="0">
-                <a:ea typeface="Cambria Math" pitchFamily="18" charset="0"/>
-              </a:rPr>
-              <a:t>1</a:t>
-            </a:r>
-            <a:r>
-              <a:rPr lang="en-US" dirty="0"/>
-              <a:t>, </a:t>
-            </a:r>
-            <a:r>
-              <a:rPr lang="en-US" i="1" dirty="0"/>
-              <a:t>c</a:t>
-            </a:r>
-            <a:r>
-              <a:rPr lang="en-US" baseline="-25000" dirty="0">
-                <a:ea typeface="Cambria Math" pitchFamily="18" charset="0"/>
-              </a:rPr>
-              <a:t>2</a:t>
-            </a:r>
-            <a:r>
-              <a:rPr lang="en-US" i="1" dirty="0"/>
-              <a:t> ,…, c</a:t>
-            </a:r>
-            <a:r>
-              <a:rPr lang="en-US" i="1" baseline="-25000" dirty="0">
-                <a:ea typeface="Cambria Math" pitchFamily="18" charset="0"/>
-              </a:rPr>
-              <a:t>k</a:t>
-            </a:r>
-            <a:r>
-              <a:rPr lang="en-US" dirty="0"/>
-              <a:t> be real numbers. Suppose that the characteristic equation                   </a:t>
-            </a:r>
-          </a:p>
-          <a:p>
-            <a:pPr>
-              <a:buNone/>
-            </a:pPr>
-            <a:r>
-              <a:rPr lang="en-US" i="1" dirty="0"/>
-              <a:t>          </a:t>
-            </a:r>
-            <a:r>
-              <a:rPr lang="en-US" i="1" dirty="0" err="1"/>
-              <a:t>r</a:t>
-            </a:r>
-            <a:r>
-              <a:rPr lang="en-US" i="1" baseline="30000" dirty="0" err="1">
-                <a:ea typeface="Cambria Math" pitchFamily="18" charset="0"/>
-              </a:rPr>
-              <a:t>k</a:t>
-            </a:r>
-            <a:r>
-              <a:rPr lang="en-US" i="1" dirty="0"/>
-              <a:t> – c</a:t>
-            </a:r>
-            <a:r>
-              <a:rPr lang="en-US" baseline="-25000" dirty="0">
-                <a:ea typeface="Cambria Math" pitchFamily="18" charset="0"/>
-              </a:rPr>
-              <a:t>1</a:t>
-            </a:r>
-            <a:r>
-              <a:rPr lang="en-US" i="1" dirty="0"/>
-              <a:t>r</a:t>
-            </a:r>
-            <a:r>
-              <a:rPr lang="en-US" i="1" baseline="30000" dirty="0"/>
-              <a:t>k</a:t>
-            </a:r>
-            <a:r>
-              <a:rPr lang="en-US" baseline="30000" dirty="0">
-                <a:ea typeface="Cambria Math"/>
-              </a:rPr>
-              <a:t>−1</a:t>
-            </a:r>
-            <a:r>
-              <a:rPr lang="en-US" i="1" baseline="30000" dirty="0"/>
-              <a:t> </a:t>
-            </a:r>
-            <a:r>
-              <a:rPr lang="en-US" dirty="0">
-                <a:ea typeface="Cambria Math" pitchFamily="18" charset="0"/>
-              </a:rPr>
-              <a:t>– </a:t>
-            </a:r>
-            <a:r>
-              <a:rPr lang="en-US" dirty="0"/>
-              <a:t>…</a:t>
-            </a:r>
-            <a:r>
-              <a:rPr lang="en-US" dirty="0">
-                <a:ea typeface="Cambria Math" pitchFamily="18" charset="0"/>
-              </a:rPr>
-              <a:t>  –</a:t>
-            </a:r>
-            <a:r>
-              <a:rPr lang="en-US" i="1" dirty="0"/>
-              <a:t> c</a:t>
-            </a:r>
-            <a:r>
-              <a:rPr lang="en-US" i="1" baseline="-25000" dirty="0">
-                <a:ea typeface="Cambria Math" pitchFamily="18" charset="0"/>
-              </a:rPr>
-              <a:t>k</a:t>
-            </a:r>
-            <a:r>
-              <a:rPr lang="en-US" i="1" dirty="0"/>
-              <a:t> = </a:t>
-            </a:r>
-            <a:r>
-              <a:rPr lang="en-US" dirty="0">
-                <a:ea typeface="Cambria Math" pitchFamily="18" charset="0"/>
-              </a:rPr>
-              <a:t>0</a:t>
-            </a:r>
-            <a:r>
-              <a:rPr lang="en-US" i="1" dirty="0"/>
-              <a:t> </a:t>
-            </a:r>
-          </a:p>
-          <a:p>
-            <a:pPr>
-              <a:buNone/>
-            </a:pPr>
-            <a:r>
-              <a:rPr lang="en-US" i="1" dirty="0"/>
-              <a:t>   </a:t>
-            </a:r>
-            <a:r>
-              <a:rPr lang="en-US" dirty="0"/>
-              <a:t>has</a:t>
-            </a:r>
-            <a:r>
-              <a:rPr lang="en-US" i="1" dirty="0"/>
-              <a:t> k </a:t>
-            </a:r>
-            <a:r>
-              <a:rPr lang="en-US" dirty="0"/>
-              <a:t>distinct roots </a:t>
-            </a:r>
-            <a:r>
-              <a:rPr lang="en-US" i="1" dirty="0"/>
-              <a:t>r</a:t>
-            </a:r>
-            <a:r>
-              <a:rPr lang="en-US" baseline="-25000" dirty="0">
-                <a:ea typeface="Cambria Math" pitchFamily="18" charset="0"/>
-              </a:rPr>
-              <a:t>1</a:t>
-            </a:r>
-            <a:r>
-              <a:rPr lang="en-US" dirty="0"/>
-              <a:t>, </a:t>
-            </a:r>
-            <a:r>
-              <a:rPr lang="en-US" i="1" dirty="0"/>
-              <a:t>r</a:t>
-            </a:r>
-            <a:r>
-              <a:rPr lang="en-US" baseline="-25000" dirty="0">
-                <a:ea typeface="Cambria Math" pitchFamily="18" charset="0"/>
-              </a:rPr>
-              <a:t>2</a:t>
-            </a:r>
-            <a:r>
-              <a:rPr lang="en-US" dirty="0"/>
-              <a:t>, …, </a:t>
-            </a:r>
-            <a:r>
-              <a:rPr lang="en-US" i="1" dirty="0" err="1"/>
-              <a:t>r</a:t>
-            </a:r>
-            <a:r>
-              <a:rPr lang="en-US" i="1" baseline="-25000" dirty="0" err="1"/>
-              <a:t>k</a:t>
-            </a:r>
-            <a:r>
-              <a:rPr lang="en-US" dirty="0"/>
-              <a:t>. Then a sequence {</a:t>
-            </a:r>
-            <a:r>
-              <a:rPr lang="en-US" i="1" dirty="0"/>
-              <a:t>a</a:t>
-            </a:r>
-            <a:r>
-              <a:rPr lang="en-US" i="1" baseline="-25000" dirty="0"/>
-              <a:t>n</a:t>
-            </a:r>
-            <a:r>
-              <a:rPr lang="en-US" dirty="0"/>
-              <a:t>}   is a solution of the recurrence relation</a:t>
-            </a:r>
-          </a:p>
-          <a:p>
-            <a:pPr>
-              <a:buNone/>
-            </a:pPr>
-            <a:r>
-              <a:rPr lang="en-US" dirty="0"/>
-              <a:t>        </a:t>
-            </a:r>
-            <a:r>
-              <a:rPr lang="en-US" i="1" dirty="0"/>
-              <a:t>a</a:t>
-            </a:r>
-            <a:r>
-              <a:rPr lang="en-US" i="1" baseline="-25000" dirty="0"/>
-              <a:t>n</a:t>
-            </a:r>
-            <a:r>
-              <a:rPr lang="en-US" i="1" dirty="0"/>
-              <a:t> = c</a:t>
-            </a:r>
-            <a:r>
-              <a:rPr lang="en-US" baseline="-25000" dirty="0">
-                <a:ea typeface="Cambria Math" pitchFamily="18" charset="0"/>
-              </a:rPr>
-              <a:t>1</a:t>
-            </a:r>
-            <a:r>
-              <a:rPr lang="en-US" i="1" dirty="0"/>
-              <a:t>a</a:t>
-            </a:r>
-            <a:r>
-              <a:rPr lang="en-US" i="1" baseline="-25000" dirty="0"/>
-              <a:t>n</a:t>
-            </a:r>
-            <a:r>
-              <a:rPr lang="en-US" i="1" baseline="-25000" dirty="0">
-                <a:ea typeface="Cambria Math"/>
-              </a:rPr>
-              <a:t>−</a:t>
-            </a:r>
-            <a:r>
-              <a:rPr lang="en-US" baseline="-25000" dirty="0">
-                <a:ea typeface="Cambria Math" pitchFamily="18" charset="0"/>
-              </a:rPr>
-              <a:t>1</a:t>
-            </a:r>
-            <a:r>
-              <a:rPr lang="en-US" i="1" baseline="-25000" dirty="0"/>
-              <a:t> </a:t>
-            </a:r>
-            <a:r>
-              <a:rPr lang="en-US" i="1" dirty="0"/>
-              <a:t>+ c</a:t>
-            </a:r>
-            <a:r>
-              <a:rPr lang="en-US" baseline="-25000" dirty="0">
-                <a:ea typeface="Cambria Math" pitchFamily="18" charset="0"/>
-              </a:rPr>
-              <a:t>2</a:t>
-            </a:r>
-            <a:r>
-              <a:rPr lang="en-US" i="1" dirty="0"/>
-              <a:t>a</a:t>
-            </a:r>
-            <a:r>
-              <a:rPr lang="en-US" i="1" baseline="-25000" dirty="0"/>
-              <a:t>n</a:t>
-            </a:r>
-            <a:r>
-              <a:rPr lang="en-US" i="1" baseline="-25000" dirty="0">
-                <a:ea typeface="Cambria Math"/>
-              </a:rPr>
-              <a:t>−</a:t>
-            </a:r>
-            <a:r>
-              <a:rPr lang="en-US" baseline="-25000" dirty="0">
-                <a:ea typeface="Cambria Math" pitchFamily="18" charset="0"/>
-              </a:rPr>
-              <a:t>2</a:t>
-            </a:r>
-            <a:r>
-              <a:rPr lang="en-US" i="1" dirty="0"/>
-              <a:t> + ….. + c</a:t>
-            </a:r>
-            <a:r>
-              <a:rPr lang="en-US" i="1" baseline="-25000" dirty="0"/>
-              <a:t>k</a:t>
-            </a:r>
-            <a:r>
-              <a:rPr lang="en-US" i="1" dirty="0"/>
-              <a:t> a</a:t>
-            </a:r>
-            <a:r>
-              <a:rPr lang="en-US" i="1" baseline="-25000" dirty="0"/>
-              <a:t>n</a:t>
-            </a:r>
-            <a:r>
-              <a:rPr lang="en-US" i="1" baseline="-25000" dirty="0">
-                <a:ea typeface="Cambria Math"/>
-              </a:rPr>
-              <a:t>−</a:t>
-            </a:r>
-            <a:r>
-              <a:rPr lang="en-US" i="1" baseline="-25000" dirty="0"/>
-              <a:t>k</a:t>
-            </a:r>
-          </a:p>
-          <a:p>
-            <a:pPr>
-              <a:buNone/>
-            </a:pPr>
-            <a:r>
-              <a:rPr lang="en-US" i="1" baseline="-25000" dirty="0"/>
-              <a:t>      </a:t>
-            </a:r>
-            <a:r>
-              <a:rPr lang="en-US" dirty="0"/>
-              <a:t>if and only if</a:t>
-            </a:r>
-          </a:p>
-          <a:p>
-            <a:pPr>
-              <a:buNone/>
-            </a:pPr>
-            <a:endParaRPr lang="en-US" dirty="0"/>
-          </a:p>
-          <a:p>
-            <a:pPr>
-              <a:buNone/>
-            </a:pPr>
-            <a:r>
-              <a:rPr lang="en-US" dirty="0"/>
-              <a:t>    for </a:t>
-            </a:r>
-            <a:r>
-              <a:rPr lang="en-US" i="1" dirty="0"/>
-              <a:t>n</a:t>
-            </a:r>
-            <a:r>
-              <a:rPr lang="en-US" dirty="0"/>
-              <a:t> = </a:t>
-            </a:r>
-            <a:r>
-              <a:rPr lang="en-US" dirty="0">
-                <a:ea typeface="Cambria Math" pitchFamily="18" charset="0"/>
-              </a:rPr>
-              <a:t>0</a:t>
-            </a:r>
-            <a:r>
-              <a:rPr lang="en-US" dirty="0"/>
-              <a:t>, </a:t>
-            </a:r>
-            <a:r>
-              <a:rPr lang="en-US" dirty="0">
-                <a:ea typeface="Cambria Math" pitchFamily="18" charset="0"/>
-              </a:rPr>
-              <a:t>1</a:t>
-            </a:r>
-            <a:r>
-              <a:rPr lang="en-US" dirty="0"/>
-              <a:t>, </a:t>
-            </a:r>
-            <a:r>
-              <a:rPr lang="en-US" dirty="0">
-                <a:ea typeface="Cambria Math" pitchFamily="18" charset="0"/>
-              </a:rPr>
-              <a:t>2</a:t>
-            </a:r>
-            <a:r>
-              <a:rPr lang="en-US" dirty="0"/>
-              <a:t>, …, where </a:t>
-            </a:r>
-            <a:r>
-              <a:rPr lang="el-GR" dirty="0">
-                <a:ea typeface="Cambria Math"/>
-              </a:rPr>
-              <a:t>α</a:t>
-            </a:r>
-            <a:r>
-              <a:rPr lang="en-US" baseline="-25000" dirty="0">
-                <a:ea typeface="Cambria Math"/>
-              </a:rPr>
-              <a:t>1</a:t>
-            </a:r>
-            <a:r>
-              <a:rPr lang="en-US" dirty="0">
-                <a:ea typeface="Cambria Math"/>
-              </a:rPr>
-              <a:t>,</a:t>
-            </a:r>
-            <a:r>
-              <a:rPr lang="en-US" dirty="0"/>
-              <a:t> </a:t>
-            </a:r>
-            <a:r>
-              <a:rPr lang="el-GR" dirty="0">
-                <a:ea typeface="Cambria Math"/>
-              </a:rPr>
-              <a:t>α</a:t>
-            </a:r>
-            <a:r>
-              <a:rPr lang="en-US" baseline="-25000" dirty="0">
-                <a:ea typeface="Cambria Math"/>
-              </a:rPr>
-              <a:t>2</a:t>
-            </a:r>
-            <a:r>
-              <a:rPr lang="en-US" dirty="0">
-                <a:ea typeface="Cambria Math"/>
-              </a:rPr>
-              <a:t>,…,</a:t>
-            </a:r>
-            <a:r>
-              <a:rPr lang="el-GR" dirty="0">
-                <a:ea typeface="Cambria Math"/>
-              </a:rPr>
-              <a:t> α</a:t>
-            </a:r>
-            <a:r>
-              <a:rPr lang="en-US" i="1" baseline="-25000" dirty="0">
-                <a:ea typeface="Cambria Math"/>
-              </a:rPr>
-              <a:t>k</a:t>
-            </a:r>
-            <a:r>
-              <a:rPr lang="en-US" dirty="0">
-                <a:ea typeface="Cambria Math"/>
-              </a:rPr>
-              <a:t> are constants. </a:t>
-            </a:r>
-            <a:endParaRPr lang="en-US" dirty="0"/>
-          </a:p>
-        </p:txBody>
-      </p:sp>
-      <p:pic>
-        <p:nvPicPr>
-          <p:cNvPr id="5" name="Picture 4" descr="addin_tmp.png"/>
-          <p:cNvPicPr>
-            <a:picLocks noChangeAspect="1"/>
-          </p:cNvPicPr>
-          <p:nvPr>
-            <p:custDataLst>
-              <p:tags r:id="rId1"/>
-            </p:custDataLst>
-          </p:nvPr>
-        </p:nvPicPr>
-        <p:blipFill>
-          <a:blip r:embed="rId3" cstate="print"/>
-          <a:stretch>
-            <a:fillRect/>
-          </a:stretch>
-        </p:blipFill>
-        <p:spPr>
-          <a:xfrm>
-            <a:off x="1641764" y="5161979"/>
-            <a:ext cx="4688300" cy="329184"/>
-          </a:xfrm>
-          <a:prstGeom prst="rect">
-            <a:avLst/>
-          </a:prstGeom>
-        </p:spPr>
-      </p:pic>
+      <mc:AlternateContent xmlns:mc="http://schemas.openxmlformats.org/markup-compatibility/2006" xmlns:a14="http://schemas.microsoft.com/office/drawing/2010/main">
+        <mc:Choice Requires="a14">
+          <p:sp>
+            <p:nvSpPr>
+              <p:cNvPr id="3" name="Content Placeholder 2"/>
+              <p:cNvSpPr>
+                <a:spLocks noGrp="1"/>
+              </p:cNvSpPr>
+              <p:nvPr>
+                <p:ph idx="1"/>
+              </p:nvPr>
+            </p:nvSpPr>
+            <p:spPr/>
+            <p:txBody>
+              <a:bodyPr>
+                <a:normAutofit/>
+              </a:bodyPr>
+              <a:lstStyle/>
+              <a:p>
+                <a:pPr>
+                  <a:buNone/>
+                </a:pPr>
+                <a:r>
+                  <a:rPr lang="en-US" b="1" dirty="0"/>
+                  <a:t>Theorem </a:t>
+                </a:r>
+                <a:r>
+                  <a:rPr lang="en-US" b="1" dirty="0">
+                    <a:ea typeface="Cambria Math" pitchFamily="18" charset="0"/>
+                  </a:rPr>
+                  <a:t>3</a:t>
+                </a:r>
+                <a:r>
+                  <a:rPr lang="en-US" dirty="0"/>
+                  <a:t>: Let </a:t>
+                </a:r>
+                <a:r>
+                  <a:rPr lang="en-US" i="1" dirty="0"/>
+                  <a:t>c</a:t>
+                </a:r>
+                <a:r>
+                  <a:rPr lang="en-US" baseline="-25000" dirty="0">
+                    <a:ea typeface="Cambria Math" pitchFamily="18" charset="0"/>
+                  </a:rPr>
+                  <a:t>1</a:t>
+                </a:r>
+                <a:r>
+                  <a:rPr lang="en-US" dirty="0"/>
+                  <a:t>, </a:t>
+                </a:r>
+                <a:r>
+                  <a:rPr lang="en-US" i="1" dirty="0"/>
+                  <a:t>c</a:t>
+                </a:r>
+                <a:r>
+                  <a:rPr lang="en-US" baseline="-25000" dirty="0">
+                    <a:ea typeface="Cambria Math" pitchFamily="18" charset="0"/>
+                  </a:rPr>
+                  <a:t>2</a:t>
+                </a:r>
+                <a:r>
+                  <a:rPr lang="en-US" i="1" dirty="0"/>
+                  <a:t> ,…, c</a:t>
+                </a:r>
+                <a:r>
+                  <a:rPr lang="en-US" i="1" baseline="-25000" dirty="0">
+                    <a:ea typeface="Cambria Math" pitchFamily="18" charset="0"/>
+                  </a:rPr>
+                  <a:t>k</a:t>
+                </a:r>
+                <a:r>
+                  <a:rPr lang="en-US" dirty="0"/>
+                  <a:t> be real numbers. Suppose that the characteristic equation                   </a:t>
+                </a:r>
+              </a:p>
+              <a:p>
+                <a:pPr>
+                  <a:buNone/>
+                </a:pPr>
+                <a:r>
+                  <a:rPr lang="en-US" i="1" dirty="0"/>
+                  <a:t>          </a:t>
+                </a:r>
+                <a:r>
+                  <a:rPr lang="en-US" i="1" dirty="0" err="1"/>
+                  <a:t>r</a:t>
+                </a:r>
+                <a:r>
+                  <a:rPr lang="en-US" i="1" baseline="30000" dirty="0" err="1">
+                    <a:ea typeface="Cambria Math" pitchFamily="18" charset="0"/>
+                  </a:rPr>
+                  <a:t>k</a:t>
+                </a:r>
+                <a:r>
+                  <a:rPr lang="en-US" i="1" dirty="0"/>
+                  <a:t> – c</a:t>
+                </a:r>
+                <a:r>
+                  <a:rPr lang="en-US" baseline="-25000" dirty="0">
+                    <a:ea typeface="Cambria Math" pitchFamily="18" charset="0"/>
+                  </a:rPr>
+                  <a:t>1</a:t>
+                </a:r>
+                <a:r>
+                  <a:rPr lang="en-US" i="1" dirty="0"/>
+                  <a:t>r</a:t>
+                </a:r>
+                <a:r>
+                  <a:rPr lang="en-US" i="1" baseline="30000" dirty="0"/>
+                  <a:t>k</a:t>
+                </a:r>
+                <a:r>
+                  <a:rPr lang="en-US" baseline="30000" dirty="0">
+                    <a:ea typeface="Cambria Math"/>
+                  </a:rPr>
+                  <a:t>−1</a:t>
+                </a:r>
+                <a:r>
+                  <a:rPr lang="en-US" i="1" baseline="30000" dirty="0"/>
+                  <a:t> </a:t>
+                </a:r>
+                <a:r>
+                  <a:rPr lang="en-US" dirty="0">
+                    <a:ea typeface="Cambria Math" pitchFamily="18" charset="0"/>
+                  </a:rPr>
+                  <a:t>– </a:t>
+                </a:r>
+                <a:r>
+                  <a:rPr lang="en-US" dirty="0"/>
+                  <a:t>…</a:t>
+                </a:r>
+                <a:r>
+                  <a:rPr lang="en-US" dirty="0">
+                    <a:ea typeface="Cambria Math" pitchFamily="18" charset="0"/>
+                  </a:rPr>
+                  <a:t>  –</a:t>
+                </a:r>
+                <a:r>
+                  <a:rPr lang="en-US" i="1" dirty="0"/>
+                  <a:t> c</a:t>
+                </a:r>
+                <a:r>
+                  <a:rPr lang="en-US" i="1" baseline="-25000" dirty="0">
+                    <a:ea typeface="Cambria Math" pitchFamily="18" charset="0"/>
+                  </a:rPr>
+                  <a:t>k</a:t>
+                </a:r>
+                <a:r>
+                  <a:rPr lang="en-US" i="1" dirty="0"/>
+                  <a:t> = </a:t>
+                </a:r>
+                <a:r>
+                  <a:rPr lang="en-US" dirty="0">
+                    <a:ea typeface="Cambria Math" pitchFamily="18" charset="0"/>
+                  </a:rPr>
+                  <a:t>0</a:t>
+                </a:r>
+                <a:r>
+                  <a:rPr lang="en-US" i="1" dirty="0"/>
+                  <a:t> </a:t>
+                </a:r>
+              </a:p>
+              <a:p>
+                <a:pPr>
+                  <a:buNone/>
+                </a:pPr>
+                <a:r>
+                  <a:rPr lang="en-US" i="1" dirty="0"/>
+                  <a:t>   </a:t>
+                </a:r>
+                <a:r>
+                  <a:rPr lang="en-US" dirty="0"/>
+                  <a:t>has</a:t>
+                </a:r>
+                <a:r>
+                  <a:rPr lang="en-US" i="1" dirty="0"/>
+                  <a:t> k </a:t>
+                </a:r>
+                <a:r>
+                  <a:rPr lang="en-US" dirty="0"/>
+                  <a:t>distinct roots </a:t>
+                </a:r>
+                <a:r>
+                  <a:rPr lang="en-US" i="1" dirty="0"/>
+                  <a:t>r</a:t>
+                </a:r>
+                <a:r>
+                  <a:rPr lang="en-US" baseline="-25000" dirty="0">
+                    <a:ea typeface="Cambria Math" pitchFamily="18" charset="0"/>
+                  </a:rPr>
+                  <a:t>1</a:t>
+                </a:r>
+                <a:r>
+                  <a:rPr lang="en-US" dirty="0"/>
+                  <a:t>, </a:t>
+                </a:r>
+                <a:r>
+                  <a:rPr lang="en-US" i="1" dirty="0"/>
+                  <a:t>r</a:t>
+                </a:r>
+                <a:r>
+                  <a:rPr lang="en-US" baseline="-25000" dirty="0">
+                    <a:ea typeface="Cambria Math" pitchFamily="18" charset="0"/>
+                  </a:rPr>
+                  <a:t>2</a:t>
+                </a:r>
+                <a:r>
+                  <a:rPr lang="en-US" dirty="0"/>
+                  <a:t>, …, </a:t>
+                </a:r>
+                <a:r>
+                  <a:rPr lang="en-US" i="1" dirty="0" err="1"/>
+                  <a:t>r</a:t>
+                </a:r>
+                <a:r>
+                  <a:rPr lang="en-US" i="1" baseline="-25000" dirty="0" err="1"/>
+                  <a:t>k</a:t>
+                </a:r>
+                <a:r>
+                  <a:rPr lang="en-US" dirty="0"/>
+                  <a:t>. Then a sequence {</a:t>
+                </a:r>
+                <a:r>
+                  <a:rPr lang="en-US" i="1" dirty="0"/>
+                  <a:t>a</a:t>
+                </a:r>
+                <a:r>
+                  <a:rPr lang="en-US" i="1" baseline="-25000" dirty="0"/>
+                  <a:t>n</a:t>
+                </a:r>
+                <a:r>
+                  <a:rPr lang="en-US" dirty="0"/>
+                  <a:t>}   is a solution of the recurrence relation</a:t>
+                </a:r>
+              </a:p>
+              <a:p>
+                <a:pPr>
+                  <a:buNone/>
+                </a:pPr>
+                <a:r>
+                  <a:rPr lang="en-US" dirty="0"/>
+                  <a:t>        	</a:t>
+                </a:r>
+                <a:r>
+                  <a:rPr lang="en-US" i="1" dirty="0"/>
+                  <a:t>a</a:t>
+                </a:r>
+                <a:r>
+                  <a:rPr lang="en-US" i="1" baseline="-25000" dirty="0"/>
+                  <a:t>n</a:t>
+                </a:r>
+                <a:r>
+                  <a:rPr lang="en-US" i="1" dirty="0"/>
+                  <a:t> = c</a:t>
+                </a:r>
+                <a:r>
+                  <a:rPr lang="en-US" baseline="-25000" dirty="0">
+                    <a:ea typeface="Cambria Math" pitchFamily="18" charset="0"/>
+                  </a:rPr>
+                  <a:t>1</a:t>
+                </a:r>
+                <a:r>
+                  <a:rPr lang="en-US" i="1" dirty="0"/>
+                  <a:t>a</a:t>
+                </a:r>
+                <a:r>
+                  <a:rPr lang="en-US" i="1" baseline="-25000" dirty="0"/>
+                  <a:t>n</a:t>
+                </a:r>
+                <a:r>
+                  <a:rPr lang="en-US" i="1" baseline="-25000" dirty="0">
+                    <a:ea typeface="Cambria Math"/>
+                  </a:rPr>
+                  <a:t>−</a:t>
+                </a:r>
+                <a:r>
+                  <a:rPr lang="en-US" baseline="-25000" dirty="0">
+                    <a:ea typeface="Cambria Math" pitchFamily="18" charset="0"/>
+                  </a:rPr>
+                  <a:t>1</a:t>
+                </a:r>
+                <a:r>
+                  <a:rPr lang="en-US" i="1" baseline="-25000" dirty="0"/>
+                  <a:t> </a:t>
+                </a:r>
+                <a:r>
+                  <a:rPr lang="en-US" i="1" dirty="0"/>
+                  <a:t>+ c</a:t>
+                </a:r>
+                <a:r>
+                  <a:rPr lang="en-US" baseline="-25000" dirty="0">
+                    <a:ea typeface="Cambria Math" pitchFamily="18" charset="0"/>
+                  </a:rPr>
+                  <a:t>2</a:t>
+                </a:r>
+                <a:r>
+                  <a:rPr lang="en-US" i="1" dirty="0"/>
+                  <a:t>a</a:t>
+                </a:r>
+                <a:r>
+                  <a:rPr lang="en-US" i="1" baseline="-25000" dirty="0"/>
+                  <a:t>n</a:t>
+                </a:r>
+                <a:r>
+                  <a:rPr lang="en-US" i="1" baseline="-25000" dirty="0">
+                    <a:ea typeface="Cambria Math"/>
+                  </a:rPr>
+                  <a:t>−</a:t>
+                </a:r>
+                <a:r>
+                  <a:rPr lang="en-US" baseline="-25000" dirty="0">
+                    <a:ea typeface="Cambria Math" pitchFamily="18" charset="0"/>
+                  </a:rPr>
+                  <a:t>2</a:t>
+                </a:r>
+                <a:r>
+                  <a:rPr lang="en-US" i="1" dirty="0"/>
+                  <a:t> + ….. + c</a:t>
+                </a:r>
+                <a:r>
+                  <a:rPr lang="en-US" i="1" baseline="-25000" dirty="0"/>
+                  <a:t>k</a:t>
+                </a:r>
+                <a:r>
+                  <a:rPr lang="en-US" i="1" dirty="0"/>
+                  <a:t> a</a:t>
+                </a:r>
+                <a:r>
+                  <a:rPr lang="en-US" i="1" baseline="-25000" dirty="0"/>
+                  <a:t>n</a:t>
+                </a:r>
+                <a:r>
+                  <a:rPr lang="en-US" i="1" baseline="-25000" dirty="0">
+                    <a:ea typeface="Cambria Math"/>
+                  </a:rPr>
+                  <a:t>−</a:t>
+                </a:r>
+                <a:r>
+                  <a:rPr lang="en-US" i="1" baseline="-25000" dirty="0"/>
+                  <a:t>k</a:t>
+                </a:r>
+              </a:p>
+              <a:p>
+                <a:pPr>
+                  <a:buNone/>
+                </a:pPr>
+                <a:r>
+                  <a:rPr lang="en-US" i="1" baseline="-25000" dirty="0"/>
+                  <a:t>      </a:t>
+                </a:r>
+                <a:r>
+                  <a:rPr lang="en-US" dirty="0"/>
+                  <a:t>if and only if</a:t>
+                </a:r>
+                <a:endParaRPr lang="fr-CH" i="1" dirty="0">
+                  <a:latin typeface="Cambria Math" panose="02040503050406030204" pitchFamily="18" charset="0"/>
+                </a:endParaRPr>
+              </a:p>
+              <a:p>
+                <a:pPr>
+                  <a:buNone/>
+                </a:pPr>
+                <a:r>
+                  <a:rPr lang="en-US" dirty="0"/>
+                  <a:t>		</a:t>
+                </a:r>
+                <a14:m>
+                  <m:oMath xmlns:m="http://schemas.openxmlformats.org/officeDocument/2006/math">
+                    <m:sSub>
+                      <m:sSubPr>
+                        <m:ctrlPr>
+                          <a:rPr lang="en-US" i="1" smtClean="0">
+                            <a:latin typeface="Cambria Math" panose="02040503050406030204" pitchFamily="18" charset="0"/>
+                          </a:rPr>
+                        </m:ctrlPr>
+                      </m:sSubPr>
+                      <m:e>
+                        <m:r>
+                          <a:rPr lang="fr-CH" b="0" i="1" smtClean="0">
+                            <a:latin typeface="Cambria Math" panose="02040503050406030204" pitchFamily="18" charset="0"/>
+                          </a:rPr>
+                          <m:t>𝑎</m:t>
+                        </m:r>
+                      </m:e>
+                      <m:sub>
+                        <m:r>
+                          <a:rPr lang="fr-CH" b="0" i="1" smtClean="0">
+                            <a:latin typeface="Cambria Math" panose="02040503050406030204" pitchFamily="18" charset="0"/>
+                          </a:rPr>
+                          <m:t>𝑛</m:t>
+                        </m:r>
+                      </m:sub>
+                    </m:sSub>
+                    <m:r>
+                      <a:rPr lang="fr-CH" b="0" i="1" smtClean="0">
+                        <a:latin typeface="Cambria Math" panose="02040503050406030204" pitchFamily="18" charset="0"/>
+                      </a:rPr>
+                      <m:t>=</m:t>
+                    </m:r>
+                    <m:sSub>
+                      <m:sSubPr>
+                        <m:ctrlPr>
+                          <a:rPr lang="fr-CH" b="0" i="1" smtClean="0">
+                            <a:latin typeface="Cambria Math" panose="02040503050406030204" pitchFamily="18" charset="0"/>
+                            <a:ea typeface="Cambria Math" panose="02040503050406030204" pitchFamily="18" charset="0"/>
+                          </a:rPr>
+                        </m:ctrlPr>
+                      </m:sSubPr>
+                      <m:e>
+                        <m:r>
+                          <a:rPr lang="fr-CH" i="1">
+                            <a:latin typeface="Cambria Math" panose="02040503050406030204" pitchFamily="18" charset="0"/>
+                            <a:ea typeface="Cambria Math" panose="02040503050406030204" pitchFamily="18" charset="0"/>
+                          </a:rPr>
+                          <m:t>𝛼</m:t>
+                        </m:r>
+                      </m:e>
+                      <m:sub>
+                        <m:r>
+                          <a:rPr lang="fr-CH" b="0" i="1" smtClean="0">
+                            <a:latin typeface="Cambria Math" panose="02040503050406030204" pitchFamily="18" charset="0"/>
+                            <a:ea typeface="Cambria Math" panose="02040503050406030204" pitchFamily="18" charset="0"/>
+                          </a:rPr>
+                          <m:t>1</m:t>
+                        </m:r>
+                      </m:sub>
+                    </m:sSub>
+                    <m:sSubSup>
+                      <m:sSubSupPr>
+                        <m:ctrlPr>
+                          <a:rPr lang="fr-CH" b="0" i="1" smtClean="0">
+                            <a:latin typeface="Cambria Math" panose="02040503050406030204" pitchFamily="18" charset="0"/>
+                            <a:ea typeface="Cambria Math" panose="02040503050406030204" pitchFamily="18" charset="0"/>
+                          </a:rPr>
+                        </m:ctrlPr>
+                      </m:sSubSupPr>
+                      <m:e>
+                        <m:r>
+                          <a:rPr lang="fr-CH" b="0" i="1" smtClean="0">
+                            <a:latin typeface="Cambria Math" panose="02040503050406030204" pitchFamily="18" charset="0"/>
+                            <a:ea typeface="Cambria Math" panose="02040503050406030204" pitchFamily="18" charset="0"/>
+                          </a:rPr>
+                          <m:t>𝑟</m:t>
+                        </m:r>
+                      </m:e>
+                      <m:sub>
+                        <m:r>
+                          <a:rPr lang="fr-CH" b="0" i="1" smtClean="0">
+                            <a:latin typeface="Cambria Math" panose="02040503050406030204" pitchFamily="18" charset="0"/>
+                            <a:ea typeface="Cambria Math" panose="02040503050406030204" pitchFamily="18" charset="0"/>
+                          </a:rPr>
+                          <m:t>1</m:t>
+                        </m:r>
+                      </m:sub>
+                      <m:sup>
+                        <m:r>
+                          <a:rPr lang="fr-CH" b="0" i="1" smtClean="0">
+                            <a:latin typeface="Cambria Math" panose="02040503050406030204" pitchFamily="18" charset="0"/>
+                            <a:ea typeface="Cambria Math" panose="02040503050406030204" pitchFamily="18" charset="0"/>
+                          </a:rPr>
+                          <m:t>𝑛</m:t>
+                        </m:r>
+                      </m:sup>
+                    </m:sSubSup>
+                    <m:r>
+                      <a:rPr lang="fr-CH" b="0" i="1" smtClean="0">
+                        <a:latin typeface="Cambria Math" panose="02040503050406030204" pitchFamily="18" charset="0"/>
+                        <a:ea typeface="Cambria Math" panose="02040503050406030204" pitchFamily="18" charset="0"/>
+                      </a:rPr>
+                      <m:t>+</m:t>
+                    </m:r>
+                    <m:sSub>
+                      <m:sSubPr>
+                        <m:ctrlPr>
+                          <a:rPr lang="fr-CH" i="1">
+                            <a:latin typeface="Cambria Math" panose="02040503050406030204" pitchFamily="18" charset="0"/>
+                            <a:ea typeface="Cambria Math" panose="02040503050406030204" pitchFamily="18" charset="0"/>
+                          </a:rPr>
+                        </m:ctrlPr>
+                      </m:sSubPr>
+                      <m:e>
+                        <m:r>
+                          <a:rPr lang="fr-CH" i="1">
+                            <a:latin typeface="Cambria Math" panose="02040503050406030204" pitchFamily="18" charset="0"/>
+                            <a:ea typeface="Cambria Math" panose="02040503050406030204" pitchFamily="18" charset="0"/>
+                          </a:rPr>
+                          <m:t>𝛼</m:t>
+                        </m:r>
+                      </m:e>
+                      <m:sub>
+                        <m:r>
+                          <a:rPr lang="fr-CH" b="0" i="1" smtClean="0">
+                            <a:latin typeface="Cambria Math" panose="02040503050406030204" pitchFamily="18" charset="0"/>
+                            <a:ea typeface="Cambria Math" panose="02040503050406030204" pitchFamily="18" charset="0"/>
+                          </a:rPr>
+                          <m:t>2</m:t>
+                        </m:r>
+                      </m:sub>
+                    </m:sSub>
+                    <m:sSubSup>
+                      <m:sSubSupPr>
+                        <m:ctrlPr>
+                          <a:rPr lang="fr-CH" i="1">
+                            <a:latin typeface="Cambria Math" panose="02040503050406030204" pitchFamily="18" charset="0"/>
+                            <a:ea typeface="Cambria Math" panose="02040503050406030204" pitchFamily="18" charset="0"/>
+                          </a:rPr>
+                        </m:ctrlPr>
+                      </m:sSubSupPr>
+                      <m:e>
+                        <m:r>
+                          <a:rPr lang="fr-CH" i="1">
+                            <a:latin typeface="Cambria Math" panose="02040503050406030204" pitchFamily="18" charset="0"/>
+                            <a:ea typeface="Cambria Math" panose="02040503050406030204" pitchFamily="18" charset="0"/>
+                          </a:rPr>
+                          <m:t>𝑟</m:t>
+                        </m:r>
+                      </m:e>
+                      <m:sub>
+                        <m:r>
+                          <a:rPr lang="fr-CH" b="0" i="1" smtClean="0">
+                            <a:latin typeface="Cambria Math" panose="02040503050406030204" pitchFamily="18" charset="0"/>
+                            <a:ea typeface="Cambria Math" panose="02040503050406030204" pitchFamily="18" charset="0"/>
+                          </a:rPr>
+                          <m:t>2</m:t>
+                        </m:r>
+                      </m:sub>
+                      <m:sup>
+                        <m:r>
+                          <a:rPr lang="fr-CH" i="1">
+                            <a:latin typeface="Cambria Math" panose="02040503050406030204" pitchFamily="18" charset="0"/>
+                            <a:ea typeface="Cambria Math" panose="02040503050406030204" pitchFamily="18" charset="0"/>
+                          </a:rPr>
+                          <m:t>𝑛</m:t>
+                        </m:r>
+                      </m:sup>
+                    </m:sSubSup>
+                    <m:r>
+                      <a:rPr lang="fr-CH" b="0" i="1" smtClean="0">
+                        <a:latin typeface="Cambria Math" panose="02040503050406030204" pitchFamily="18" charset="0"/>
+                        <a:ea typeface="Cambria Math" panose="02040503050406030204" pitchFamily="18" charset="0"/>
+                      </a:rPr>
+                      <m:t>+…+</m:t>
+                    </m:r>
+                    <m:sSub>
+                      <m:sSubPr>
+                        <m:ctrlPr>
+                          <a:rPr lang="fr-CH" i="1">
+                            <a:latin typeface="Cambria Math" panose="02040503050406030204" pitchFamily="18" charset="0"/>
+                            <a:ea typeface="Cambria Math" panose="02040503050406030204" pitchFamily="18" charset="0"/>
+                          </a:rPr>
+                        </m:ctrlPr>
+                      </m:sSubPr>
+                      <m:e>
+                        <m:r>
+                          <a:rPr lang="fr-CH" i="1">
+                            <a:latin typeface="Cambria Math" panose="02040503050406030204" pitchFamily="18" charset="0"/>
+                            <a:ea typeface="Cambria Math" panose="02040503050406030204" pitchFamily="18" charset="0"/>
+                          </a:rPr>
+                          <m:t>𝛼</m:t>
+                        </m:r>
+                      </m:e>
+                      <m:sub>
+                        <m:r>
+                          <a:rPr lang="fr-CH" b="0" i="1" smtClean="0">
+                            <a:latin typeface="Cambria Math" panose="02040503050406030204" pitchFamily="18" charset="0"/>
+                            <a:ea typeface="Cambria Math" panose="02040503050406030204" pitchFamily="18" charset="0"/>
+                          </a:rPr>
+                          <m:t>𝑘</m:t>
+                        </m:r>
+                      </m:sub>
+                    </m:sSub>
+                    <m:sSubSup>
+                      <m:sSubSupPr>
+                        <m:ctrlPr>
+                          <a:rPr lang="fr-CH" i="1">
+                            <a:latin typeface="Cambria Math" panose="02040503050406030204" pitchFamily="18" charset="0"/>
+                            <a:ea typeface="Cambria Math" panose="02040503050406030204" pitchFamily="18" charset="0"/>
+                          </a:rPr>
+                        </m:ctrlPr>
+                      </m:sSubSupPr>
+                      <m:e>
+                        <m:r>
+                          <a:rPr lang="fr-CH" i="1">
+                            <a:latin typeface="Cambria Math" panose="02040503050406030204" pitchFamily="18" charset="0"/>
+                            <a:ea typeface="Cambria Math" panose="02040503050406030204" pitchFamily="18" charset="0"/>
+                          </a:rPr>
+                          <m:t>𝑟</m:t>
+                        </m:r>
+                      </m:e>
+                      <m:sub>
+                        <m:r>
+                          <a:rPr lang="fr-CH" b="0" i="1" smtClean="0">
+                            <a:latin typeface="Cambria Math" panose="02040503050406030204" pitchFamily="18" charset="0"/>
+                            <a:ea typeface="Cambria Math" panose="02040503050406030204" pitchFamily="18" charset="0"/>
+                          </a:rPr>
+                          <m:t>𝑘</m:t>
+                        </m:r>
+                      </m:sub>
+                      <m:sup>
+                        <m:r>
+                          <a:rPr lang="fr-CH" i="1">
+                            <a:latin typeface="Cambria Math" panose="02040503050406030204" pitchFamily="18" charset="0"/>
+                            <a:ea typeface="Cambria Math" panose="02040503050406030204" pitchFamily="18" charset="0"/>
+                          </a:rPr>
+                          <m:t>𝑛</m:t>
+                        </m:r>
+                      </m:sup>
+                    </m:sSubSup>
+                  </m:oMath>
+                </a14:m>
+                <a:endParaRPr lang="en-US" dirty="0"/>
+              </a:p>
+              <a:p>
+                <a:pPr>
+                  <a:buNone/>
+                </a:pPr>
+                <a:r>
+                  <a:rPr lang="en-US" dirty="0"/>
+                  <a:t>	for </a:t>
+                </a:r>
+                <a:r>
+                  <a:rPr lang="en-US" i="1" dirty="0"/>
+                  <a:t>n</a:t>
+                </a:r>
+                <a:r>
+                  <a:rPr lang="en-US" dirty="0"/>
+                  <a:t> = </a:t>
+                </a:r>
+                <a:r>
+                  <a:rPr lang="en-US" dirty="0">
+                    <a:ea typeface="Cambria Math" pitchFamily="18" charset="0"/>
+                  </a:rPr>
+                  <a:t>0</a:t>
+                </a:r>
+                <a:r>
+                  <a:rPr lang="en-US" dirty="0"/>
+                  <a:t>, </a:t>
+                </a:r>
+                <a:r>
+                  <a:rPr lang="en-US" dirty="0">
+                    <a:ea typeface="Cambria Math" pitchFamily="18" charset="0"/>
+                  </a:rPr>
+                  <a:t>1</a:t>
+                </a:r>
+                <a:r>
+                  <a:rPr lang="en-US" dirty="0"/>
+                  <a:t>, </a:t>
+                </a:r>
+                <a:r>
+                  <a:rPr lang="en-US" dirty="0">
+                    <a:ea typeface="Cambria Math" pitchFamily="18" charset="0"/>
+                  </a:rPr>
+                  <a:t>2</a:t>
+                </a:r>
+                <a:r>
+                  <a:rPr lang="en-US" dirty="0"/>
+                  <a:t>, …, where </a:t>
+                </a:r>
+                <a:r>
+                  <a:rPr lang="el-GR" dirty="0">
+                    <a:ea typeface="Cambria Math"/>
+                  </a:rPr>
+                  <a:t>α</a:t>
+                </a:r>
+                <a:r>
+                  <a:rPr lang="en-US" baseline="-25000" dirty="0">
+                    <a:ea typeface="Cambria Math"/>
+                  </a:rPr>
+                  <a:t>1</a:t>
+                </a:r>
+                <a:r>
+                  <a:rPr lang="en-US" dirty="0">
+                    <a:ea typeface="Cambria Math"/>
+                  </a:rPr>
+                  <a:t>,</a:t>
+                </a:r>
+                <a:r>
+                  <a:rPr lang="en-US" dirty="0"/>
+                  <a:t> </a:t>
+                </a:r>
+                <a:r>
+                  <a:rPr lang="el-GR" dirty="0">
+                    <a:ea typeface="Cambria Math"/>
+                  </a:rPr>
+                  <a:t>α</a:t>
+                </a:r>
+                <a:r>
+                  <a:rPr lang="en-US" baseline="-25000" dirty="0">
+                    <a:ea typeface="Cambria Math"/>
+                  </a:rPr>
+                  <a:t>2</a:t>
+                </a:r>
+                <a:r>
+                  <a:rPr lang="en-US" dirty="0">
+                    <a:ea typeface="Cambria Math"/>
+                  </a:rPr>
+                  <a:t>,…,</a:t>
+                </a:r>
+                <a:r>
+                  <a:rPr lang="el-GR" dirty="0">
+                    <a:ea typeface="Cambria Math"/>
+                  </a:rPr>
+                  <a:t> α</a:t>
+                </a:r>
+                <a:r>
+                  <a:rPr lang="en-US" i="1" baseline="-25000" dirty="0">
+                    <a:ea typeface="Cambria Math"/>
+                  </a:rPr>
+                  <a:t>k</a:t>
+                </a:r>
+                <a:r>
+                  <a:rPr lang="en-US" dirty="0">
+                    <a:ea typeface="Cambria Math"/>
+                  </a:rPr>
+                  <a:t> are constants. </a:t>
+                </a:r>
+                <a:endParaRPr lang="en-US" dirty="0"/>
+              </a:p>
+            </p:txBody>
+          </p:sp>
+        </mc:Choice>
+        <mc:Fallback xmlns="">
+          <p:sp>
+            <p:nvSpPr>
+              <p:cNvPr id="3" name="Content Placeholder 2"/>
+              <p:cNvSpPr>
+                <a:spLocks noGrp="1" noRot="1" noChangeAspect="1" noMove="1" noResize="1" noEditPoints="1" noAdjustHandles="1" noChangeArrowheads="1" noChangeShapeType="1" noTextEdit="1"/>
+              </p:cNvSpPr>
+              <p:nvPr>
+                <p:ph idx="1"/>
+              </p:nvPr>
+            </p:nvSpPr>
+            <p:spPr>
+              <a:blipFill>
+                <a:blip r:embed="rId2"/>
+                <a:stretch>
+                  <a:fillRect l="-1086" t="-2632" b="-2924"/>
+                </a:stretch>
+              </a:blipFill>
+            </p:spPr>
+            <p:txBody>
+              <a:bodyPr/>
+              <a:lstStyle/>
+              <a:p>
+                <a:r>
+                  <a:rPr lang="en-US">
+                    <a:noFill/>
+                  </a:rPr>
+                  <a:t> </a:t>
+                </a:r>
+              </a:p>
+            </p:txBody>
+          </p:sp>
+        </mc:Fallback>
+      </mc:AlternateContent>
     </p:spTree>
     <p:extLst>
       <p:ext uri="{BB962C8B-B14F-4D97-AF65-F5344CB8AC3E}">
@@ -13724,103 +13953,103 @@
               <a:t>What is the solution to the recurrence relation </a:t>
             </a:r>
             <a:r>
-              <a:rPr lang="en-GB" sz="2000" i="1"/>
+              <a:rPr lang="en-GB" sz="2000" i="1" dirty="0"/>
               <a:t>a</a:t>
             </a:r>
             <a:r>
-              <a:rPr lang="en-GB" sz="2000" i="1" baseline="-25000"/>
+              <a:rPr lang="en-GB" sz="2000" i="1" baseline="-25000" dirty="0"/>
               <a:t>n</a:t>
             </a:r>
             <a:r>
-              <a:rPr lang="en-GB" sz="2000" i="1"/>
+              <a:rPr lang="en-GB" sz="2000" i="1" dirty="0"/>
               <a:t> </a:t>
             </a:r>
             <a:r>
-              <a:rPr lang="en-GB" sz="2000"/>
+              <a:rPr lang="en-GB" sz="2000" dirty="0"/>
               <a:t>= −3</a:t>
             </a:r>
             <a:r>
-              <a:rPr lang="en-GB" sz="2000" i="1"/>
+              <a:rPr lang="en-GB" sz="2000" i="1" dirty="0"/>
               <a:t>a</a:t>
             </a:r>
             <a:r>
-              <a:rPr lang="en-GB" sz="2000" i="1" baseline="-25000"/>
+              <a:rPr lang="en-GB" sz="2000" i="1" baseline="-25000" dirty="0"/>
               <a:t>n</a:t>
             </a:r>
             <a:r>
-              <a:rPr lang="en-GB" sz="2000" baseline="-25000"/>
+              <a:rPr lang="en-GB" sz="2000" baseline="-25000" dirty="0"/>
               <a:t>−1</a:t>
             </a:r>
             <a:r>
-              <a:rPr lang="en-GB" sz="2000"/>
+              <a:rPr lang="en-GB" sz="2000" dirty="0"/>
               <a:t> − 3</a:t>
             </a:r>
             <a:r>
-              <a:rPr lang="en-GB" sz="2000" i="1"/>
+              <a:rPr lang="en-GB" sz="2000" i="1" dirty="0"/>
               <a:t>a</a:t>
             </a:r>
             <a:r>
-              <a:rPr lang="en-GB" sz="2000" i="1" baseline="-25000"/>
+              <a:rPr lang="en-GB" sz="2000" i="1" baseline="-25000" dirty="0"/>
               <a:t>n</a:t>
             </a:r>
             <a:r>
-              <a:rPr lang="en-GB" sz="2000" baseline="-25000"/>
+              <a:rPr lang="en-GB" sz="2000" baseline="-25000" dirty="0"/>
               <a:t>−2</a:t>
             </a:r>
             <a:r>
-              <a:rPr lang="en-GB" sz="2000"/>
+              <a:rPr lang="en-GB" sz="2000" dirty="0"/>
               <a:t> − </a:t>
             </a:r>
             <a:r>
-              <a:rPr lang="en-GB" sz="2000" i="1"/>
+              <a:rPr lang="en-GB" sz="2000" i="1" dirty="0"/>
               <a:t>a</a:t>
             </a:r>
             <a:r>
-              <a:rPr lang="en-GB" sz="2000" i="1" baseline="-25000"/>
+              <a:rPr lang="en-GB" sz="2000" i="1" baseline="-25000" dirty="0"/>
               <a:t>n</a:t>
             </a:r>
             <a:r>
-              <a:rPr lang="en-GB" sz="2000" baseline="-25000"/>
+              <a:rPr lang="en-GB" sz="2000" baseline="-25000" dirty="0"/>
               <a:t>−3 </a:t>
             </a:r>
             <a:r>
-              <a:rPr lang="en-GB" sz="2000"/>
+              <a:rPr lang="en-GB" sz="2000" dirty="0"/>
               <a:t> with </a:t>
             </a:r>
             <a:r>
-              <a:rPr lang="en-GB" sz="2000" i="1"/>
+              <a:rPr lang="en-GB" sz="2000" i="1" dirty="0"/>
               <a:t>a</a:t>
             </a:r>
             <a:r>
-              <a:rPr lang="en-GB" sz="2000" i="1" baseline="-25000"/>
+              <a:rPr lang="en-GB" sz="2000" i="1" baseline="-25000" dirty="0"/>
               <a:t>0</a:t>
             </a:r>
             <a:r>
-              <a:rPr lang="en-GB" sz="2000"/>
+              <a:rPr lang="en-GB" sz="2000" dirty="0"/>
               <a:t> = 1, </a:t>
             </a:r>
             <a:r>
-              <a:rPr lang="en-GB" sz="2000" i="1"/>
+              <a:rPr lang="en-GB" sz="2000" i="1" dirty="0"/>
               <a:t>a</a:t>
             </a:r>
             <a:r>
-              <a:rPr lang="en-GB" sz="2000" baseline="-25000"/>
+              <a:rPr lang="en-GB" sz="2000" baseline="-25000" dirty="0"/>
               <a:t>1</a:t>
             </a:r>
             <a:r>
-              <a:rPr lang="en-GB" sz="2000"/>
+              <a:rPr lang="en-GB" sz="2000" dirty="0"/>
               <a:t> = −2, and </a:t>
             </a:r>
             <a:r>
-              <a:rPr lang="en-GB" sz="2000" i="1"/>
+              <a:rPr lang="en-GB" sz="2000" i="1" dirty="0"/>
               <a:t>a</a:t>
             </a:r>
             <a:r>
-              <a:rPr lang="en-GB" sz="2000" baseline="-25000"/>
+              <a:rPr lang="en-GB" sz="2000" baseline="-25000" dirty="0"/>
               <a:t>2</a:t>
             </a:r>
             <a:r>
-              <a:rPr lang="en-GB" sz="2000"/>
+              <a:rPr lang="en-GB" sz="2000" dirty="0"/>
               <a:t> = −1. </a:t>
             </a:r>
           </a:p>
@@ -13851,39 +14080,39 @@
               <a:t>The characteristic equation is  </a:t>
             </a:r>
             <a:r>
-              <a:rPr lang="en-GB" sz="2000" i="1"/>
+              <a:rPr lang="en-GB" sz="2000" i="1" dirty="0"/>
               <a:t>r</a:t>
             </a:r>
             <a:r>
-              <a:rPr lang="en-GB" sz="2000" baseline="30000"/>
+              <a:rPr lang="en-GB" sz="2000" baseline="30000" dirty="0"/>
               <a:t>3</a:t>
             </a:r>
             <a:r>
-              <a:rPr lang="en-GB" sz="2000"/>
+              <a:rPr lang="en-GB" sz="2000" dirty="0"/>
               <a:t> + 3</a:t>
             </a:r>
             <a:r>
-              <a:rPr lang="en-GB" sz="2000" i="1"/>
+              <a:rPr lang="en-GB" sz="2000" i="1" dirty="0"/>
               <a:t>r</a:t>
             </a:r>
             <a:r>
-              <a:rPr lang="en-GB" sz="2000" baseline="30000"/>
+              <a:rPr lang="en-GB" sz="2000" baseline="30000" dirty="0"/>
               <a:t>2</a:t>
             </a:r>
             <a:r>
-              <a:rPr lang="en-GB" sz="2000"/>
+              <a:rPr lang="en-GB" sz="2000" dirty="0"/>
               <a:t> + 3</a:t>
             </a:r>
             <a:r>
-              <a:rPr lang="en-GB" sz="2000" i="1"/>
+              <a:rPr lang="en-GB" sz="2000" i="1" dirty="0"/>
               <a:t>r </a:t>
             </a:r>
             <a:r>
-              <a:rPr lang="en-GB" sz="2000"/>
+              <a:rPr lang="en-GB" sz="2000" dirty="0"/>
               <a:t>+ 1 = 0</a:t>
             </a:r>
             <a:r>
-              <a:rPr lang="en-GB" sz="2000" i="1"/>
+              <a:rPr lang="en-GB" sz="2000" i="1" dirty="0"/>
               <a:t>. </a:t>
             </a:r>
             <a:endParaRPr lang="en-US" sz="2000" i="1" dirty="0"/>
@@ -13952,19 +14181,19 @@
               <a:t>is a solution to the recurrence relation  if and only if </a:t>
             </a:r>
             <a:r>
-              <a:rPr lang="en-GB" sz="2000" i="1"/>
+              <a:rPr lang="en-GB" sz="2000" i="1" dirty="0"/>
               <a:t>a</a:t>
             </a:r>
             <a:r>
-              <a:rPr lang="en-GB" sz="2000" i="1" baseline="-25000"/>
+              <a:rPr lang="en-GB" sz="2000" i="1" baseline="-25000" dirty="0"/>
               <a:t>n</a:t>
             </a:r>
             <a:r>
-              <a:rPr lang="en-GB" sz="2000" i="1"/>
+              <a:rPr lang="en-GB" sz="2000" i="1" dirty="0"/>
               <a:t> </a:t>
             </a:r>
             <a:r>
-              <a:rPr lang="en-GB" sz="2000"/>
+              <a:rPr lang="en-GB" sz="2000" dirty="0"/>
               <a:t>= </a:t>
             </a:r>
             <a:r>
@@ -13978,15 +14207,15 @@
               <a:t>1,0</a:t>
             </a:r>
             <a:r>
-              <a:rPr lang="en-GB" sz="2000"/>
+              <a:rPr lang="en-GB" sz="2000" dirty="0"/>
               <a:t>(−1)</a:t>
             </a:r>
             <a:r>
-              <a:rPr lang="en-GB" sz="2000" baseline="30000"/>
+              <a:rPr lang="en-GB" sz="2000" baseline="30000" dirty="0"/>
               <a:t>n</a:t>
             </a:r>
             <a:r>
-              <a:rPr lang="en-GB" sz="2000"/>
+              <a:rPr lang="en-GB" sz="2000" dirty="0"/>
               <a:t> + </a:t>
             </a:r>
             <a:r>
@@ -14000,19 +14229,19 @@
               <a:t>1,1</a:t>
             </a:r>
             <a:r>
-              <a:rPr lang="en-GB" sz="2000" i="1"/>
+              <a:rPr lang="en-GB" sz="2000" i="1" dirty="0"/>
               <a:t>n</a:t>
             </a:r>
             <a:r>
-              <a:rPr lang="en-GB" sz="2000"/>
+              <a:rPr lang="en-GB" sz="2000" dirty="0"/>
               <a:t>(−1)</a:t>
             </a:r>
             <a:r>
-              <a:rPr lang="en-GB" sz="2000" baseline="30000"/>
+              <a:rPr lang="en-GB" sz="2000" baseline="30000" dirty="0"/>
               <a:t>n</a:t>
             </a:r>
             <a:r>
-              <a:rPr lang="en-GB" sz="2000"/>
+              <a:rPr lang="en-GB" sz="2000" dirty="0"/>
               <a:t> + </a:t>
             </a:r>
             <a:r>
@@ -14032,22 +14261,22 @@
               <a:t>,2</a:t>
             </a:r>
             <a:r>
-              <a:rPr lang="en-GB" sz="2000" i="1"/>
+              <a:rPr lang="en-GB" sz="2000" i="1" dirty="0"/>
               <a:t>n</a:t>
             </a:r>
             <a:r>
-              <a:rPr lang="en-GB" sz="2000" i="1" baseline="30000"/>
+              <a:rPr lang="en-GB" sz="2000" i="1" baseline="30000" dirty="0"/>
               <a:t>2</a:t>
             </a:r>
             <a:r>
-              <a:rPr lang="en-GB" sz="2000"/>
+              <a:rPr lang="en-GB" sz="2000" dirty="0"/>
               <a:t>(−1)</a:t>
             </a:r>
             <a:r>
-              <a:rPr lang="en-GB" sz="2000" baseline="30000"/>
+              <a:rPr lang="en-GB" sz="2000" baseline="30000" dirty="0"/>
               <a:t>n</a:t>
             </a:r>
-            <a:endParaRPr lang="en-GB" sz="2000"/>
+            <a:endParaRPr lang="en-GB" sz="2000" dirty="0"/>
           </a:p>
           <a:p>
             <a:pPr marL="120600">
@@ -14130,7 +14359,7 @@
             </a:pPr>
             <a:r>
               <a:rPr lang="en-US" sz="2000" dirty="0"/>
-              <a:t>To find the constants  </a:t>
+              <a:t>To find the constants </a:t>
             </a:r>
             <a:r>
               <a:rPr lang="el-GR" sz="2000" dirty="0"/>
@@ -14140,11 +14369,13 @@
               <a:rPr lang="en-US" sz="2000" baseline="-25000" dirty="0">
                 <a:ea typeface="Cambria Math" pitchFamily="18" charset="0"/>
               </a:rPr>
-              <a:t>1</a:t>
-            </a:r>
-            <a:r>
-              <a:rPr lang="en-US" sz="2000" dirty="0"/>
-              <a:t> and </a:t>
+              <a:t>1,0</a:t>
+            </a:r>
+            <a:r>
+              <a:rPr lang="en-US" sz="2000" dirty="0">
+                <a:ea typeface="Cambria Math" pitchFamily="18" charset="0"/>
+              </a:rPr>
+              <a:t>, </a:t>
             </a:r>
             <a:r>
               <a:rPr lang="el-GR" sz="2000" dirty="0"/>
@@ -14154,11 +14385,35 @@
               <a:rPr lang="en-US" sz="2000" baseline="-25000" dirty="0">
                 <a:ea typeface="Cambria Math" pitchFamily="18" charset="0"/>
               </a:rPr>
-              <a:t>2</a:t>
+              <a:t>1,1  </a:t>
             </a:r>
             <a:r>
               <a:rPr lang="en-US" sz="2000" dirty="0"/>
-              <a:t>, note that </a:t>
+              <a:t>and</a:t>
+            </a:r>
+            <a:r>
+              <a:rPr lang="en-US" sz="2000" baseline="-25000" dirty="0"/>
+              <a:t> </a:t>
+            </a:r>
+            <a:r>
+              <a:rPr lang="el-GR" sz="2000" dirty="0"/>
+              <a:t>α</a:t>
+            </a:r>
+            <a:r>
+              <a:rPr lang="en-US" sz="2000" baseline="-25000" dirty="0">
+                <a:ea typeface="Cambria Math" pitchFamily="18" charset="0"/>
+              </a:rPr>
+              <a:t>1</a:t>
+            </a:r>
+            <a:r>
+              <a:rPr lang="en-GB" sz="2000" i="1" baseline="-25000" dirty="0">
+                <a:ea typeface="Cambria Math" pitchFamily="18" charset="0"/>
+              </a:rPr>
+              <a:t>,2</a:t>
+            </a:r>
+            <a:r>
+              <a:rPr lang="en-US" sz="2000" dirty="0"/>
+              <a:t> , note that </a:t>
             </a:r>
           </a:p>
           <a:p>
@@ -14461,39 +14716,39 @@
               <a:t> = </a:t>
             </a:r>
             <a:r>
-              <a:rPr lang="en-GB" sz="2000"/>
+              <a:rPr lang="en-GB" sz="2000" dirty="0"/>
               <a:t>(1 + 3</a:t>
             </a:r>
             <a:r>
-              <a:rPr lang="en-GB" sz="2000" i="1"/>
+              <a:rPr lang="en-GB" sz="2000" i="1" dirty="0"/>
               <a:t>n </a:t>
             </a:r>
             <a:r>
-              <a:rPr lang="en-GB" sz="2000"/>
+              <a:rPr lang="en-GB" sz="2000" dirty="0"/>
               <a:t>− 2</a:t>
             </a:r>
             <a:r>
-              <a:rPr lang="en-GB" sz="2000" i="1"/>
+              <a:rPr lang="en-GB" sz="2000" i="1" dirty="0"/>
               <a:t>n</a:t>
             </a:r>
             <a:r>
-              <a:rPr lang="en-GB" sz="2000" i="1" baseline="30000"/>
+              <a:rPr lang="en-GB" sz="2000" i="1" baseline="30000" dirty="0"/>
               <a:t>2</a:t>
             </a:r>
             <a:r>
-              <a:rPr lang="en-GB" sz="2000" i="1"/>
+              <a:rPr lang="en-GB" sz="2000" i="1" dirty="0"/>
               <a:t> </a:t>
             </a:r>
             <a:r>
-              <a:rPr lang="en-GB" sz="2000"/>
+              <a:rPr lang="en-GB" sz="2000" dirty="0"/>
               <a:t>)(−1)</a:t>
             </a:r>
             <a:r>
-              <a:rPr lang="en-GB" sz="2000" baseline="30000"/>
+              <a:rPr lang="en-GB" sz="2000" baseline="30000" dirty="0"/>
               <a:t>n</a:t>
             </a:r>
             <a:r>
-              <a:rPr lang="en-GB" sz="2000"/>
+              <a:rPr lang="en-GB" sz="2000" dirty="0"/>
               <a:t> </a:t>
             </a:r>
           </a:p>
@@ -15443,8 +15698,8 @@
           </a:p>
         </p:txBody>
       </p:sp>
-      <mc:AlternateContent xmlns:mc="http://schemas.openxmlformats.org/markup-compatibility/2006">
-        <mc:Choice xmlns:a14="http://schemas.microsoft.com/office/drawing/2010/main" Requires="a14">
+      <mc:AlternateContent xmlns:mc="http://schemas.openxmlformats.org/markup-compatibility/2006" xmlns:a14="http://schemas.microsoft.com/office/drawing/2010/main">
+        <mc:Choice Requires="a14">
           <p:sp>
             <p:nvSpPr>
               <p:cNvPr id="3" name="Content Placeholder 2"/>
@@ -15870,7 +16125,7 @@
             </p:txBody>
           </p:sp>
         </mc:Choice>
-        <mc:Fallback>
+        <mc:Fallback xmlns="">
           <p:sp>
             <p:nvSpPr>
               <p:cNvPr id="3" name="Content Placeholder 2"/>
@@ -16156,36 +16411,6 @@
           <a:xfrm>
             <a:off x="5391728" y="4457298"/>
             <a:ext cx="3743083" cy="1932131"/>
-          </a:xfrm>
-          <a:prstGeom prst="rect">
-            <a:avLst/>
-          </a:prstGeom>
-        </p:spPr>
-      </p:pic>
-      <p:pic>
-        <p:nvPicPr>
-          <p:cNvPr id="15" name="Picture 14">
-            <a:extLst>
-              <a:ext uri="{FF2B5EF4-FFF2-40B4-BE49-F238E27FC236}">
-                <a16:creationId xmlns:a16="http://schemas.microsoft.com/office/drawing/2014/main" id="{3E0EC5DB-8658-7C4A-89EB-6D6DC933799C}"/>
-              </a:ext>
-            </a:extLst>
-          </p:cNvPr>
-          <p:cNvPicPr>
-            <a:picLocks noChangeAspect="1"/>
-          </p:cNvPicPr>
-          <p:nvPr/>
-        </p:nvPicPr>
-        <p:blipFill>
-          <a:blip r:embed="rId5"/>
-          <a:stretch>
-            <a:fillRect/>
-          </a:stretch>
-        </p:blipFill>
-        <p:spPr>
-          <a:xfrm>
-            <a:off x="5455581" y="6311900"/>
-            <a:ext cx="2250786" cy="396749"/>
           </a:xfrm>
           <a:prstGeom prst="rect">
             <a:avLst/>
@@ -16576,7 +16801,7 @@
               <a:buNone/>
             </a:pPr>
             <a:r>
-              <a:rPr lang="en-US"/>
+              <a:rPr lang="en-US" dirty="0"/>
               <a:t>Given some recurrence relation for a sequence </a:t>
             </a:r>
             <a:r>
@@ -16619,43 +16844,39 @@
             </a:r>
             <a:r>
               <a:rPr lang="en-US" dirty="0"/>
-              <a:t>, …</a:t>
-            </a:r>
-            <a:r>
-              <a:rPr lang="en-US"/>
-              <a:t> </a:t>
+              <a:t>, … </a:t>
             </a:r>
           </a:p>
           <a:p>
             <a:pPr marL="0" indent="0">
               <a:buNone/>
             </a:pPr>
-            <a:endParaRPr lang="en-US"/>
+            <a:endParaRPr lang="en-US" dirty="0"/>
           </a:p>
           <a:p>
             <a:pPr marL="0" indent="0">
               <a:buNone/>
             </a:pPr>
             <a:r>
-              <a:rPr lang="en-US"/>
+              <a:rPr lang="en-US" dirty="0"/>
               <a:t>General Approach to find a closed formula</a:t>
             </a:r>
           </a:p>
           <a:p>
             <a:r>
-              <a:rPr lang="en-US"/>
-              <a:t>Find some closed formula for the generating function G(x)</a:t>
-            </a:r>
-          </a:p>
-          <a:p>
-            <a:r>
-              <a:rPr lang="en-US"/>
+              <a:rPr lang="en-US" dirty="0"/>
+              <a:t>Interpret the sequence as coefficients of a generating function G(x)</a:t>
+            </a:r>
+          </a:p>
+          <a:p>
+            <a:r>
+              <a:rPr lang="en-US" dirty="0"/>
               <a:t>Use the recurrence relation to derive an alternative expression for G(x)</a:t>
             </a:r>
           </a:p>
           <a:p>
             <a:r>
-              <a:rPr lang="en-US"/>
+              <a:rPr lang="en-US" dirty="0"/>
               <a:t>Determine the power expansion of this alternative expression of which the coefficients must be equal to the sequence</a:t>
             </a:r>
           </a:p>
@@ -16663,7 +16884,7 @@
             <a:pPr marL="0" indent="0">
               <a:buNone/>
             </a:pPr>
-            <a:endParaRPr lang="en-US"/>
+            <a:endParaRPr lang="en-US" dirty="0"/>
           </a:p>
         </p:txBody>
       </p:sp>
@@ -17028,7 +17249,7 @@
         <p:spPr/>
         <p:txBody>
           <a:bodyPr>
-            <a:normAutofit fontScale="92500" lnSpcReduction="20000"/>
+            <a:normAutofit fontScale="77500" lnSpcReduction="20000"/>
           </a:bodyPr>
           <a:lstStyle/>
           <a:p>
@@ -17265,6 +17486,9 @@
           </a:p>
           <a:p>
             <a:pPr>
+              <a:lnSpc>
+                <a:spcPct val="120000"/>
+              </a:lnSpc>
               <a:buNone/>
             </a:pPr>
             <a:r>
@@ -17288,6 +17512,9 @@
           </a:p>
           <a:p>
             <a:pPr>
+              <a:lnSpc>
+                <a:spcPct val="120000"/>
+              </a:lnSpc>
               <a:buNone/>
             </a:pPr>
             <a:r>
@@ -17529,6 +17756,9 @@
           </a:p>
           <a:p>
             <a:pPr>
+              <a:lnSpc>
+                <a:spcPct val="120000"/>
+              </a:lnSpc>
               <a:buNone/>
             </a:pPr>
             <a:r>
@@ -17740,6 +17970,9 @@
           </a:p>
           <a:p>
             <a:pPr>
+              <a:lnSpc>
+                <a:spcPct val="120000"/>
+              </a:lnSpc>
               <a:buNone/>
             </a:pPr>
             <a:r>
@@ -18298,18 +18531,20 @@
             </p:nvSpPr>
             <p:spPr/>
             <p:txBody>
-              <a:bodyPr/>
+              <a:bodyPr>
+                <a:normAutofit lnSpcReduction="10000"/>
+              </a:bodyPr>
               <a:lstStyle/>
               <a:p>
                 <a:pPr marL="0" indent="0">
                   <a:buNone/>
                 </a:pPr>
                 <a:r>
-                  <a:rPr lang="en-US" b="1"/>
+                  <a:rPr lang="en-US" b="1" dirty="0"/>
                   <a:t>Definition</a:t>
                 </a:r>
                 <a:r>
-                  <a:rPr lang="en-US"/>
+                  <a:rPr lang="en-US" dirty="0"/>
                   <a:t>: Let u be a real number and k a nonnegative integer. Then the extended binomial coefficient </a:t>
                 </a:r>
                 <a14:m>
@@ -18365,9 +18600,15 @@
                   </m:oMath>
                 </a14:m>
                 <a:r>
-                  <a:rPr lang="en-US"/>
+                  <a:rPr lang="en-US" dirty="0"/>
                   <a:t> is defined as</a:t>
                 </a:r>
+              </a:p>
+              <a:p>
+                <a:pPr marL="0" indent="0">
+                  <a:buNone/>
+                </a:pPr>
+                <a:endParaRPr lang="en-US" dirty="0"/>
               </a:p>
               <a:p>
                 <a:pPr marL="0" indent="0">
@@ -18636,18 +18877,18 @@
                     </m:oMath>
                   </m:oMathPara>
                 </a14:m>
-                <a:endParaRPr lang="en-US"/>
+                <a:endParaRPr lang="en-US" dirty="0"/>
               </a:p>
               <a:p>
                 <a:pPr marL="0" indent="0">
                   <a:buNone/>
                 </a:pPr>
                 <a:r>
-                  <a:rPr lang="en-US" b="1"/>
+                  <a:rPr lang="en-US" b="1" dirty="0"/>
                   <a:t>Example</a:t>
                 </a:r>
                 <a:r>
-                  <a:rPr lang="en-US"/>
+                  <a:rPr lang="en-US" dirty="0"/>
                   <a:t>:</a:t>
                 </a:r>
               </a:p>
@@ -18656,7 +18897,7 @@
                   <a:buNone/>
                 </a:pPr>
                 <a:r>
-                  <a:rPr lang="en-US"/>
+                  <a:rPr lang="en-US" dirty="0"/>
                   <a:t> </a:t>
                 </a:r>
                 <a14:m>
@@ -18763,7 +19004,7 @@
                   </m:oMath>
                 </a14:m>
                 <a:r>
-                  <a:rPr lang="fr-CH" b="0"/>
+                  <a:rPr lang="fr-CH" b="0" dirty="0"/>
                   <a:t>		</a:t>
                 </a:r>
                 <a14:m>
@@ -18966,13 +19207,13 @@
                     </m:f>
                   </m:oMath>
                 </a14:m>
-                <a:endParaRPr lang="fr-CH" b="0"/>
+                <a:endParaRPr lang="fr-CH" b="0" dirty="0"/>
               </a:p>
               <a:p>
                 <a:pPr marL="0" indent="0">
                   <a:buNone/>
                 </a:pPr>
-                <a:endParaRPr lang="en-US"/>
+                <a:endParaRPr lang="en-US" dirty="0"/>
               </a:p>
             </p:txBody>
           </p:sp>
@@ -18998,7 +19239,7 @@
               <a:blipFill>
                 <a:blip r:embed="rId2"/>
                 <a:stretch>
-                  <a:fillRect l="-1086" t="-66082" b="-79532"/>
+                  <a:fillRect l="-1086" t="-57602" b="-87719"/>
                 </a:stretch>
               </a:blipFill>
             </p:spPr>
@@ -19983,15 +20224,15 @@
                   <a:buNone/>
                 </a:pPr>
                 <a:r>
-                  <a:rPr lang="en-US"/>
+                  <a:rPr lang="en-US" dirty="0"/>
                   <a:t>Find the number of </a:t>
                 </a:r>
                 <a:r>
-                  <a:rPr lang="en-US" i="1"/>
+                  <a:rPr lang="en-US" i="1" dirty="0"/>
                   <a:t>k</a:t>
                 </a:r>
                 <a:r>
-                  <a:rPr lang="en-US"/>
+                  <a:rPr lang="en-US" dirty="0"/>
                   <a:t>-combinations of a set with </a:t>
                 </a:r>
                 <a14:m>
@@ -20005,21 +20246,21 @@
                   </m:oMath>
                 </a14:m>
                 <a:r>
-                  <a:rPr lang="en-US"/>
+                  <a:rPr lang="en-US" dirty="0"/>
                   <a:t> elements using generating functions when repetition is allowed</a:t>
                 </a:r>
               </a:p>
               <a:p>
                 <a:r>
-                  <a:rPr lang="en-US"/>
+                  <a:rPr lang="en-US" dirty="0"/>
                   <a:t>The number of </a:t>
                 </a:r>
                 <a:r>
-                  <a:rPr lang="en-US" i="1"/>
+                  <a:rPr lang="en-US" i="1" dirty="0"/>
                   <a:t>k</a:t>
                 </a:r>
                 <a:r>
-                  <a:rPr lang="en-US"/>
+                  <a:rPr lang="en-US" dirty="0"/>
                   <a:t>-combinations is the coefficient of </a:t>
                 </a:r>
                 <a14:m>
@@ -20039,7 +20280,7 @@
                   </m:oMath>
                 </a14:m>
                 <a:r>
-                  <a:rPr lang="en-US"/>
+                  <a:rPr lang="en-US" dirty="0"/>
                   <a:t> in the generating function</a:t>
                 </a:r>
               </a:p>
@@ -20135,11 +20376,11 @@
                     </m:oMath>
                   </m:oMathPara>
                 </a14:m>
-                <a:endParaRPr lang="en-US" baseline="30000"/>
+                <a:endParaRPr lang="en-US" baseline="30000" dirty="0"/>
               </a:p>
               <a:p>
                 <a:r>
-                  <a:rPr lang="en-US"/>
+                  <a:rPr lang="en-US" dirty="0"/>
                   <a:t>As long as |x|&lt; 1 we have </a:t>
                 </a:r>
                 <a14:m>
@@ -20243,11 +20484,11 @@
                     </m:f>
                   </m:oMath>
                 </a14:m>
-                <a:endParaRPr lang="fr-CH" b="0"/>
+                <a:endParaRPr lang="fr-CH" b="0" dirty="0"/>
               </a:p>
               <a:p>
                 <a:r>
-                  <a:rPr lang="en-US"/>
+                  <a:rPr lang="en-US" dirty="0"/>
                   <a:t>Therefore </a:t>
                 </a:r>
                 <a14:m>
@@ -20406,7 +20647,7 @@
                       <a:rPr lang="fr-CH" b="0" i="1">
                         <a:latin typeface="Cambria Math" panose="02040503050406030204" pitchFamily="18" charset="0"/>
                       </a:rPr>
-                      <m:t>)=</m:t>
+                      <m:t>=</m:t>
                     </m:r>
                     <m:nary>
                       <m:naryPr>
@@ -20526,10 +20767,10 @@
                     </m:nary>
                   </m:oMath>
                 </a14:m>
-                <a:endParaRPr lang="en-US"/>
+                <a:endParaRPr lang="en-US" dirty="0"/>
               </a:p>
               <a:p>
-                <a:endParaRPr lang="en-US"/>
+                <a:endParaRPr lang="en-US" dirty="0"/>
               </a:p>
             </p:txBody>
           </p:sp>
@@ -20653,12 +20894,12 @@
             <p:spPr/>
             <p:txBody>
               <a:bodyPr>
-                <a:normAutofit/>
+                <a:normAutofit lnSpcReduction="10000"/>
               </a:bodyPr>
               <a:lstStyle/>
               <a:p>
                 <a:r>
-                  <a:rPr lang="en-US"/>
+                  <a:rPr lang="en-US" dirty="0"/>
                   <a:t>The coefficient of </a:t>
                 </a:r>
                 <a14:m>
@@ -20678,7 +20919,7 @@
                   </m:oMath>
                 </a14:m>
                 <a:r>
-                  <a:rPr lang="en-US"/>
+                  <a:rPr lang="en-US" dirty="0"/>
                   <a:t> is </a:t>
                 </a:r>
                 <a14:m>
@@ -20764,7 +21005,12 @@
                     </m:sSup>
                   </m:oMath>
                 </a14:m>
-                <a:endParaRPr lang="fr-CH" i="1">
+                <a:endParaRPr lang="fr-CH" i="1" dirty="0">
+                  <a:latin typeface="Cambria Math" panose="02040503050406030204" pitchFamily="18" charset="0"/>
+                </a:endParaRPr>
+              </a:p>
+              <a:p>
+                <a:endParaRPr lang="fr-CH" i="1" dirty="0">
                   <a:latin typeface="Cambria Math" panose="02040503050406030204" pitchFamily="18" charset="0"/>
                 </a:endParaRPr>
               </a:p>
@@ -20773,184 +21019,195 @@
                   <a:buNone/>
                 </a:pPr>
                 <a14:m>
-                  <m:oMath xmlns:m="http://schemas.openxmlformats.org/officeDocument/2006/math">
-                    <m:d>
-                      <m:dPr>
-                        <m:ctrlPr>
-                          <a:rPr lang="en-US" sz="2400" i="1">
-                            <a:latin typeface="Cambria Math" panose="02040503050406030204" pitchFamily="18" charset="0"/>
-                          </a:rPr>
-                        </m:ctrlPr>
-                      </m:dPr>
-                      <m:e>
-                        <m:m>
-                          <m:mPr>
-                            <m:mcs>
-                              <m:mc>
-                                <m:mcPr>
-                                  <m:count m:val="1"/>
-                                  <m:mcJc m:val="center"/>
-                                </m:mcPr>
-                              </m:mc>
-                            </m:mcs>
-                            <m:ctrlPr>
-                              <a:rPr lang="en-US" sz="2400" i="1">
-                                <a:latin typeface="Cambria Math" panose="02040503050406030204" pitchFamily="18" charset="0"/>
-                              </a:rPr>
-                            </m:ctrlPr>
-                          </m:mPr>
-                          <m:mr>
+                  <m:oMathPara xmlns:m="http://schemas.openxmlformats.org/officeDocument/2006/math">
+                    <m:oMathParaPr>
+                      <m:jc m:val="centerGroup"/>
+                    </m:oMathParaPr>
+                    <m:oMath xmlns:m="http://schemas.openxmlformats.org/officeDocument/2006/math">
+                      <m:d>
+                        <m:dPr>
+                          <m:ctrlPr>
+                            <a:rPr lang="en-US" sz="2400" i="1">
+                              <a:latin typeface="Cambria Math" panose="02040503050406030204" pitchFamily="18" charset="0"/>
+                            </a:rPr>
+                          </m:ctrlPr>
+                        </m:dPr>
+                        <m:e>
+                          <m:m>
+                            <m:mPr>
+                              <m:mcs>
+                                <m:mc>
+                                  <m:mcPr>
+                                    <m:count m:val="1"/>
+                                    <m:mcJc m:val="center"/>
+                                  </m:mcPr>
+                                </m:mc>
+                              </m:mcs>
+                              <m:ctrlPr>
+                                <a:rPr lang="en-US" sz="2400" i="1">
+                                  <a:latin typeface="Cambria Math" panose="02040503050406030204" pitchFamily="18" charset="0"/>
+                                </a:rPr>
+                              </m:ctrlPr>
+                            </m:mPr>
+                            <m:mr>
+                              <m:e>
+                                <m:r>
+                                  <a:rPr lang="fr-CH" sz="2400" i="1">
+                                    <a:latin typeface="Cambria Math" panose="02040503050406030204" pitchFamily="18" charset="0"/>
+                                  </a:rPr>
+                                  <m:t>−</m:t>
+                                </m:r>
+                                <m:r>
+                                  <a:rPr lang="fr-CH" sz="2400" i="1">
+                                    <a:latin typeface="Cambria Math" panose="02040503050406030204" pitchFamily="18" charset="0"/>
+                                  </a:rPr>
+                                  <m:t>𝑛</m:t>
+                                </m:r>
+                              </m:e>
+                            </m:mr>
+                            <m:mr>
+                              <m:e>
+                                <m:r>
+                                  <a:rPr lang="fr-CH" sz="2400" i="1">
+                                    <a:latin typeface="Cambria Math" panose="02040503050406030204" pitchFamily="18" charset="0"/>
+                                  </a:rPr>
+                                  <m:t>𝑘</m:t>
+                                </m:r>
+                              </m:e>
+                            </m:mr>
+                          </m:m>
+                        </m:e>
+                      </m:d>
+                      <m:r>
+                        <a:rPr lang="fr-CH" sz="2400" b="0" i="1">
+                          <a:latin typeface="Cambria Math" panose="02040503050406030204" pitchFamily="18" charset="0"/>
+                        </a:rPr>
+                        <m:t>=</m:t>
+                      </m:r>
+                      <m:f>
+                        <m:fPr>
+                          <m:ctrlPr>
+                            <a:rPr lang="fr-CH" sz="2400" b="0" i="1">
+                              <a:latin typeface="Cambria Math" panose="02040503050406030204" pitchFamily="18" charset="0"/>
+                            </a:rPr>
+                          </m:ctrlPr>
+                        </m:fPr>
+                        <m:num>
+                          <m:d>
+                            <m:dPr>
+                              <m:ctrlPr>
+                                <a:rPr lang="fr-CH" sz="2400" b="0" i="1">
+                                  <a:latin typeface="Cambria Math" panose="02040503050406030204" pitchFamily="18" charset="0"/>
+                                </a:rPr>
+                              </m:ctrlPr>
+                            </m:dPr>
                             <m:e>
                               <m:r>
-                                <a:rPr lang="fr-CH" sz="2400" i="1">
+                                <a:rPr lang="fr-CH" sz="2400" b="0" i="1">
                                   <a:latin typeface="Cambria Math" panose="02040503050406030204" pitchFamily="18" charset="0"/>
                                 </a:rPr>
                                 <m:t>−</m:t>
                               </m:r>
                               <m:r>
-                                <a:rPr lang="fr-CH" sz="2400" i="1">
+                                <a:rPr lang="fr-CH" sz="2400" b="0" i="1">
                                   <a:latin typeface="Cambria Math" panose="02040503050406030204" pitchFamily="18" charset="0"/>
                                 </a:rPr>
                                 <m:t>𝑛</m:t>
                               </m:r>
                             </m:e>
-                          </m:mr>
-                          <m:mr>
+                          </m:d>
+                          <m:d>
+                            <m:dPr>
+                              <m:ctrlPr>
+                                <a:rPr lang="fr-CH" sz="2400" b="0" i="1">
+                                  <a:latin typeface="Cambria Math" panose="02040503050406030204" pitchFamily="18" charset="0"/>
+                                </a:rPr>
+                              </m:ctrlPr>
+                            </m:dPr>
                             <m:e>
                               <m:r>
-                                <a:rPr lang="fr-CH" sz="2400" i="1">
+                                <a:rPr lang="fr-CH" sz="2400" b="0" i="1">
                                   <a:latin typeface="Cambria Math" panose="02040503050406030204" pitchFamily="18" charset="0"/>
                                 </a:rPr>
-                                <m:t>𝑘</m:t>
+                                <m:t>−</m:t>
+                              </m:r>
+                              <m:r>
+                                <a:rPr lang="fr-CH" sz="2400" b="0" i="1">
+                                  <a:latin typeface="Cambria Math" panose="02040503050406030204" pitchFamily="18" charset="0"/>
+                                </a:rPr>
+                                <m:t>𝑛</m:t>
+                              </m:r>
+                              <m:r>
+                                <a:rPr lang="fr-CH" sz="2400" b="0" i="1">
+                                  <a:latin typeface="Cambria Math" panose="02040503050406030204" pitchFamily="18" charset="0"/>
+                                </a:rPr>
+                                <m:t>−1</m:t>
                               </m:r>
                             </m:e>
-                          </m:mr>
-                        </m:m>
-                      </m:e>
-                    </m:d>
-                    <m:r>
-                      <a:rPr lang="fr-CH" sz="2400" b="0" i="1">
-                        <a:latin typeface="Cambria Math" panose="02040503050406030204" pitchFamily="18" charset="0"/>
-                      </a:rPr>
-                      <m:t>=</m:t>
-                    </m:r>
-                    <m:f>
-                      <m:fPr>
-                        <m:ctrlPr>
-                          <a:rPr lang="fr-CH" sz="2400" b="0" i="1">
-                            <a:latin typeface="Cambria Math" panose="02040503050406030204" pitchFamily="18" charset="0"/>
-                          </a:rPr>
-                        </m:ctrlPr>
-                      </m:fPr>
-                      <m:num>
-                        <m:d>
-                          <m:dPr>
-                            <m:ctrlPr>
-                              <a:rPr lang="fr-CH" sz="2400" b="0" i="1">
-                                <a:latin typeface="Cambria Math" panose="02040503050406030204" pitchFamily="18" charset="0"/>
-                              </a:rPr>
-                            </m:ctrlPr>
-                          </m:dPr>
-                          <m:e>
-                            <m:r>
-                              <a:rPr lang="fr-CH" sz="2400" b="0" i="1">
-                                <a:latin typeface="Cambria Math" panose="02040503050406030204" pitchFamily="18" charset="0"/>
-                              </a:rPr>
-                              <m:t>−</m:t>
-                            </m:r>
-                            <m:r>
-                              <a:rPr lang="fr-CH" sz="2400" b="0" i="1">
-                                <a:latin typeface="Cambria Math" panose="02040503050406030204" pitchFamily="18" charset="0"/>
-                              </a:rPr>
-                              <m:t>𝑛</m:t>
-                            </m:r>
-                          </m:e>
-                        </m:d>
-                        <m:d>
-                          <m:dPr>
-                            <m:ctrlPr>
-                              <a:rPr lang="fr-CH" sz="2400" b="0" i="1">
-                                <a:latin typeface="Cambria Math" panose="02040503050406030204" pitchFamily="18" charset="0"/>
-                              </a:rPr>
-                            </m:ctrlPr>
-                          </m:dPr>
-                          <m:e>
-                            <m:r>
-                              <a:rPr lang="fr-CH" sz="2400" b="0" i="1">
-                                <a:latin typeface="Cambria Math" panose="02040503050406030204" pitchFamily="18" charset="0"/>
-                              </a:rPr>
-                              <m:t>−</m:t>
-                            </m:r>
-                            <m:r>
-                              <a:rPr lang="fr-CH" sz="2400" b="0" i="1">
-                                <a:latin typeface="Cambria Math" panose="02040503050406030204" pitchFamily="18" charset="0"/>
-                              </a:rPr>
-                              <m:t>𝑛</m:t>
-                            </m:r>
-                            <m:r>
-                              <a:rPr lang="fr-CH" sz="2400" b="0" i="1">
-                                <a:latin typeface="Cambria Math" panose="02040503050406030204" pitchFamily="18" charset="0"/>
-                              </a:rPr>
-                              <m:t>−1</m:t>
-                            </m:r>
-                          </m:e>
-                        </m:d>
-                        <m:r>
-                          <a:rPr lang="fr-CH" sz="2400" b="0" i="1">
-                            <a:latin typeface="Cambria Math" panose="02040503050406030204" pitchFamily="18" charset="0"/>
-                          </a:rPr>
-                          <m:t>…(−</m:t>
-                        </m:r>
-                        <m:r>
-                          <a:rPr lang="fr-CH" sz="2400" b="0" i="1">
-                            <a:latin typeface="Cambria Math" panose="02040503050406030204" pitchFamily="18" charset="0"/>
-                          </a:rPr>
-                          <m:t>𝑛</m:t>
-                        </m:r>
-                        <m:r>
-                          <a:rPr lang="fr-CH" sz="2400" b="0" i="1">
-                            <a:latin typeface="Cambria Math" panose="02040503050406030204" pitchFamily="18" charset="0"/>
-                          </a:rPr>
-                          <m:t>−</m:t>
-                        </m:r>
-                        <m:r>
-                          <a:rPr lang="fr-CH" sz="2400" b="0" i="1">
-                            <a:latin typeface="Cambria Math" panose="02040503050406030204" pitchFamily="18" charset="0"/>
-                          </a:rPr>
-                          <m:t>𝑘</m:t>
-                        </m:r>
-                        <m:r>
-                          <a:rPr lang="fr-CH" sz="2400" b="0" i="1">
-                            <a:latin typeface="Cambria Math" panose="02040503050406030204" pitchFamily="18" charset="0"/>
-                          </a:rPr>
-                          <m:t>+1)</m:t>
-                        </m:r>
-                      </m:num>
-                      <m:den>
-                        <m:r>
-                          <a:rPr lang="fr-CH" sz="2400" b="0" i="1">
-                            <a:latin typeface="Cambria Math" panose="02040503050406030204" pitchFamily="18" charset="0"/>
-                          </a:rPr>
-                          <m:t>𝑘</m:t>
-                        </m:r>
-                        <m:r>
-                          <a:rPr lang="fr-CH" sz="2400" b="0" i="1">
-                            <a:latin typeface="Cambria Math" panose="02040503050406030204" pitchFamily="18" charset="0"/>
-                          </a:rPr>
-                          <m:t>!</m:t>
-                        </m:r>
-                      </m:den>
-                    </m:f>
-                    <m:r>
-                      <a:rPr lang="fr-CH" sz="2400" b="0" i="1">
-                        <a:latin typeface="Cambria Math" panose="02040503050406030204" pitchFamily="18" charset="0"/>
-                      </a:rPr>
-                      <m:t>=</m:t>
-                    </m:r>
-                  </m:oMath>
+                          </m:d>
+                          <m:r>
+                            <a:rPr lang="fr-CH" sz="2400" b="0" i="1">
+                              <a:latin typeface="Cambria Math" panose="02040503050406030204" pitchFamily="18" charset="0"/>
+                            </a:rPr>
+                            <m:t>…(−</m:t>
+                          </m:r>
+                          <m:r>
+                            <a:rPr lang="fr-CH" sz="2400" b="0" i="1">
+                              <a:latin typeface="Cambria Math" panose="02040503050406030204" pitchFamily="18" charset="0"/>
+                            </a:rPr>
+                            <m:t>𝑛</m:t>
+                          </m:r>
+                          <m:r>
+                            <a:rPr lang="fr-CH" sz="2400" b="0" i="1">
+                              <a:latin typeface="Cambria Math" panose="02040503050406030204" pitchFamily="18" charset="0"/>
+                            </a:rPr>
+                            <m:t>−</m:t>
+                          </m:r>
+                          <m:r>
+                            <a:rPr lang="fr-CH" sz="2400" b="0" i="1">
+                              <a:latin typeface="Cambria Math" panose="02040503050406030204" pitchFamily="18" charset="0"/>
+                            </a:rPr>
+                            <m:t>𝑘</m:t>
+                          </m:r>
+                          <m:r>
+                            <a:rPr lang="fr-CH" sz="2400" b="0" i="1">
+                              <a:latin typeface="Cambria Math" panose="02040503050406030204" pitchFamily="18" charset="0"/>
+                            </a:rPr>
+                            <m:t>+1)</m:t>
+                          </m:r>
+                        </m:num>
+                        <m:den>
+                          <m:r>
+                            <a:rPr lang="fr-CH" sz="2400" b="0" i="1">
+                              <a:latin typeface="Cambria Math" panose="02040503050406030204" pitchFamily="18" charset="0"/>
+                            </a:rPr>
+                            <m:t>𝑘</m:t>
+                          </m:r>
+                          <m:r>
+                            <a:rPr lang="fr-CH" sz="2400" b="0" i="1">
+                              <a:latin typeface="Cambria Math" panose="02040503050406030204" pitchFamily="18" charset="0"/>
+                            </a:rPr>
+                            <m:t>!</m:t>
+                          </m:r>
+                        </m:den>
+                      </m:f>
+                      <m:r>
+                        <a:rPr lang="fr-CH" sz="2400" b="0" i="1">
+                          <a:latin typeface="Cambria Math" panose="02040503050406030204" pitchFamily="18" charset="0"/>
+                        </a:rPr>
+                        <m:t>=</m:t>
+                      </m:r>
+                    </m:oMath>
+                  </m:oMathPara>
                 </a14:m>
-                <a:r>
-                  <a:rPr lang="fr-CH" sz="2400"/>
+                <a:endParaRPr lang="fr-CH" sz="2400" b="0" dirty="0"/>
+              </a:p>
+              <a:p>
+                <a:pPr marL="0" indent="0" algn="ctr">
+                  <a:buNone/>
+                </a:pPr>
+                <a:r>
+                  <a:rPr lang="fr-CH" sz="2400" dirty="0"/>
                   <a:t> </a:t>
                 </a:r>
                 <a14:m>
@@ -21022,10 +21279,16 @@
                               <m:t>𝑛</m:t>
                             </m:r>
                             <m:r>
+                              <a:rPr lang="fr-CH" sz="2400" b="0" i="1" smtClean="0">
+                                <a:latin typeface="Cambria Math" panose="02040503050406030204" pitchFamily="18" charset="0"/>
+                              </a:rPr>
+                              <m:t>+</m:t>
+                            </m:r>
+                            <m:r>
                               <a:rPr lang="fr-CH" sz="2400" i="1">
                                 <a:latin typeface="Cambria Math" panose="02040503050406030204" pitchFamily="18" charset="0"/>
                               </a:rPr>
-                              <m:t>−1</m:t>
+                              <m:t>1</m:t>
                             </m:r>
                           </m:e>
                         </m:d>
@@ -21042,7 +21305,19 @@
                           <m:t>𝑛</m:t>
                         </m:r>
                         <m:r>
+                          <a:rPr lang="fr-CH" sz="2400" b="0" i="1" smtClean="0">
+                            <a:latin typeface="Cambria Math" panose="02040503050406030204" pitchFamily="18" charset="0"/>
+                          </a:rPr>
+                          <m:t>+</m:t>
+                        </m:r>
+                        <m:r>
                           <a:rPr lang="fr-CH" sz="2400" i="1">
+                            <a:latin typeface="Cambria Math" panose="02040503050406030204" pitchFamily="18" charset="0"/>
+                          </a:rPr>
+                          <m:t>𝑘</m:t>
+                        </m:r>
+                        <m:r>
+                          <a:rPr lang="fr-CH" sz="2400" b="0" i="1" smtClean="0">
                             <a:latin typeface="Cambria Math" panose="02040503050406030204" pitchFamily="18" charset="0"/>
                           </a:rPr>
                           <m:t>−</m:t>
@@ -21051,13 +21326,7 @@
                           <a:rPr lang="fr-CH" sz="2400" i="1">
                             <a:latin typeface="Cambria Math" panose="02040503050406030204" pitchFamily="18" charset="0"/>
                           </a:rPr>
-                          <m:t>𝑘</m:t>
-                        </m:r>
-                        <m:r>
-                          <a:rPr lang="fr-CH" sz="2400" i="1">
-                            <a:latin typeface="Cambria Math" panose="02040503050406030204" pitchFamily="18" charset="0"/>
-                          </a:rPr>
-                          <m:t>+1)</m:t>
+                          <m:t>1)</m:t>
                         </m:r>
                       </m:num>
                       <m:den>
@@ -21076,418 +21345,145 @@
                       </m:den>
                     </m:f>
                     <m:r>
-                      <a:rPr lang="fr-CH" sz="2400" i="1">
+                      <a:rPr lang="fr-CH" sz="2400" b="0" i="1" smtClean="0">
+                        <a:latin typeface="Cambria Math" panose="02040503050406030204" pitchFamily="18" charset="0"/>
+                      </a:rPr>
+                      <m:t>=</m:t>
+                    </m:r>
+                    <m:f>
+                      <m:fPr>
+                        <m:ctrlPr>
+                          <a:rPr lang="fr-CH" sz="2000" i="1">
+                            <a:latin typeface="Cambria Math" panose="02040503050406030204" pitchFamily="18" charset="0"/>
+                          </a:rPr>
+                        </m:ctrlPr>
+                      </m:fPr>
+                      <m:num>
+                        <m:sSup>
+                          <m:sSupPr>
+                            <m:ctrlPr>
+                              <a:rPr lang="fr-CH" sz="2000" i="1">
+                                <a:latin typeface="Cambria Math" panose="02040503050406030204" pitchFamily="18" charset="0"/>
+                              </a:rPr>
+                            </m:ctrlPr>
+                          </m:sSupPr>
+                          <m:e>
+                            <m:d>
+                              <m:dPr>
+                                <m:ctrlPr>
+                                  <a:rPr lang="fr-CH" sz="2000" i="1">
+                                    <a:latin typeface="Cambria Math" panose="02040503050406030204" pitchFamily="18" charset="0"/>
+                                  </a:rPr>
+                                </m:ctrlPr>
+                              </m:dPr>
+                              <m:e>
+                                <m:r>
+                                  <a:rPr lang="fr-CH" sz="2000" i="1">
+                                    <a:latin typeface="Cambria Math" panose="02040503050406030204" pitchFamily="18" charset="0"/>
+                                  </a:rPr>
+                                  <m:t>−1</m:t>
+                                </m:r>
+                              </m:e>
+                            </m:d>
+                          </m:e>
+                          <m:sup>
+                            <m:r>
+                              <a:rPr lang="fr-CH" sz="2000" i="1">
+                                <a:latin typeface="Cambria Math" panose="02040503050406030204" pitchFamily="18" charset="0"/>
+                              </a:rPr>
+                              <m:t>𝑘</m:t>
+                            </m:r>
+                          </m:sup>
+                        </m:sSup>
+                        <m:d>
+                          <m:dPr>
+                            <m:ctrlPr>
+                              <a:rPr lang="fr-CH" sz="2000" b="0" i="1">
+                                <a:latin typeface="Cambria Math" panose="02040503050406030204" pitchFamily="18" charset="0"/>
+                              </a:rPr>
+                            </m:ctrlPr>
+                          </m:dPr>
+                          <m:e>
+                            <m:r>
+                              <a:rPr lang="fr-CH" sz="2000" i="1">
+                                <a:latin typeface="Cambria Math" panose="02040503050406030204" pitchFamily="18" charset="0"/>
+                              </a:rPr>
+                              <m:t>𝑛</m:t>
+                            </m:r>
+                            <m:r>
+                              <a:rPr lang="fr-CH" sz="2000" b="0" i="1" smtClean="0">
+                                <a:latin typeface="Cambria Math" panose="02040503050406030204" pitchFamily="18" charset="0"/>
+                              </a:rPr>
+                              <m:t>+</m:t>
+                            </m:r>
+                            <m:r>
+                              <a:rPr lang="fr-CH" sz="2000" i="1">
+                                <a:latin typeface="Cambria Math" panose="02040503050406030204" pitchFamily="18" charset="0"/>
+                              </a:rPr>
+                              <m:t>𝑘</m:t>
+                            </m:r>
+                            <m:r>
+                              <a:rPr lang="fr-CH" sz="2000" b="0" i="1" smtClean="0">
+                                <a:latin typeface="Cambria Math" panose="02040503050406030204" pitchFamily="18" charset="0"/>
+                              </a:rPr>
+                              <m:t>−</m:t>
+                            </m:r>
+                            <m:r>
+                              <a:rPr lang="fr-CH" sz="2000" i="1">
+                                <a:latin typeface="Cambria Math" panose="02040503050406030204" pitchFamily="18" charset="0"/>
+                              </a:rPr>
+                              <m:t>1</m:t>
+                            </m:r>
+                          </m:e>
+                        </m:d>
+                        <m:r>
+                          <a:rPr lang="fr-CH" sz="2000" b="0" i="1">
+                            <a:latin typeface="Cambria Math" panose="02040503050406030204" pitchFamily="18" charset="0"/>
+                          </a:rPr>
+                          <m:t>…</m:t>
+                        </m:r>
+                        <m:d>
+                          <m:dPr>
+                            <m:ctrlPr>
+                              <a:rPr lang="fr-CH" sz="2000" i="1">
+                                <a:latin typeface="Cambria Math" panose="02040503050406030204" pitchFamily="18" charset="0"/>
+                              </a:rPr>
+                            </m:ctrlPr>
+                          </m:dPr>
+                          <m:e>
+                            <m:r>
+                              <a:rPr lang="fr-CH" sz="2000" i="1">
+                                <a:latin typeface="Cambria Math" panose="02040503050406030204" pitchFamily="18" charset="0"/>
+                              </a:rPr>
+                              <m:t>𝑛</m:t>
+                            </m:r>
+                          </m:e>
+                        </m:d>
+                      </m:num>
+                      <m:den>
+                        <m:r>
+                          <a:rPr lang="fr-CH" sz="2000" i="1">
+                            <a:latin typeface="Cambria Math" panose="02040503050406030204" pitchFamily="18" charset="0"/>
+                          </a:rPr>
+                          <m:t>𝑘</m:t>
+                        </m:r>
+                        <m:r>
+                          <a:rPr lang="fr-CH" sz="2000" i="1">
+                            <a:latin typeface="Cambria Math" panose="02040503050406030204" pitchFamily="18" charset="0"/>
+                          </a:rPr>
+                          <m:t>!</m:t>
+                        </m:r>
+                      </m:den>
+                    </m:f>
+                    <m:r>
+                      <a:rPr lang="fr-CH" sz="2400" b="0" i="1">
                         <a:latin typeface="Cambria Math" panose="02040503050406030204" pitchFamily="18" charset="0"/>
                       </a:rPr>
                       <m:t>=</m:t>
                     </m:r>
                   </m:oMath>
                 </a14:m>
-                <a:endParaRPr lang="fr-CH" sz="2400" i="1">
-                  <a:latin typeface="Cambria Math" panose="02040503050406030204" pitchFamily="18" charset="0"/>
-                </a:endParaRPr>
-              </a:p>
-              <a:p>
-                <a:endParaRPr lang="fr-CH"/>
-              </a:p>
-              <a:p>
-                <a:pPr marL="0" indent="0">
-                  <a:buNone/>
-                </a:pPr>
-                <a14:m>
-                  <m:oMathPara xmlns:m="http://schemas.openxmlformats.org/officeDocument/2006/math">
-                    <m:oMathParaPr>
-                      <m:jc m:val="center"/>
-                    </m:oMathParaPr>
-                    <m:oMath xmlns:m="http://schemas.openxmlformats.org/officeDocument/2006/math">
-                      <m:r>
-                        <m:rPr>
-                          <m:nor/>
-                        </m:rPr>
-                        <a:rPr lang="fr-CH" sz="2000" b="0" i="0"/>
-                        <m:t>=</m:t>
-                      </m:r>
-                      <m:r>
-                        <m:rPr>
-                          <m:nor/>
-                        </m:rPr>
-                        <a:rPr lang="fr-CH" sz="2000"/>
-                        <m:t> </m:t>
-                      </m:r>
-                      <m:f>
-                        <m:fPr>
-                          <m:ctrlPr>
-                            <a:rPr lang="fr-CH" sz="2000" i="1">
-                              <a:latin typeface="Cambria Math" panose="02040503050406030204" pitchFamily="18" charset="0"/>
-                            </a:rPr>
-                          </m:ctrlPr>
-                        </m:fPr>
-                        <m:num>
-                          <m:sSup>
-                            <m:sSupPr>
-                              <m:ctrlPr>
-                                <a:rPr lang="fr-CH" sz="2000" i="1">
-                                  <a:latin typeface="Cambria Math" panose="02040503050406030204" pitchFamily="18" charset="0"/>
-                                </a:rPr>
-                              </m:ctrlPr>
-                            </m:sSupPr>
-                            <m:e>
-                              <m:r>
-                                <a:rPr lang="fr-CH" sz="2000" i="1">
-                                  <a:latin typeface="Cambria Math" panose="02040503050406030204" pitchFamily="18" charset="0"/>
-                                </a:rPr>
-                                <m:t>(−1)</m:t>
-                              </m:r>
-                            </m:e>
-                            <m:sup>
-                              <m:r>
-                                <a:rPr lang="fr-CH" sz="2000" i="1">
-                                  <a:latin typeface="Cambria Math" panose="02040503050406030204" pitchFamily="18" charset="0"/>
-                                </a:rPr>
-                                <m:t>𝑘</m:t>
-                              </m:r>
-                            </m:sup>
-                          </m:sSup>
-                          <m:d>
-                            <m:dPr>
-                              <m:ctrlPr>
-                                <a:rPr lang="fr-CH" sz="2000" i="1">
-                                  <a:latin typeface="Cambria Math" panose="02040503050406030204" pitchFamily="18" charset="0"/>
-                                </a:rPr>
-                              </m:ctrlPr>
-                            </m:dPr>
-                            <m:e>
-                              <m:r>
-                                <a:rPr lang="fr-CH" sz="2000" i="1">
-                                  <a:latin typeface="Cambria Math" panose="02040503050406030204" pitchFamily="18" charset="0"/>
-                                </a:rPr>
-                                <m:t>𝑛</m:t>
-                              </m:r>
-                            </m:e>
-                          </m:d>
-                          <m:d>
-                            <m:dPr>
-                              <m:ctrlPr>
-                                <a:rPr lang="fr-CH" sz="2000" i="1">
-                                  <a:latin typeface="Cambria Math" panose="02040503050406030204" pitchFamily="18" charset="0"/>
-                                </a:rPr>
-                              </m:ctrlPr>
-                            </m:dPr>
-                            <m:e>
-                              <m:r>
-                                <a:rPr lang="fr-CH" sz="2000" i="1">
-                                  <a:latin typeface="Cambria Math" panose="02040503050406030204" pitchFamily="18" charset="0"/>
-                                </a:rPr>
-                                <m:t>𝑛</m:t>
-                              </m:r>
-                              <m:r>
-                                <a:rPr lang="fr-CH" sz="2000" i="1">
-                                  <a:latin typeface="Cambria Math" panose="02040503050406030204" pitchFamily="18" charset="0"/>
-                                </a:rPr>
-                                <m:t>−1</m:t>
-                              </m:r>
-                            </m:e>
-                          </m:d>
-                          <m:r>
-                            <a:rPr lang="fr-CH" sz="2000" i="1">
-                              <a:latin typeface="Cambria Math" panose="02040503050406030204" pitchFamily="18" charset="0"/>
-                            </a:rPr>
-                            <m:t>…(</m:t>
-                          </m:r>
-                          <m:r>
-                            <a:rPr lang="fr-CH" sz="2000" i="1">
-                              <a:latin typeface="Cambria Math" panose="02040503050406030204" pitchFamily="18" charset="0"/>
-                            </a:rPr>
-                            <m:t>𝑛</m:t>
-                          </m:r>
-                          <m:r>
-                            <a:rPr lang="fr-CH" sz="2000" i="1">
-                              <a:latin typeface="Cambria Math" panose="02040503050406030204" pitchFamily="18" charset="0"/>
-                            </a:rPr>
-                            <m:t>−</m:t>
-                          </m:r>
-                          <m:r>
-                            <a:rPr lang="fr-CH" sz="2000" i="1">
-                              <a:latin typeface="Cambria Math" panose="02040503050406030204" pitchFamily="18" charset="0"/>
-                            </a:rPr>
-                            <m:t>𝑘</m:t>
-                          </m:r>
-                          <m:r>
-                            <a:rPr lang="fr-CH" sz="2000" i="1">
-                              <a:latin typeface="Cambria Math" panose="02040503050406030204" pitchFamily="18" charset="0"/>
-                            </a:rPr>
-                            <m:t>+1)</m:t>
-                          </m:r>
-                        </m:num>
-                        <m:den>
-                          <m:r>
-                            <a:rPr lang="fr-CH" sz="2000" i="1">
-                              <a:latin typeface="Cambria Math" panose="02040503050406030204" pitchFamily="18" charset="0"/>
-                            </a:rPr>
-                            <m:t>𝑘</m:t>
-                          </m:r>
-                          <m:r>
-                            <a:rPr lang="fr-CH" sz="2000" i="1">
-                              <a:latin typeface="Cambria Math" panose="02040503050406030204" pitchFamily="18" charset="0"/>
-                            </a:rPr>
-                            <m:t>!</m:t>
-                          </m:r>
-                        </m:den>
-                      </m:f>
-                      <m:r>
-                        <a:rPr lang="fr-CH" sz="2000" b="0" i="1">
-                          <a:latin typeface="Cambria Math" panose="02040503050406030204" pitchFamily="18" charset="0"/>
-                        </a:rPr>
-                        <m:t>=</m:t>
-                      </m:r>
-                      <m:f>
-                        <m:fPr>
-                          <m:ctrlPr>
-                            <a:rPr lang="fr-CH" sz="2000" i="1">
-                              <a:latin typeface="Cambria Math" panose="02040503050406030204" pitchFamily="18" charset="0"/>
-                            </a:rPr>
-                          </m:ctrlPr>
-                        </m:fPr>
-                        <m:num>
-                          <m:sSup>
-                            <m:sSupPr>
-                              <m:ctrlPr>
-                                <a:rPr lang="fr-CH" sz="2000" i="1">
-                                  <a:latin typeface="Cambria Math" panose="02040503050406030204" pitchFamily="18" charset="0"/>
-                                </a:rPr>
-                              </m:ctrlPr>
-                            </m:sSupPr>
-                            <m:e>
-                              <m:d>
-                                <m:dPr>
-                                  <m:ctrlPr>
-                                    <a:rPr lang="fr-CH" sz="2000" i="1">
-                                      <a:latin typeface="Cambria Math" panose="02040503050406030204" pitchFamily="18" charset="0"/>
-                                    </a:rPr>
-                                  </m:ctrlPr>
-                                </m:dPr>
-                                <m:e>
-                                  <m:r>
-                                    <a:rPr lang="fr-CH" sz="2000" i="1">
-                                      <a:latin typeface="Cambria Math" panose="02040503050406030204" pitchFamily="18" charset="0"/>
-                                    </a:rPr>
-                                    <m:t>−1</m:t>
-                                  </m:r>
-                                </m:e>
-                              </m:d>
-                            </m:e>
-                            <m:sup>
-                              <m:r>
-                                <a:rPr lang="fr-CH" sz="2000" i="1">
-                                  <a:latin typeface="Cambria Math" panose="02040503050406030204" pitchFamily="18" charset="0"/>
-                                </a:rPr>
-                                <m:t>𝑘</m:t>
-                              </m:r>
-                            </m:sup>
-                          </m:sSup>
-                          <m:d>
-                            <m:dPr>
-                              <m:ctrlPr>
-                                <a:rPr lang="fr-CH" sz="2000" b="0" i="1">
-                                  <a:latin typeface="Cambria Math" panose="02040503050406030204" pitchFamily="18" charset="0"/>
-                                </a:rPr>
-                              </m:ctrlPr>
-                            </m:dPr>
-                            <m:e>
-                              <m:r>
-                                <a:rPr lang="fr-CH" sz="2000" i="1">
-                                  <a:latin typeface="Cambria Math" panose="02040503050406030204" pitchFamily="18" charset="0"/>
-                                </a:rPr>
-                                <m:t>𝑛</m:t>
-                              </m:r>
-                              <m:r>
-                                <a:rPr lang="fr-CH" sz="2000" i="1">
-                                  <a:latin typeface="Cambria Math" panose="02040503050406030204" pitchFamily="18" charset="0"/>
-                                </a:rPr>
-                                <m:t>−</m:t>
-                              </m:r>
-                              <m:r>
-                                <a:rPr lang="fr-CH" sz="2000" i="1">
-                                  <a:latin typeface="Cambria Math" panose="02040503050406030204" pitchFamily="18" charset="0"/>
-                                </a:rPr>
-                                <m:t>𝑘</m:t>
-                              </m:r>
-                              <m:r>
-                                <a:rPr lang="fr-CH" sz="2000" i="1">
-                                  <a:latin typeface="Cambria Math" panose="02040503050406030204" pitchFamily="18" charset="0"/>
-                                </a:rPr>
-                                <m:t>+1</m:t>
-                              </m:r>
-                            </m:e>
-                          </m:d>
-                          <m:r>
-                            <a:rPr lang="fr-CH" sz="2000" b="0" i="1">
-                              <a:latin typeface="Cambria Math" panose="02040503050406030204" pitchFamily="18" charset="0"/>
-                            </a:rPr>
-                            <m:t>…</m:t>
-                          </m:r>
-                          <m:d>
-                            <m:dPr>
-                              <m:ctrlPr>
-                                <a:rPr lang="fr-CH" sz="2000" i="1">
-                                  <a:latin typeface="Cambria Math" panose="02040503050406030204" pitchFamily="18" charset="0"/>
-                                </a:rPr>
-                              </m:ctrlPr>
-                            </m:dPr>
-                            <m:e>
-                              <m:r>
-                                <a:rPr lang="fr-CH" sz="2000" i="1">
-                                  <a:latin typeface="Cambria Math" panose="02040503050406030204" pitchFamily="18" charset="0"/>
-                                </a:rPr>
-                                <m:t>𝑛</m:t>
-                              </m:r>
-                            </m:e>
-                          </m:d>
-                        </m:num>
-                        <m:den>
-                          <m:r>
-                            <a:rPr lang="fr-CH" sz="2000" i="1">
-                              <a:latin typeface="Cambria Math" panose="02040503050406030204" pitchFamily="18" charset="0"/>
-                            </a:rPr>
-                            <m:t>𝑘</m:t>
-                          </m:r>
-                          <m:r>
-                            <a:rPr lang="fr-CH" sz="2000" i="1">
-                              <a:latin typeface="Cambria Math" panose="02040503050406030204" pitchFamily="18" charset="0"/>
-                            </a:rPr>
-                            <m:t>!</m:t>
-                          </m:r>
-                        </m:den>
-                      </m:f>
-                      <m:r>
-                        <a:rPr lang="fr-CH" sz="2000" b="0" i="1">
-                          <a:latin typeface="Cambria Math" panose="02040503050406030204" pitchFamily="18" charset="0"/>
-                        </a:rPr>
-                        <m:t>=</m:t>
-                      </m:r>
-                      <m:f>
-                        <m:fPr>
-                          <m:ctrlPr>
-                            <a:rPr lang="fr-CH" sz="2000" i="1">
-                              <a:latin typeface="Cambria Math" panose="02040503050406030204" pitchFamily="18" charset="0"/>
-                            </a:rPr>
-                          </m:ctrlPr>
-                        </m:fPr>
-                        <m:num>
-                          <m:sSup>
-                            <m:sSupPr>
-                              <m:ctrlPr>
-                                <a:rPr lang="fr-CH" sz="2000" i="1">
-                                  <a:latin typeface="Cambria Math" panose="02040503050406030204" pitchFamily="18" charset="0"/>
-                                </a:rPr>
-                              </m:ctrlPr>
-                            </m:sSupPr>
-                            <m:e>
-                              <m:d>
-                                <m:dPr>
-                                  <m:ctrlPr>
-                                    <a:rPr lang="fr-CH" sz="2000" i="1">
-                                      <a:latin typeface="Cambria Math" panose="02040503050406030204" pitchFamily="18" charset="0"/>
-                                    </a:rPr>
-                                  </m:ctrlPr>
-                                </m:dPr>
-                                <m:e>
-                                  <m:r>
-                                    <a:rPr lang="fr-CH" sz="2000" i="1">
-                                      <a:latin typeface="Cambria Math" panose="02040503050406030204" pitchFamily="18" charset="0"/>
-                                    </a:rPr>
-                                    <m:t>−1</m:t>
-                                  </m:r>
-                                </m:e>
-                              </m:d>
-                            </m:e>
-                            <m:sup>
-                              <m:r>
-                                <a:rPr lang="fr-CH" sz="2000" i="1">
-                                  <a:latin typeface="Cambria Math" panose="02040503050406030204" pitchFamily="18" charset="0"/>
-                                </a:rPr>
-                                <m:t>𝑘</m:t>
-                              </m:r>
-                            </m:sup>
-                          </m:sSup>
-                          <m:d>
-                            <m:dPr>
-                              <m:ctrlPr>
-                                <a:rPr lang="fr-CH" sz="2000" i="1">
-                                  <a:latin typeface="Cambria Math" panose="02040503050406030204" pitchFamily="18" charset="0"/>
-                                </a:rPr>
-                              </m:ctrlPr>
-                            </m:dPr>
-                            <m:e>
-                              <m:r>
-                                <a:rPr lang="fr-CH" sz="2000" i="1">
-                                  <a:latin typeface="Cambria Math" panose="02040503050406030204" pitchFamily="18" charset="0"/>
-                                </a:rPr>
-                                <m:t>𝑛</m:t>
-                              </m:r>
-                              <m:r>
-                                <a:rPr lang="fr-CH" sz="2000" i="1">
-                                  <a:latin typeface="Cambria Math" panose="02040503050406030204" pitchFamily="18" charset="0"/>
-                                </a:rPr>
-                                <m:t>−</m:t>
-                              </m:r>
-                              <m:r>
-                                <a:rPr lang="fr-CH" sz="2000" i="1">
-                                  <a:latin typeface="Cambria Math" panose="02040503050406030204" pitchFamily="18" charset="0"/>
-                                </a:rPr>
-                                <m:t>𝑘</m:t>
-                              </m:r>
-                              <m:r>
-                                <a:rPr lang="fr-CH" sz="2000" i="1">
-                                  <a:latin typeface="Cambria Math" panose="02040503050406030204" pitchFamily="18" charset="0"/>
-                                </a:rPr>
-                                <m:t>+1</m:t>
-                              </m:r>
-                            </m:e>
-                          </m:d>
-                          <m:r>
-                            <a:rPr lang="fr-CH" sz="2000" i="1">
-                              <a:latin typeface="Cambria Math" panose="02040503050406030204" pitchFamily="18" charset="0"/>
-                            </a:rPr>
-                            <m:t>…</m:t>
-                          </m:r>
-                          <m:d>
-                            <m:dPr>
-                              <m:ctrlPr>
-                                <a:rPr lang="fr-CH" sz="2000" i="1">
-                                  <a:latin typeface="Cambria Math" panose="02040503050406030204" pitchFamily="18" charset="0"/>
-                                </a:rPr>
-                              </m:ctrlPr>
-                            </m:dPr>
-                            <m:e>
-                              <m:r>
-                                <a:rPr lang="fr-CH" sz="2000" i="1">
-                                  <a:latin typeface="Cambria Math" panose="02040503050406030204" pitchFamily="18" charset="0"/>
-                                </a:rPr>
-                                <m:t>𝑛</m:t>
-                              </m:r>
-                            </m:e>
-                          </m:d>
-                        </m:num>
-                        <m:den>
-                          <m:r>
-                            <a:rPr lang="fr-CH" sz="2000" i="1">
-                              <a:latin typeface="Cambria Math" panose="02040503050406030204" pitchFamily="18" charset="0"/>
-                            </a:rPr>
-                            <m:t>𝑘</m:t>
-                          </m:r>
-                          <m:r>
-                            <a:rPr lang="fr-CH" sz="2000" i="1">
-                              <a:latin typeface="Cambria Math" panose="02040503050406030204" pitchFamily="18" charset="0"/>
-                            </a:rPr>
-                            <m:t>!</m:t>
-                          </m:r>
-                        </m:den>
-                      </m:f>
-                    </m:oMath>
-                  </m:oMathPara>
-                </a14:m>
-                <a:endParaRPr lang="fr-CH" sz="2000" i="1">
+                <a:endParaRPr lang="fr-CH" sz="2400" b="0" i="1" dirty="0">
                   <a:latin typeface="Cambria Math" panose="02040503050406030204" pitchFamily="18" charset="0"/>
                 </a:endParaRPr>
               </a:p>
@@ -21497,12 +21493,6 @@
                 </a:pPr>
                 <a14:m>
                   <m:oMath xmlns:m="http://schemas.openxmlformats.org/officeDocument/2006/math">
-                    <m:r>
-                      <a:rPr lang="fr-CH" sz="2400" b="0" i="1">
-                        <a:latin typeface="Cambria Math" panose="02040503050406030204" pitchFamily="18" charset="0"/>
-                      </a:rPr>
-                      <m:t>=</m:t>
-                    </m:r>
                     <m:f>
                       <m:fPr>
                         <m:ctrlPr>
@@ -21564,7 +21554,19 @@
                               <m:t>𝑛</m:t>
                             </m:r>
                             <m:r>
+                              <a:rPr lang="fr-CH" sz="2400" b="0" i="1" smtClean="0">
+                                <a:latin typeface="Cambria Math" panose="02040503050406030204" pitchFamily="18" charset="0"/>
+                              </a:rPr>
+                              <m:t>+</m:t>
+                            </m:r>
+                            <m:r>
                               <a:rPr lang="fr-CH" sz="2400" i="1">
+                                <a:latin typeface="Cambria Math" panose="02040503050406030204" pitchFamily="18" charset="0"/>
+                              </a:rPr>
+                              <m:t>𝑘</m:t>
+                            </m:r>
+                            <m:r>
+                              <a:rPr lang="fr-CH" sz="2400" b="0" i="1" smtClean="0">
                                 <a:latin typeface="Cambria Math" panose="02040503050406030204" pitchFamily="18" charset="0"/>
                               </a:rPr>
                               <m:t>−</m:t>
@@ -21573,13 +21575,7 @@
                               <a:rPr lang="fr-CH" sz="2400" i="1">
                                 <a:latin typeface="Cambria Math" panose="02040503050406030204" pitchFamily="18" charset="0"/>
                               </a:rPr>
-                              <m:t>𝑘</m:t>
-                            </m:r>
-                            <m:r>
-                              <a:rPr lang="fr-CH" sz="2400" i="1">
-                                <a:latin typeface="Cambria Math" panose="02040503050406030204" pitchFamily="18" charset="0"/>
-                              </a:rPr>
-                              <m:t>+1</m:t>
+                              <m:t>1</m:t>
                             </m:r>
                           </m:e>
                         </m:d>
@@ -21679,7 +21675,7 @@
                   </m:oMath>
                 </a14:m>
                 <a:r>
-                  <a:rPr lang="en-US" sz="2400"/>
+                  <a:rPr lang="en-US" sz="2400" dirty="0"/>
                   <a:t> </a:t>
                 </a:r>
                 <a14:m>
@@ -21755,15 +21751,18 @@
                     </m:d>
                   </m:oMath>
                 </a14:m>
-                <a:endParaRPr lang="en-US" sz="2400"/>
+                <a:endParaRPr lang="en-US" sz="2400" dirty="0"/>
               </a:p>
               <a:p>
-                <a:r>
-                  <a:rPr lang="en-US"/>
+                <a:endParaRPr lang="en-US" dirty="0"/>
+              </a:p>
+              <a:p>
+                <a:r>
+                  <a:rPr lang="en-US" dirty="0"/>
                   <a:t>Therefore</a:t>
                 </a:r>
                 <a:r>
-                  <a:rPr lang="en-US" sz="2400"/>
+                  <a:rPr lang="en-US" sz="2400" dirty="0"/>
                   <a:t> </a:t>
                 </a:r>
                 <a14:m>
@@ -21856,7 +21855,7 @@
                   </m:oMath>
                 </a14:m>
                 <a:r>
-                  <a:rPr lang="en-US" sz="2400"/>
+                  <a:rPr lang="en-US" sz="2400" dirty="0"/>
                   <a:t> </a:t>
                 </a:r>
                 <a14:m>
@@ -21932,7 +21931,7 @@
                     </m:d>
                   </m:oMath>
                 </a14:m>
-                <a:endParaRPr lang="en-US" sz="2400"/>
+                <a:endParaRPr lang="en-US" sz="2400" dirty="0"/>
               </a:p>
             </p:txBody>
           </p:sp>
@@ -21958,7 +21957,7 @@
               <a:blipFill>
                 <a:blip r:embed="rId2"/>
                 <a:stretch>
-                  <a:fillRect l="-965" t="-292"/>
+                  <a:fillRect l="-965" t="-1170"/>
                 </a:stretch>
               </a:blipFill>
             </p:spPr>
@@ -22233,7 +22232,7 @@
           <a:p>
             <a:r>
               <a:rPr lang="en-US" dirty="0"/>
-              <a:t>Video 71: Inclusion-Exclusion</a:t>
+              <a:t>Video 72: Inclusion-Exclusion</a:t>
             </a:r>
           </a:p>
         </p:txBody>
@@ -23521,181 +23520,863 @@
           </a:p>
         </p:txBody>
       </p:sp>
-      <p:sp>
-        <p:nvSpPr>
-          <p:cNvPr id="3" name="Content Placeholder 2"/>
-          <p:cNvSpPr>
-            <a:spLocks noGrp="1"/>
-          </p:cNvSpPr>
-          <p:nvPr>
-            <p:ph idx="1"/>
-          </p:nvPr>
-        </p:nvSpPr>
-        <p:spPr/>
-        <p:txBody>
-          <a:bodyPr/>
-          <a:lstStyle/>
-          <a:p>
-            <a:pPr>
-              <a:buNone/>
-            </a:pPr>
-            <a:r>
-              <a:rPr lang="en-US" b="1" dirty="0"/>
-              <a:t>Theorem </a:t>
-            </a:r>
-            <a:r>
-              <a:rPr lang="en-US" b="1" dirty="0">
-                <a:ea typeface="Cambria Math" pitchFamily="18" charset="0"/>
-              </a:rPr>
-              <a:t>1. </a:t>
-            </a:r>
-            <a:r>
-              <a:rPr lang="en-US" b="1" dirty="0"/>
-              <a:t>The Principle of Inclusion-Exclusion</a:t>
-            </a:r>
-            <a:r>
-              <a:rPr lang="en-US" dirty="0"/>
-              <a:t>:</a:t>
-            </a:r>
-            <a:r>
-              <a:rPr lang="en-US" b="1" dirty="0"/>
-              <a:t> </a:t>
-            </a:r>
-            <a:r>
-              <a:rPr lang="en-US" dirty="0"/>
-              <a:t>Let </a:t>
-            </a:r>
-            <a:r>
-              <a:rPr lang="en-US" i="1" dirty="0"/>
-              <a:t>A</a:t>
-            </a:r>
-            <a:r>
-              <a:rPr lang="en-US" baseline="-25000" dirty="0">
-                <a:ea typeface="Cambria Math" pitchFamily="18" charset="0"/>
-              </a:rPr>
-              <a:t>1</a:t>
-            </a:r>
-            <a:r>
-              <a:rPr lang="en-US" dirty="0"/>
-              <a:t>, </a:t>
-            </a:r>
-            <a:r>
-              <a:rPr lang="en-US" i="1" dirty="0"/>
-              <a:t>A</a:t>
-            </a:r>
-            <a:r>
-              <a:rPr lang="en-US" baseline="-25000" dirty="0">
-                <a:ea typeface="Cambria Math" pitchFamily="18" charset="0"/>
-              </a:rPr>
-              <a:t>2</a:t>
-            </a:r>
-            <a:r>
-              <a:rPr lang="en-US" dirty="0"/>
-              <a:t>, …, </a:t>
-            </a:r>
-            <a:r>
-              <a:rPr lang="en-US" i="1" dirty="0"/>
-              <a:t>A</a:t>
-            </a:r>
-            <a:r>
-              <a:rPr lang="en-US" i="1" baseline="-25000" dirty="0"/>
-              <a:t>n</a:t>
-            </a:r>
-            <a:r>
-              <a:rPr lang="en-US" i="1" dirty="0"/>
-              <a:t> </a:t>
-            </a:r>
-            <a:r>
-              <a:rPr lang="en-US" dirty="0"/>
-              <a:t>be finite sets. Then:</a:t>
-            </a:r>
-          </a:p>
-        </p:txBody>
-      </p:sp>
-      <p:pic>
-        <p:nvPicPr>
-          <p:cNvPr id="6" name="Picture 5" descr="addin_tmp.png"/>
-          <p:cNvPicPr>
-            <a:picLocks noChangeAspect="1"/>
-          </p:cNvPicPr>
-          <p:nvPr>
-            <p:custDataLst>
-              <p:tags r:id="rId1"/>
-            </p:custDataLst>
-          </p:nvPr>
-        </p:nvPicPr>
-        <p:blipFill>
-          <a:blip r:embed="rId5" cstate="print"/>
-          <a:stretch>
-            <a:fillRect/>
-          </a:stretch>
-        </p:blipFill>
-        <p:spPr>
-          <a:xfrm>
-            <a:off x="2286000" y="3048000"/>
-            <a:ext cx="3657600" cy="380048"/>
-          </a:xfrm>
-          <a:prstGeom prst="rect">
-            <a:avLst/>
-          </a:prstGeom>
-        </p:spPr>
-      </p:pic>
-      <p:pic>
-        <p:nvPicPr>
-          <p:cNvPr id="10" name="Picture 9" descr="addin_tmp.png"/>
-          <p:cNvPicPr>
-            <a:picLocks noChangeAspect="1"/>
-          </p:cNvPicPr>
-          <p:nvPr>
-            <p:custDataLst>
-              <p:tags r:id="rId2"/>
-            </p:custDataLst>
-          </p:nvPr>
-        </p:nvPicPr>
-        <p:blipFill>
-          <a:blip r:embed="rId6" cstate="print"/>
-          <a:stretch>
-            <a:fillRect/>
-          </a:stretch>
-        </p:blipFill>
-        <p:spPr>
-          <a:xfrm>
-            <a:off x="3429000" y="3733800"/>
-            <a:ext cx="5169218" cy="871538"/>
-          </a:xfrm>
-          <a:prstGeom prst="rect">
-            <a:avLst/>
-          </a:prstGeom>
-        </p:spPr>
-      </p:pic>
-      <p:pic>
-        <p:nvPicPr>
-          <p:cNvPr id="13" name="Picture 12" descr="addin_tmp.png"/>
-          <p:cNvPicPr>
-            <a:picLocks noChangeAspect="1"/>
-          </p:cNvPicPr>
-          <p:nvPr>
-            <p:custDataLst>
-              <p:tags r:id="rId3"/>
-            </p:custDataLst>
-          </p:nvPr>
-        </p:nvPicPr>
-        <p:blipFill>
-          <a:blip r:embed="rId7" cstate="print"/>
-          <a:stretch>
-            <a:fillRect/>
-          </a:stretch>
-        </p:blipFill>
-        <p:spPr>
-          <a:xfrm>
-            <a:off x="2133600" y="4953000"/>
-            <a:ext cx="8001000" cy="784384"/>
-          </a:xfrm>
-          <a:prstGeom prst="rect">
-            <a:avLst/>
-          </a:prstGeom>
-        </p:spPr>
-      </p:pic>
+      <mc:AlternateContent xmlns:mc="http://schemas.openxmlformats.org/markup-compatibility/2006" xmlns:a14="http://schemas.microsoft.com/office/drawing/2010/main">
+        <mc:Choice Requires="a14">
+          <p:sp>
+            <p:nvSpPr>
+              <p:cNvPr id="3" name="Content Placeholder 2"/>
+              <p:cNvSpPr>
+                <a:spLocks noGrp="1"/>
+              </p:cNvSpPr>
+              <p:nvPr>
+                <p:ph idx="1"/>
+              </p:nvPr>
+            </p:nvSpPr>
+            <p:spPr/>
+            <p:txBody>
+              <a:bodyPr>
+                <a:normAutofit/>
+              </a:bodyPr>
+              <a:lstStyle/>
+              <a:p>
+                <a:pPr>
+                  <a:buNone/>
+                </a:pPr>
+                <a:r>
+                  <a:rPr lang="en-US" b="1" dirty="0"/>
+                  <a:t>Theorem </a:t>
+                </a:r>
+                <a:r>
+                  <a:rPr lang="en-US" b="1" dirty="0">
+                    <a:ea typeface="Cambria Math" pitchFamily="18" charset="0"/>
+                  </a:rPr>
+                  <a:t>1. </a:t>
+                </a:r>
+                <a:r>
+                  <a:rPr lang="en-US" b="1" dirty="0"/>
+                  <a:t>The Principle of Inclusion-Exclusion</a:t>
+                </a:r>
+                <a:r>
+                  <a:rPr lang="en-US" dirty="0"/>
+                  <a:t>:</a:t>
+                </a:r>
+                <a:r>
+                  <a:rPr lang="en-US" b="1" dirty="0"/>
+                  <a:t> </a:t>
+                </a:r>
+                <a:r>
+                  <a:rPr lang="en-US" dirty="0"/>
+                  <a:t>Let </a:t>
+                </a:r>
+                <a:r>
+                  <a:rPr lang="en-US" i="1" dirty="0"/>
+                  <a:t>A</a:t>
+                </a:r>
+                <a:r>
+                  <a:rPr lang="en-US" baseline="-25000" dirty="0">
+                    <a:ea typeface="Cambria Math" pitchFamily="18" charset="0"/>
+                  </a:rPr>
+                  <a:t>1</a:t>
+                </a:r>
+                <a:r>
+                  <a:rPr lang="en-US" dirty="0"/>
+                  <a:t>, </a:t>
+                </a:r>
+                <a:r>
+                  <a:rPr lang="en-US" i="1" dirty="0"/>
+                  <a:t>A</a:t>
+                </a:r>
+                <a:r>
+                  <a:rPr lang="en-US" baseline="-25000" dirty="0">
+                    <a:ea typeface="Cambria Math" pitchFamily="18" charset="0"/>
+                  </a:rPr>
+                  <a:t>2</a:t>
+                </a:r>
+                <a:r>
+                  <a:rPr lang="en-US" dirty="0"/>
+                  <a:t>, …, </a:t>
+                </a:r>
+                <a:r>
+                  <a:rPr lang="en-US" i="1" dirty="0"/>
+                  <a:t>A</a:t>
+                </a:r>
+                <a:r>
+                  <a:rPr lang="en-US" i="1" baseline="-25000" dirty="0"/>
+                  <a:t>n</a:t>
+                </a:r>
+                <a:r>
+                  <a:rPr lang="en-US" i="1" dirty="0"/>
+                  <a:t> </a:t>
+                </a:r>
+                <a:r>
+                  <a:rPr lang="en-US" dirty="0"/>
+                  <a:t>be finite sets. Then:</a:t>
+                </a:r>
+                <a:br>
+                  <a:rPr lang="en-US" dirty="0"/>
+                </a:br>
+                <a14:m>
+                  <m:oMathPara xmlns:m="http://schemas.openxmlformats.org/officeDocument/2006/math">
+                    <m:oMathParaPr>
+                      <m:jc m:val="centerGroup"/>
+                    </m:oMathParaPr>
+                    <m:oMath xmlns:m="http://schemas.openxmlformats.org/officeDocument/2006/math">
+                      <m:d>
+                        <m:dPr>
+                          <m:begChr m:val="|"/>
+                          <m:endChr m:val="|"/>
+                          <m:ctrlPr>
+                            <a:rPr lang="en-US" i="1" smtClean="0">
+                              <a:latin typeface="Cambria Math" panose="02040503050406030204" pitchFamily="18" charset="0"/>
+                            </a:rPr>
+                          </m:ctrlPr>
+                        </m:dPr>
+                        <m:e>
+                          <m:sSub>
+                            <m:sSubPr>
+                              <m:ctrlPr>
+                                <a:rPr lang="en-US" i="1">
+                                  <a:latin typeface="Cambria Math" panose="02040503050406030204" pitchFamily="18" charset="0"/>
+                                </a:rPr>
+                              </m:ctrlPr>
+                            </m:sSubPr>
+                            <m:e>
+                              <m:r>
+                                <a:rPr lang="fr-CH" b="0" i="1" smtClean="0">
+                                  <a:latin typeface="Cambria Math" panose="02040503050406030204" pitchFamily="18" charset="0"/>
+                                </a:rPr>
+                                <m:t>𝐴</m:t>
+                              </m:r>
+                            </m:e>
+                            <m:sub>
+                              <m:r>
+                                <a:rPr lang="fr-CH" b="0" i="1" smtClean="0">
+                                  <a:latin typeface="Cambria Math" panose="02040503050406030204" pitchFamily="18" charset="0"/>
+                                </a:rPr>
+                                <m:t>1</m:t>
+                              </m:r>
+                            </m:sub>
+                          </m:sSub>
+                          <m:r>
+                            <a:rPr lang="fr-CH" i="1" smtClean="0">
+                              <a:latin typeface="Cambria Math" panose="02040503050406030204" pitchFamily="18" charset="0"/>
+                              <a:ea typeface="Cambria Math" panose="02040503050406030204" pitchFamily="18" charset="0"/>
+                            </a:rPr>
+                            <m:t>∪</m:t>
+                          </m:r>
+                          <m:sSub>
+                            <m:sSubPr>
+                              <m:ctrlPr>
+                                <a:rPr lang="en-US" i="1">
+                                  <a:latin typeface="Cambria Math" panose="02040503050406030204" pitchFamily="18" charset="0"/>
+                                </a:rPr>
+                              </m:ctrlPr>
+                            </m:sSubPr>
+                            <m:e>
+                              <m:r>
+                                <a:rPr lang="fr-CH" b="0" i="1" smtClean="0">
+                                  <a:latin typeface="Cambria Math" panose="02040503050406030204" pitchFamily="18" charset="0"/>
+                                </a:rPr>
+                                <m:t>𝐴</m:t>
+                              </m:r>
+                            </m:e>
+                            <m:sub>
+                              <m:r>
+                                <a:rPr lang="fr-CH" b="0" i="1" smtClean="0">
+                                  <a:latin typeface="Cambria Math" panose="02040503050406030204" pitchFamily="18" charset="0"/>
+                                </a:rPr>
+                                <m:t>2</m:t>
+                              </m:r>
+                            </m:sub>
+                          </m:sSub>
+                          <m:r>
+                            <a:rPr lang="fr-CH" i="1">
+                              <a:latin typeface="Cambria Math" panose="02040503050406030204" pitchFamily="18" charset="0"/>
+                              <a:ea typeface="Cambria Math" panose="02040503050406030204" pitchFamily="18" charset="0"/>
+                            </a:rPr>
+                            <m:t>∪</m:t>
+                          </m:r>
+                          <m:r>
+                            <a:rPr lang="fr-CH" b="0" i="1" smtClean="0">
+                              <a:latin typeface="Cambria Math" panose="02040503050406030204" pitchFamily="18" charset="0"/>
+                              <a:ea typeface="Cambria Math" panose="02040503050406030204" pitchFamily="18" charset="0"/>
+                            </a:rPr>
+                            <m:t>…</m:t>
+                          </m:r>
+                          <m:r>
+                            <a:rPr lang="fr-CH" i="1">
+                              <a:latin typeface="Cambria Math" panose="02040503050406030204" pitchFamily="18" charset="0"/>
+                              <a:ea typeface="Cambria Math" panose="02040503050406030204" pitchFamily="18" charset="0"/>
+                            </a:rPr>
+                            <m:t>∪</m:t>
+                          </m:r>
+                          <m:sSub>
+                            <m:sSubPr>
+                              <m:ctrlPr>
+                                <a:rPr lang="en-US" i="1">
+                                  <a:latin typeface="Cambria Math" panose="02040503050406030204" pitchFamily="18" charset="0"/>
+                                </a:rPr>
+                              </m:ctrlPr>
+                            </m:sSubPr>
+                            <m:e>
+                              <m:r>
+                                <a:rPr lang="fr-CH" i="1">
+                                  <a:latin typeface="Cambria Math" panose="02040503050406030204" pitchFamily="18" charset="0"/>
+                                </a:rPr>
+                                <m:t>𝐴</m:t>
+                              </m:r>
+                            </m:e>
+                            <m:sub>
+                              <m:r>
+                                <a:rPr lang="fr-CH" b="0" i="1" smtClean="0">
+                                  <a:latin typeface="Cambria Math" panose="02040503050406030204" pitchFamily="18" charset="0"/>
+                                </a:rPr>
+                                <m:t>𝑛</m:t>
+                              </m:r>
+                            </m:sub>
+                          </m:sSub>
+                        </m:e>
+                      </m:d>
+                      <m:r>
+                        <a:rPr lang="fr-CH" b="0" i="1" smtClean="0">
+                          <a:latin typeface="Cambria Math" panose="02040503050406030204" pitchFamily="18" charset="0"/>
+                        </a:rPr>
+                        <m:t>=</m:t>
+                      </m:r>
+                      <m:nary>
+                        <m:naryPr>
+                          <m:chr m:val="∑"/>
+                          <m:supHide m:val="on"/>
+                          <m:ctrlPr>
+                            <a:rPr lang="en-US" i="1">
+                              <a:latin typeface="Cambria Math" panose="02040503050406030204" pitchFamily="18" charset="0"/>
+                            </a:rPr>
+                          </m:ctrlPr>
+                        </m:naryPr>
+                        <m:sub>
+                          <m:r>
+                            <m:rPr>
+                              <m:brk m:alnAt="7"/>
+                            </m:rPr>
+                            <a:rPr lang="fr-CH" i="1">
+                              <a:latin typeface="Cambria Math" panose="02040503050406030204" pitchFamily="18" charset="0"/>
+                            </a:rPr>
+                            <m:t>1</m:t>
+                          </m:r>
+                          <m:r>
+                            <a:rPr lang="fr-CH" i="1">
+                              <a:latin typeface="Cambria Math" panose="02040503050406030204" pitchFamily="18" charset="0"/>
+                              <a:ea typeface="Cambria Math" panose="02040503050406030204" pitchFamily="18" charset="0"/>
+                            </a:rPr>
+                            <m:t>≤</m:t>
+                          </m:r>
+                          <m:r>
+                            <a:rPr lang="fr-CH" i="1">
+                              <a:latin typeface="Cambria Math" panose="02040503050406030204" pitchFamily="18" charset="0"/>
+                              <a:ea typeface="Cambria Math" panose="02040503050406030204" pitchFamily="18" charset="0"/>
+                            </a:rPr>
+                            <m:t>𝑖</m:t>
+                          </m:r>
+                          <m:r>
+                            <a:rPr lang="fr-CH" i="1">
+                              <a:latin typeface="Cambria Math" panose="02040503050406030204" pitchFamily="18" charset="0"/>
+                              <a:ea typeface="Cambria Math" panose="02040503050406030204" pitchFamily="18" charset="0"/>
+                            </a:rPr>
+                            <m:t>≤</m:t>
+                          </m:r>
+                          <m:r>
+                            <a:rPr lang="fr-CH" i="1">
+                              <a:latin typeface="Cambria Math" panose="02040503050406030204" pitchFamily="18" charset="0"/>
+                              <a:ea typeface="Cambria Math" panose="02040503050406030204" pitchFamily="18" charset="0"/>
+                            </a:rPr>
+                            <m:t>𝑛</m:t>
+                          </m:r>
+                        </m:sub>
+                        <m:sup/>
+                        <m:e>
+                          <m:d>
+                            <m:dPr>
+                              <m:begChr m:val="|"/>
+                              <m:endChr m:val="|"/>
+                              <m:ctrlPr>
+                                <a:rPr lang="en-US" i="1">
+                                  <a:latin typeface="Cambria Math" panose="02040503050406030204" pitchFamily="18" charset="0"/>
+                                </a:rPr>
+                              </m:ctrlPr>
+                            </m:dPr>
+                            <m:e>
+                              <m:sSub>
+                                <m:sSubPr>
+                                  <m:ctrlPr>
+                                    <a:rPr lang="en-US" i="1">
+                                      <a:latin typeface="Cambria Math" panose="02040503050406030204" pitchFamily="18" charset="0"/>
+                                    </a:rPr>
+                                  </m:ctrlPr>
+                                </m:sSubPr>
+                                <m:e>
+                                  <m:r>
+                                    <a:rPr lang="fr-CH" b="0" i="1" smtClean="0">
+                                      <a:latin typeface="Cambria Math" panose="02040503050406030204" pitchFamily="18" charset="0"/>
+                                    </a:rPr>
+                                    <m:t>𝐴</m:t>
+                                  </m:r>
+                                </m:e>
+                                <m:sub>
+                                  <m:r>
+                                    <a:rPr lang="fr-CH" i="1">
+                                      <a:latin typeface="Cambria Math" panose="02040503050406030204" pitchFamily="18" charset="0"/>
+                                    </a:rPr>
+                                    <m:t>𝑖</m:t>
+                                  </m:r>
+                                </m:sub>
+                              </m:sSub>
+                            </m:e>
+                          </m:d>
+                        </m:e>
+                      </m:nary>
+                      <m:r>
+                        <a:rPr lang="fr-CH">
+                          <a:latin typeface="Cambria Math" panose="02040503050406030204" pitchFamily="18" charset="0"/>
+                        </a:rPr>
+                        <m:t>−</m:t>
+                      </m:r>
+                      <m:nary>
+                        <m:naryPr>
+                          <m:chr m:val="∑"/>
+                          <m:supHide m:val="on"/>
+                          <m:ctrlPr>
+                            <a:rPr lang="en-US" i="1">
+                              <a:latin typeface="Cambria Math" panose="02040503050406030204" pitchFamily="18" charset="0"/>
+                            </a:rPr>
+                          </m:ctrlPr>
+                        </m:naryPr>
+                        <m:sub>
+                          <m:r>
+                            <m:rPr>
+                              <m:brk m:alnAt="7"/>
+                            </m:rPr>
+                            <a:rPr lang="fr-CH" i="1">
+                              <a:latin typeface="Cambria Math" panose="02040503050406030204" pitchFamily="18" charset="0"/>
+                            </a:rPr>
+                            <m:t>1</m:t>
+                          </m:r>
+                          <m:r>
+                            <a:rPr lang="fr-CH" i="1">
+                              <a:latin typeface="Cambria Math" panose="02040503050406030204" pitchFamily="18" charset="0"/>
+                              <a:ea typeface="Cambria Math" panose="02040503050406030204" pitchFamily="18" charset="0"/>
+                            </a:rPr>
+                            <m:t>≤</m:t>
+                          </m:r>
+                          <m:r>
+                            <a:rPr lang="fr-CH" i="1">
+                              <a:latin typeface="Cambria Math" panose="02040503050406030204" pitchFamily="18" charset="0"/>
+                              <a:ea typeface="Cambria Math" panose="02040503050406030204" pitchFamily="18" charset="0"/>
+                            </a:rPr>
+                            <m:t>𝑖</m:t>
+                          </m:r>
+                          <m:r>
+                            <a:rPr lang="fr-CH" i="1">
+                              <a:latin typeface="Cambria Math" panose="02040503050406030204" pitchFamily="18" charset="0"/>
+                              <a:ea typeface="Cambria Math" panose="02040503050406030204" pitchFamily="18" charset="0"/>
+                            </a:rPr>
+                            <m:t>&lt;</m:t>
+                          </m:r>
+                          <m:r>
+                            <a:rPr lang="fr-CH" i="1">
+                              <a:latin typeface="Cambria Math" panose="02040503050406030204" pitchFamily="18" charset="0"/>
+                              <a:ea typeface="Cambria Math" panose="02040503050406030204" pitchFamily="18" charset="0"/>
+                            </a:rPr>
+                            <m:t>𝑘</m:t>
+                          </m:r>
+                          <m:r>
+                            <a:rPr lang="fr-CH" i="1">
+                              <a:latin typeface="Cambria Math" panose="02040503050406030204" pitchFamily="18" charset="0"/>
+                              <a:ea typeface="Cambria Math" panose="02040503050406030204" pitchFamily="18" charset="0"/>
+                            </a:rPr>
+                            <m:t>≤</m:t>
+                          </m:r>
+                          <m:r>
+                            <a:rPr lang="fr-CH" i="1">
+                              <a:latin typeface="Cambria Math" panose="02040503050406030204" pitchFamily="18" charset="0"/>
+                              <a:ea typeface="Cambria Math" panose="02040503050406030204" pitchFamily="18" charset="0"/>
+                            </a:rPr>
+                            <m:t>𝑛</m:t>
+                          </m:r>
+                        </m:sub>
+                        <m:sup/>
+                        <m:e>
+                          <m:d>
+                            <m:dPr>
+                              <m:begChr m:val="|"/>
+                              <m:endChr m:val="|"/>
+                              <m:ctrlPr>
+                                <a:rPr lang="en-US" i="1">
+                                  <a:latin typeface="Cambria Math" panose="02040503050406030204" pitchFamily="18" charset="0"/>
+                                </a:rPr>
+                              </m:ctrlPr>
+                            </m:dPr>
+                            <m:e>
+                              <m:sSub>
+                                <m:sSubPr>
+                                  <m:ctrlPr>
+                                    <a:rPr lang="en-US" i="1">
+                                      <a:latin typeface="Cambria Math" panose="02040503050406030204" pitchFamily="18" charset="0"/>
+                                    </a:rPr>
+                                  </m:ctrlPr>
+                                </m:sSubPr>
+                                <m:e>
+                                  <m:r>
+                                    <a:rPr lang="fr-CH" b="0" i="1" smtClean="0">
+                                      <a:latin typeface="Cambria Math" panose="02040503050406030204" pitchFamily="18" charset="0"/>
+                                    </a:rPr>
+                                    <m:t>𝐴</m:t>
+                                  </m:r>
+                                </m:e>
+                                <m:sub>
+                                  <m:r>
+                                    <a:rPr lang="fr-CH" i="1">
+                                      <a:latin typeface="Cambria Math" panose="02040503050406030204" pitchFamily="18" charset="0"/>
+                                    </a:rPr>
+                                    <m:t>𝑖</m:t>
+                                  </m:r>
+                                </m:sub>
+                              </m:sSub>
+                              <m:r>
+                                <a:rPr lang="fr-CH" i="1">
+                                  <a:latin typeface="Cambria Math" panose="02040503050406030204" pitchFamily="18" charset="0"/>
+                                  <a:ea typeface="Cambria Math" panose="02040503050406030204" pitchFamily="18" charset="0"/>
+                                </a:rPr>
+                                <m:t>∩</m:t>
+                              </m:r>
+                              <m:sSub>
+                                <m:sSubPr>
+                                  <m:ctrlPr>
+                                    <a:rPr lang="en-US" i="1">
+                                      <a:latin typeface="Cambria Math" panose="02040503050406030204" pitchFamily="18" charset="0"/>
+                                    </a:rPr>
+                                  </m:ctrlPr>
+                                </m:sSubPr>
+                                <m:e>
+                                  <m:r>
+                                    <a:rPr lang="fr-CH" b="0" i="1" smtClean="0">
+                                      <a:latin typeface="Cambria Math" panose="02040503050406030204" pitchFamily="18" charset="0"/>
+                                    </a:rPr>
+                                    <m:t>𝐴</m:t>
+                                  </m:r>
+                                </m:e>
+                                <m:sub>
+                                  <m:r>
+                                    <a:rPr lang="fr-CH" i="1">
+                                      <a:latin typeface="Cambria Math" panose="02040503050406030204" pitchFamily="18" charset="0"/>
+                                    </a:rPr>
+                                    <m:t>𝑘</m:t>
+                                  </m:r>
+                                </m:sub>
+                              </m:sSub>
+                            </m:e>
+                          </m:d>
+                          <m:r>
+                            <a:rPr lang="fr-CH" i="1">
+                              <a:latin typeface="Cambria Math" panose="02040503050406030204" pitchFamily="18" charset="0"/>
+                            </a:rPr>
+                            <m:t>+</m:t>
+                          </m:r>
+                        </m:e>
+                      </m:nary>
+                    </m:oMath>
+                  </m:oMathPara>
+                </a14:m>
+                <a:endParaRPr lang="fr-CH" dirty="0"/>
+              </a:p>
+              <a:p>
+                <a:pPr>
+                  <a:buNone/>
+                </a:pPr>
+                <a14:m>
+                  <m:oMathPara xmlns:m="http://schemas.openxmlformats.org/officeDocument/2006/math">
+                    <m:oMathParaPr>
+                      <m:jc m:val="centerGroup"/>
+                    </m:oMathParaPr>
+                    <m:oMath xmlns:m="http://schemas.openxmlformats.org/officeDocument/2006/math">
+                      <m:r>
+                        <a:rPr lang="fr-CH" b="0" i="1" smtClean="0">
+                          <a:latin typeface="Cambria Math" panose="02040503050406030204" pitchFamily="18" charset="0"/>
+                        </a:rPr>
+                        <m:t>+</m:t>
+                      </m:r>
+                      <m:nary>
+                        <m:naryPr>
+                          <m:chr m:val="∑"/>
+                          <m:supHide m:val="on"/>
+                          <m:ctrlPr>
+                            <a:rPr lang="en-US" i="1">
+                              <a:latin typeface="Cambria Math" panose="02040503050406030204" pitchFamily="18" charset="0"/>
+                            </a:rPr>
+                          </m:ctrlPr>
+                        </m:naryPr>
+                        <m:sub>
+                          <m:r>
+                            <m:rPr>
+                              <m:brk m:alnAt="7"/>
+                            </m:rPr>
+                            <a:rPr lang="fr-CH" i="1">
+                              <a:latin typeface="Cambria Math" panose="02040503050406030204" pitchFamily="18" charset="0"/>
+                            </a:rPr>
+                            <m:t>1</m:t>
+                          </m:r>
+                          <m:r>
+                            <a:rPr lang="fr-CH" i="1">
+                              <a:latin typeface="Cambria Math" panose="02040503050406030204" pitchFamily="18" charset="0"/>
+                              <a:ea typeface="Cambria Math" panose="02040503050406030204" pitchFamily="18" charset="0"/>
+                            </a:rPr>
+                            <m:t>≤</m:t>
+                          </m:r>
+                          <m:r>
+                            <a:rPr lang="fr-CH" i="1">
+                              <a:latin typeface="Cambria Math" panose="02040503050406030204" pitchFamily="18" charset="0"/>
+                              <a:ea typeface="Cambria Math" panose="02040503050406030204" pitchFamily="18" charset="0"/>
+                            </a:rPr>
+                            <m:t>𝑖</m:t>
+                          </m:r>
+                          <m:r>
+                            <a:rPr lang="fr-CH" i="1">
+                              <a:latin typeface="Cambria Math" panose="02040503050406030204" pitchFamily="18" charset="0"/>
+                              <a:ea typeface="Cambria Math" panose="02040503050406030204" pitchFamily="18" charset="0"/>
+                            </a:rPr>
+                            <m:t>&lt;</m:t>
+                          </m:r>
+                          <m:r>
+                            <a:rPr lang="fr-CH" i="1">
+                              <a:latin typeface="Cambria Math" panose="02040503050406030204" pitchFamily="18" charset="0"/>
+                              <a:ea typeface="Cambria Math" panose="02040503050406030204" pitchFamily="18" charset="0"/>
+                            </a:rPr>
+                            <m:t>𝑗</m:t>
+                          </m:r>
+                          <m:r>
+                            <a:rPr lang="fr-CH" i="1">
+                              <a:latin typeface="Cambria Math" panose="02040503050406030204" pitchFamily="18" charset="0"/>
+                              <a:ea typeface="Cambria Math" panose="02040503050406030204" pitchFamily="18" charset="0"/>
+                            </a:rPr>
+                            <m:t>&lt;</m:t>
+                          </m:r>
+                          <m:r>
+                            <a:rPr lang="fr-CH" i="1">
+                              <a:latin typeface="Cambria Math" panose="02040503050406030204" pitchFamily="18" charset="0"/>
+                              <a:ea typeface="Cambria Math" panose="02040503050406030204" pitchFamily="18" charset="0"/>
+                            </a:rPr>
+                            <m:t>𝑘</m:t>
+                          </m:r>
+                          <m:r>
+                            <a:rPr lang="fr-CH" i="1">
+                              <a:latin typeface="Cambria Math" panose="02040503050406030204" pitchFamily="18" charset="0"/>
+                              <a:ea typeface="Cambria Math" panose="02040503050406030204" pitchFamily="18" charset="0"/>
+                            </a:rPr>
+                            <m:t>≤</m:t>
+                          </m:r>
+                          <m:r>
+                            <a:rPr lang="fr-CH" i="1">
+                              <a:latin typeface="Cambria Math" panose="02040503050406030204" pitchFamily="18" charset="0"/>
+                              <a:ea typeface="Cambria Math" panose="02040503050406030204" pitchFamily="18" charset="0"/>
+                            </a:rPr>
+                            <m:t>𝑛</m:t>
+                          </m:r>
+                        </m:sub>
+                        <m:sup/>
+                        <m:e>
+                          <m:d>
+                            <m:dPr>
+                              <m:begChr m:val="|"/>
+                              <m:endChr m:val="|"/>
+                              <m:ctrlPr>
+                                <a:rPr lang="en-US" i="1">
+                                  <a:latin typeface="Cambria Math" panose="02040503050406030204" pitchFamily="18" charset="0"/>
+                                </a:rPr>
+                              </m:ctrlPr>
+                            </m:dPr>
+                            <m:e>
+                              <m:sSub>
+                                <m:sSubPr>
+                                  <m:ctrlPr>
+                                    <a:rPr lang="en-US" i="1">
+                                      <a:latin typeface="Cambria Math" panose="02040503050406030204" pitchFamily="18" charset="0"/>
+                                    </a:rPr>
+                                  </m:ctrlPr>
+                                </m:sSubPr>
+                                <m:e>
+                                  <m:r>
+                                    <a:rPr lang="fr-CH" i="1">
+                                      <a:latin typeface="Cambria Math" panose="02040503050406030204" pitchFamily="18" charset="0"/>
+                                    </a:rPr>
+                                    <m:t>𝐴</m:t>
+                                  </m:r>
+                                </m:e>
+                                <m:sub>
+                                  <m:r>
+                                    <a:rPr lang="fr-CH" i="1">
+                                      <a:latin typeface="Cambria Math" panose="02040503050406030204" pitchFamily="18" charset="0"/>
+                                    </a:rPr>
+                                    <m:t>𝑖</m:t>
+                                  </m:r>
+                                </m:sub>
+                              </m:sSub>
+                              <m:r>
+                                <a:rPr lang="fr-CH" i="1">
+                                  <a:latin typeface="Cambria Math" panose="02040503050406030204" pitchFamily="18" charset="0"/>
+                                  <a:ea typeface="Cambria Math" panose="02040503050406030204" pitchFamily="18" charset="0"/>
+                                </a:rPr>
+                                <m:t>∩</m:t>
+                              </m:r>
+                              <m:sSub>
+                                <m:sSubPr>
+                                  <m:ctrlPr>
+                                    <a:rPr lang="en-US" i="1">
+                                      <a:latin typeface="Cambria Math" panose="02040503050406030204" pitchFamily="18" charset="0"/>
+                                    </a:rPr>
+                                  </m:ctrlPr>
+                                </m:sSubPr>
+                                <m:e>
+                                  <m:r>
+                                    <a:rPr lang="fr-CH" i="1">
+                                      <a:latin typeface="Cambria Math" panose="02040503050406030204" pitchFamily="18" charset="0"/>
+                                    </a:rPr>
+                                    <m:t>𝐴</m:t>
+                                  </m:r>
+                                </m:e>
+                                <m:sub>
+                                  <m:r>
+                                    <a:rPr lang="fr-CH" i="1">
+                                      <a:latin typeface="Cambria Math" panose="02040503050406030204" pitchFamily="18" charset="0"/>
+                                    </a:rPr>
+                                    <m:t>𝑗</m:t>
+                                  </m:r>
+                                </m:sub>
+                              </m:sSub>
+                              <m:r>
+                                <a:rPr lang="fr-CH" i="1">
+                                  <a:latin typeface="Cambria Math" panose="02040503050406030204" pitchFamily="18" charset="0"/>
+                                  <a:ea typeface="Cambria Math" panose="02040503050406030204" pitchFamily="18" charset="0"/>
+                                </a:rPr>
+                                <m:t>∩</m:t>
+                              </m:r>
+                              <m:sSub>
+                                <m:sSubPr>
+                                  <m:ctrlPr>
+                                    <a:rPr lang="en-US" i="1">
+                                      <a:latin typeface="Cambria Math" panose="02040503050406030204" pitchFamily="18" charset="0"/>
+                                    </a:rPr>
+                                  </m:ctrlPr>
+                                </m:sSubPr>
+                                <m:e>
+                                  <m:r>
+                                    <a:rPr lang="fr-CH" i="1">
+                                      <a:latin typeface="Cambria Math" panose="02040503050406030204" pitchFamily="18" charset="0"/>
+                                    </a:rPr>
+                                    <m:t>𝐴</m:t>
+                                  </m:r>
+                                </m:e>
+                                <m:sub>
+                                  <m:r>
+                                    <a:rPr lang="fr-CH" i="1">
+                                      <a:latin typeface="Cambria Math" panose="02040503050406030204" pitchFamily="18" charset="0"/>
+                                    </a:rPr>
+                                    <m:t>𝑘</m:t>
+                                  </m:r>
+                                </m:sub>
+                              </m:sSub>
+                            </m:e>
+                          </m:d>
+                          <m:r>
+                            <a:rPr lang="fr-CH" i="1">
+                              <a:latin typeface="Cambria Math" panose="02040503050406030204" pitchFamily="18" charset="0"/>
+                            </a:rPr>
+                            <m:t>−</m:t>
+                          </m:r>
+                        </m:e>
+                      </m:nary>
+                      <m:r>
+                        <a:rPr lang="fr-CH" i="1">
+                          <a:latin typeface="Cambria Math" panose="02040503050406030204" pitchFamily="18" charset="0"/>
+                        </a:rPr>
+                        <m:t>…+</m:t>
+                      </m:r>
+                      <m:sSup>
+                        <m:sSupPr>
+                          <m:ctrlPr>
+                            <a:rPr lang="fr-CH" i="1">
+                              <a:latin typeface="Cambria Math" panose="02040503050406030204" pitchFamily="18" charset="0"/>
+                            </a:rPr>
+                          </m:ctrlPr>
+                        </m:sSupPr>
+                        <m:e>
+                          <m:d>
+                            <m:dPr>
+                              <m:ctrlPr>
+                                <a:rPr lang="fr-CH" i="1">
+                                  <a:latin typeface="Cambria Math" panose="02040503050406030204" pitchFamily="18" charset="0"/>
+                                </a:rPr>
+                              </m:ctrlPr>
+                            </m:dPr>
+                            <m:e>
+                              <m:r>
+                                <a:rPr lang="fr-CH" i="1">
+                                  <a:latin typeface="Cambria Math" panose="02040503050406030204" pitchFamily="18" charset="0"/>
+                                </a:rPr>
+                                <m:t>−1</m:t>
+                              </m:r>
+                            </m:e>
+                          </m:d>
+                        </m:e>
+                        <m:sup>
+                          <m:r>
+                            <a:rPr lang="fr-CH" i="1">
+                              <a:latin typeface="Cambria Math" panose="02040503050406030204" pitchFamily="18" charset="0"/>
+                            </a:rPr>
+                            <m:t>𝑛</m:t>
+                          </m:r>
+                        </m:sup>
+                      </m:sSup>
+                      <m:d>
+                        <m:dPr>
+                          <m:begChr m:val="|"/>
+                          <m:endChr m:val="|"/>
+                          <m:ctrlPr>
+                            <a:rPr lang="en-US" i="1">
+                              <a:latin typeface="Cambria Math" panose="02040503050406030204" pitchFamily="18" charset="0"/>
+                            </a:rPr>
+                          </m:ctrlPr>
+                        </m:dPr>
+                        <m:e>
+                          <m:nary>
+                            <m:naryPr>
+                              <m:chr m:val="⋂"/>
+                              <m:supHide m:val="on"/>
+                              <m:ctrlPr>
+                                <a:rPr lang="en-US" i="1">
+                                  <a:latin typeface="Cambria Math" panose="02040503050406030204" pitchFamily="18" charset="0"/>
+                                </a:rPr>
+                              </m:ctrlPr>
+                            </m:naryPr>
+                            <m:sub>
+                              <m:r>
+                                <m:rPr>
+                                  <m:brk m:alnAt="7"/>
+                                </m:rPr>
+                                <a:rPr lang="fr-CH" i="1">
+                                  <a:latin typeface="Cambria Math" panose="02040503050406030204" pitchFamily="18" charset="0"/>
+                                </a:rPr>
+                                <m:t>1</m:t>
+                              </m:r>
+                              <m:r>
+                                <a:rPr lang="fr-CH" i="1">
+                                  <a:latin typeface="Cambria Math" panose="02040503050406030204" pitchFamily="18" charset="0"/>
+                                  <a:ea typeface="Cambria Math" panose="02040503050406030204" pitchFamily="18" charset="0"/>
+                                </a:rPr>
+                                <m:t>≤</m:t>
+                              </m:r>
+                              <m:r>
+                                <a:rPr lang="fr-CH" i="1">
+                                  <a:latin typeface="Cambria Math" panose="02040503050406030204" pitchFamily="18" charset="0"/>
+                                  <a:ea typeface="Cambria Math" panose="02040503050406030204" pitchFamily="18" charset="0"/>
+                                </a:rPr>
+                                <m:t>𝑖</m:t>
+                              </m:r>
+                              <m:r>
+                                <a:rPr lang="fr-CH" i="1">
+                                  <a:latin typeface="Cambria Math" panose="02040503050406030204" pitchFamily="18" charset="0"/>
+                                  <a:ea typeface="Cambria Math" panose="02040503050406030204" pitchFamily="18" charset="0"/>
+                                </a:rPr>
+                                <m:t>≤</m:t>
+                              </m:r>
+                              <m:r>
+                                <a:rPr lang="fr-CH" i="1">
+                                  <a:latin typeface="Cambria Math" panose="02040503050406030204" pitchFamily="18" charset="0"/>
+                                  <a:ea typeface="Cambria Math" panose="02040503050406030204" pitchFamily="18" charset="0"/>
+                                </a:rPr>
+                                <m:t>𝑛</m:t>
+                              </m:r>
+                            </m:sub>
+                            <m:sup/>
+                            <m:e>
+                              <m:sSub>
+                                <m:sSubPr>
+                                  <m:ctrlPr>
+                                    <a:rPr lang="fr-CH" i="1" smtClean="0">
+                                      <a:latin typeface="Cambria Math" panose="02040503050406030204" pitchFamily="18" charset="0"/>
+                                      <a:ea typeface="Cambria Math" panose="02040503050406030204" pitchFamily="18" charset="0"/>
+                                    </a:rPr>
+                                  </m:ctrlPr>
+                                </m:sSubPr>
+                                <m:e>
+                                  <m:r>
+                                    <a:rPr lang="fr-CH" b="0" i="1" smtClean="0">
+                                      <a:latin typeface="Cambria Math" panose="02040503050406030204" pitchFamily="18" charset="0"/>
+                                      <a:ea typeface="Cambria Math" panose="02040503050406030204" pitchFamily="18" charset="0"/>
+                                    </a:rPr>
+                                    <m:t>𝐴</m:t>
+                                  </m:r>
+                                </m:e>
+                                <m:sub>
+                                  <m:r>
+                                    <a:rPr lang="fr-CH" b="0" i="1" smtClean="0">
+                                      <a:latin typeface="Cambria Math" panose="02040503050406030204" pitchFamily="18" charset="0"/>
+                                      <a:ea typeface="Cambria Math" panose="02040503050406030204" pitchFamily="18" charset="0"/>
+                                    </a:rPr>
+                                    <m:t>𝑖</m:t>
+                                  </m:r>
+                                </m:sub>
+                              </m:sSub>
+                            </m:e>
+                          </m:nary>
+                        </m:e>
+                      </m:d>
+                    </m:oMath>
+                  </m:oMathPara>
+                </a14:m>
+                <a:endParaRPr lang="en-US" dirty="0"/>
+              </a:p>
+              <a:p>
+                <a:pPr>
+                  <a:buNone/>
+                </a:pPr>
+                <a:endParaRPr lang="en-US" dirty="0"/>
+              </a:p>
+            </p:txBody>
+          </p:sp>
+        </mc:Choice>
+        <mc:Fallback xmlns="">
+          <p:sp>
+            <p:nvSpPr>
+              <p:cNvPr id="3" name="Content Placeholder 2"/>
+              <p:cNvSpPr>
+                <a:spLocks noGrp="1" noRot="1" noChangeAspect="1" noMove="1" noResize="1" noEditPoints="1" noAdjustHandles="1" noChangeArrowheads="1" noChangeShapeType="1" noTextEdit="1"/>
+              </p:cNvSpPr>
+              <p:nvPr>
+                <p:ph idx="1"/>
+              </p:nvPr>
+            </p:nvSpPr>
+            <p:spPr>
+              <a:blipFill>
+                <a:blip r:embed="rId2"/>
+                <a:stretch>
+                  <a:fillRect l="-1086" t="-18713" b="-14620"/>
+                </a:stretch>
+              </a:blipFill>
+            </p:spPr>
+            <p:txBody>
+              <a:bodyPr/>
+              <a:lstStyle/>
+              <a:p>
+                <a:r>
+                  <a:rPr lang="en-US">
+                    <a:noFill/>
+                  </a:rPr>
+                  <a:t> </a:t>
+                </a:r>
+              </a:p>
+            </p:txBody>
+          </p:sp>
+        </mc:Fallback>
+      </mc:AlternateContent>
     </p:spTree>
     <p:extLst>
       <p:ext uri="{BB962C8B-B14F-4D97-AF65-F5344CB8AC3E}">
@@ -25552,218 +26233,6 @@
 <file path=ppt/slides/slide61.xml><?xml version="1.0" encoding="utf-8"?>
 <p:sld xmlns:a="http://schemas.openxmlformats.org/drawingml/2006/main" xmlns:r="http://schemas.openxmlformats.org/officeDocument/2006/relationships" xmlns:p="http://schemas.openxmlformats.org/presentationml/2006/main">
   <p:cSld>
-    <p:bg>
-      <p:bgPr>
-        <a:solidFill>
-          <a:schemeClr val="bg1">
-            <a:lumMod val="95000"/>
-          </a:schemeClr>
-        </a:solidFill>
-        <a:effectLst/>
-      </p:bgPr>
-    </p:bg>
-    <p:spTree>
-      <p:nvGrpSpPr>
-        <p:cNvPr id="1" name=""/>
-        <p:cNvGrpSpPr/>
-        <p:nvPr/>
-      </p:nvGrpSpPr>
-      <p:grpSpPr>
-        <a:xfrm>
-          <a:off x="0" y="0"/>
-          <a:ext cx="0" cy="0"/>
-          <a:chOff x="0" y="0"/>
-          <a:chExt cx="0" cy="0"/>
-        </a:xfrm>
-      </p:grpSpPr>
-      <p:sp>
-        <p:nvSpPr>
-          <p:cNvPr id="2" name="Title 1">
-            <a:extLst>
-              <a:ext uri="{FF2B5EF4-FFF2-40B4-BE49-F238E27FC236}">
-                <a16:creationId xmlns:a16="http://schemas.microsoft.com/office/drawing/2014/main" id="{30DEF578-F6C4-A943-90AB-2D7C11DE4C0F}"/>
-              </a:ext>
-            </a:extLst>
-          </p:cNvPr>
-          <p:cNvSpPr>
-            <a:spLocks noGrp="1"/>
-          </p:cNvSpPr>
-          <p:nvPr>
-            <p:ph type="title"/>
-          </p:nvPr>
-        </p:nvSpPr>
-        <p:spPr/>
-        <p:txBody>
-          <a:bodyPr/>
-          <a:lstStyle/>
-          <a:p>
-            <a:r>
-              <a:rPr lang="en-US"/>
-              <a:t>Summary</a:t>
-            </a:r>
-          </a:p>
-        </p:txBody>
-      </p:sp>
-      <p:sp>
-        <p:nvSpPr>
-          <p:cNvPr id="3" name="Content Placeholder 2">
-            <a:extLst>
-              <a:ext uri="{FF2B5EF4-FFF2-40B4-BE49-F238E27FC236}">
-                <a16:creationId xmlns:a16="http://schemas.microsoft.com/office/drawing/2014/main" id="{F189135A-648E-9943-B59C-B45A2E496EBA}"/>
-              </a:ext>
-            </a:extLst>
-          </p:cNvPr>
-          <p:cNvSpPr>
-            <a:spLocks noGrp="1"/>
-          </p:cNvSpPr>
-          <p:nvPr>
-            <p:ph idx="1"/>
-          </p:nvPr>
-        </p:nvSpPr>
-        <p:spPr/>
-        <p:txBody>
-          <a:bodyPr/>
-          <a:lstStyle/>
-          <a:p>
-            <a:r>
-              <a:rPr lang="en-US" dirty="0"/>
-              <a:t>Principle of Inclusion-Exclusion for 2 sets</a:t>
-            </a:r>
-          </a:p>
-          <a:p>
-            <a:r>
-              <a:rPr lang="en-US" dirty="0"/>
-              <a:t>Principle of Inclusion-Exclusion for 3 sets</a:t>
-            </a:r>
-          </a:p>
-          <a:p>
-            <a:r>
-              <a:rPr lang="en-US" dirty="0"/>
-              <a:t>Principle of Inclusion-Exclusion for n sets</a:t>
-            </a:r>
-          </a:p>
-          <a:p>
-            <a:endParaRPr lang="en-US"/>
-          </a:p>
-        </p:txBody>
-      </p:sp>
-    </p:spTree>
-    <p:extLst>
-      <p:ext uri="{BB962C8B-B14F-4D97-AF65-F5344CB8AC3E}">
-        <p14:creationId xmlns:p14="http://schemas.microsoft.com/office/powerpoint/2010/main" val="1558037444"/>
-      </p:ext>
-    </p:extLst>
-  </p:cSld>
-  <p:clrMapOvr>
-    <a:masterClrMapping/>
-  </p:clrMapOvr>
-</p:sld>
-</file>
-
-<file path=ppt/slides/slide62.xml><?xml version="1.0" encoding="utf-8"?>
-<p:sld xmlns:a="http://schemas.openxmlformats.org/drawingml/2006/main" xmlns:r="http://schemas.openxmlformats.org/officeDocument/2006/relationships" xmlns:p="http://schemas.openxmlformats.org/presentationml/2006/main">
-  <p:cSld>
-    <p:bg>
-      <p:bgPr>
-        <a:solidFill>
-          <a:schemeClr val="bg1">
-            <a:lumMod val="95000"/>
-          </a:schemeClr>
-        </a:solidFill>
-        <a:effectLst/>
-      </p:bgPr>
-    </p:bg>
-    <p:spTree>
-      <p:nvGrpSpPr>
-        <p:cNvPr id="1" name=""/>
-        <p:cNvGrpSpPr/>
-        <p:nvPr/>
-      </p:nvGrpSpPr>
-      <p:grpSpPr>
-        <a:xfrm>
-          <a:off x="0" y="0"/>
-          <a:ext cx="0" cy="0"/>
-          <a:chOff x="0" y="0"/>
-          <a:chExt cx="0" cy="0"/>
-        </a:xfrm>
-      </p:grpSpPr>
-      <p:sp>
-        <p:nvSpPr>
-          <p:cNvPr id="2" name="Title 1"/>
-          <p:cNvSpPr>
-            <a:spLocks noGrp="1"/>
-          </p:cNvSpPr>
-          <p:nvPr>
-            <p:ph type="ctrTitle"/>
-          </p:nvPr>
-        </p:nvSpPr>
-        <p:spPr/>
-        <p:txBody>
-          <a:bodyPr/>
-          <a:lstStyle/>
-          <a:p>
-            <a:r>
-              <a:rPr lang="en-US" dirty="0"/>
-              <a:t>Applications of Inclusion-Exclusion</a:t>
-            </a:r>
-          </a:p>
-        </p:txBody>
-      </p:sp>
-      <p:sp>
-        <p:nvSpPr>
-          <p:cNvPr id="3" name="Subtitle 2"/>
-          <p:cNvSpPr>
-            <a:spLocks noGrp="1"/>
-          </p:cNvSpPr>
-          <p:nvPr>
-            <p:ph type="subTitle" idx="1"/>
-          </p:nvPr>
-        </p:nvSpPr>
-        <p:spPr/>
-        <p:txBody>
-          <a:bodyPr/>
-          <a:lstStyle/>
-          <a:p>
-            <a:r>
-              <a:rPr lang="en-US" dirty="0"/>
-              <a:t>Section </a:t>
-            </a:r>
-            <a:r>
-              <a:rPr lang="en-US" dirty="0">
-                <a:latin typeface="Cambria Math" pitchFamily="18" charset="0"/>
-                <a:ea typeface="Cambria Math" pitchFamily="18" charset="0"/>
-              </a:rPr>
-              <a:t>8.6</a:t>
-            </a:r>
-          </a:p>
-        </p:txBody>
-      </p:sp>
-    </p:spTree>
-    <p:extLst>
-      <p:ext uri="{BB962C8B-B14F-4D97-AF65-F5344CB8AC3E}">
-        <p14:creationId xmlns:p14="http://schemas.microsoft.com/office/powerpoint/2010/main" val="3839577369"/>
-      </p:ext>
-    </p:extLst>
-  </p:cSld>
-  <p:clrMapOvr>
-    <a:masterClrMapping/>
-  </p:clrMapOvr>
-</p:sld>
-</file>
-
-<file path=ppt/slides/slide63.xml><?xml version="1.0" encoding="utf-8"?>
-<p:sld xmlns:a="http://schemas.openxmlformats.org/drawingml/2006/main" xmlns:r="http://schemas.openxmlformats.org/officeDocument/2006/relationships" xmlns:p="http://schemas.openxmlformats.org/presentationml/2006/main">
-  <p:cSld>
-    <p:bg>
-      <p:bgPr>
-        <a:solidFill>
-          <a:schemeClr val="bg1">
-            <a:lumMod val="95000"/>
-          </a:schemeClr>
-        </a:solidFill>
-        <a:effectLst/>
-      </p:bgPr>
-    </p:bg>
     <p:spTree>
       <p:nvGrpSpPr>
         <p:cNvPr id="1" name=""/>
@@ -25795,7 +26264,7 @@
           <a:p>
             <a:r>
               <a:rPr lang="en-US" dirty="0"/>
-              <a:t>Video 72: Applications of Inclusion-Exclusion</a:t>
+              <a:t>Derangements</a:t>
             </a:r>
           </a:p>
         </p:txBody>
@@ -25812,20 +26281,114 @@
         </p:nvSpPr>
         <p:spPr/>
         <p:txBody>
-          <a:bodyPr>
-            <a:normAutofit/>
-          </a:bodyPr>
+          <a:bodyPr/>
           <a:lstStyle/>
           <a:p>
-            <a:r>
-              <a:rPr lang="en-US" dirty="0"/>
-              <a:t>Onto-Functions</a:t>
-            </a:r>
-          </a:p>
-          <a:p>
-            <a:r>
-              <a:rPr lang="en-US" dirty="0"/>
-              <a:t>Derangements</a:t>
+            <a:pPr>
+              <a:buNone/>
+            </a:pPr>
+            <a:r>
+              <a:rPr lang="en-US" b="1" dirty="0"/>
+              <a:t>Definition</a:t>
+            </a:r>
+            <a:r>
+              <a:rPr lang="en-US" dirty="0"/>
+              <a:t>: A </a:t>
+            </a:r>
+            <a:r>
+              <a:rPr lang="en-US" b="1" dirty="0"/>
+              <a:t>derangement</a:t>
+            </a:r>
+            <a:r>
+              <a:rPr lang="en-US" dirty="0"/>
+              <a:t> is a permutation of objects that leaves no object in the original position.</a:t>
+            </a:r>
+          </a:p>
+          <a:p>
+            <a:pPr>
+              <a:buNone/>
+            </a:pPr>
+            <a:endParaRPr lang="en-US" dirty="0"/>
+          </a:p>
+          <a:p>
+            <a:pPr>
+              <a:buNone/>
+            </a:pPr>
+            <a:r>
+              <a:rPr lang="en-US" b="1" dirty="0"/>
+              <a:t>Example</a:t>
+            </a:r>
+            <a:r>
+              <a:rPr lang="en-US" dirty="0"/>
+              <a:t>: </a:t>
+            </a:r>
+          </a:p>
+          <a:p>
+            <a:pPr>
+              <a:buNone/>
+            </a:pPr>
+            <a:r>
+              <a:rPr lang="en-US" dirty="0"/>
+              <a:t>The permutation of </a:t>
+            </a:r>
+            <a:r>
+              <a:rPr lang="en-US" dirty="0">
+                <a:ea typeface="Cambria Math" pitchFamily="18" charset="0"/>
+              </a:rPr>
+              <a:t>21453 </a:t>
+            </a:r>
+            <a:r>
+              <a:rPr lang="en-US" dirty="0"/>
+              <a:t>is a derangement of </a:t>
+            </a:r>
+            <a:r>
+              <a:rPr lang="en-US" dirty="0">
+                <a:ea typeface="Cambria Math" pitchFamily="18" charset="0"/>
+              </a:rPr>
+              <a:t>12345</a:t>
+            </a:r>
+            <a:r>
+              <a:rPr lang="en-US" dirty="0"/>
+              <a:t>. </a:t>
+            </a:r>
+          </a:p>
+          <a:p>
+            <a:pPr>
+              <a:buNone/>
+            </a:pPr>
+            <a:r>
+              <a:rPr lang="en-US" dirty="0"/>
+              <a:t>But </a:t>
+            </a:r>
+            <a:r>
+              <a:rPr lang="en-US" dirty="0">
+                <a:ea typeface="Cambria Math" pitchFamily="18" charset="0"/>
+              </a:rPr>
+              <a:t>21543</a:t>
+            </a:r>
+            <a:r>
+              <a:rPr lang="en-US" dirty="0"/>
+              <a:t> is not a derangement of </a:t>
+            </a:r>
+            <a:r>
+              <a:rPr lang="en-US" dirty="0">
+                <a:ea typeface="Cambria Math" pitchFamily="18" charset="0"/>
+              </a:rPr>
+              <a:t>12345</a:t>
+            </a:r>
+            <a:r>
+              <a:rPr lang="en-US" dirty="0"/>
+              <a:t>, because </a:t>
+            </a:r>
+            <a:r>
+              <a:rPr lang="en-US" dirty="0">
+                <a:ea typeface="Cambria Math" pitchFamily="18" charset="0"/>
+              </a:rPr>
+              <a:t>4</a:t>
+            </a:r>
+            <a:r>
+              <a:rPr lang="en-US" dirty="0"/>
+              <a:t> is in its original position. </a:t>
             </a:r>
           </a:p>
         </p:txBody>
@@ -25833,7 +26396,7 @@
     </p:spTree>
     <p:extLst>
       <p:ext uri="{BB962C8B-B14F-4D97-AF65-F5344CB8AC3E}">
-        <p14:creationId xmlns:p14="http://schemas.microsoft.com/office/powerpoint/2010/main" val="1516049855"/>
+        <p14:creationId xmlns:p14="http://schemas.microsoft.com/office/powerpoint/2010/main" val="1532371265"/>
       </p:ext>
     </p:extLst>
   </p:cSld>
@@ -25843,7 +26406,7 @@
 </p:sld>
 </file>
 
-<file path=ppt/slides/slide64.xml><?xml version="1.0" encoding="utf-8"?>
+<file path=ppt/slides/slide62.xml><?xml version="1.0" encoding="utf-8"?>
 <p:sld xmlns:a="http://schemas.openxmlformats.org/drawingml/2006/main" xmlns:r="http://schemas.openxmlformats.org/officeDocument/2006/relationships" xmlns:p="http://schemas.openxmlformats.org/presentationml/2006/main">
   <p:cSld>
     <p:spTree>
@@ -25877,1431 +26440,6 @@
           <a:p>
             <a:r>
               <a:rPr lang="en-US" dirty="0"/>
-              <a:t>Example: The Number of Onto Functions</a:t>
-            </a:r>
-          </a:p>
-        </p:txBody>
-      </p:sp>
-      <p:sp>
-        <p:nvSpPr>
-          <p:cNvPr id="3" name="Content Placeholder 2"/>
-          <p:cNvSpPr>
-            <a:spLocks noGrp="1"/>
-          </p:cNvSpPr>
-          <p:nvPr>
-            <p:ph idx="1"/>
-          </p:nvPr>
-        </p:nvSpPr>
-        <p:spPr/>
-        <p:txBody>
-          <a:bodyPr>
-            <a:normAutofit fontScale="92500" lnSpcReduction="10000"/>
-          </a:bodyPr>
-          <a:lstStyle/>
-          <a:p>
-            <a:pPr>
-              <a:buNone/>
-            </a:pPr>
-            <a:r>
-              <a:rPr lang="en-US" dirty="0"/>
-              <a:t>How many onto (surjective) functions are there from a set with 6 elements to a set with 3 elements?</a:t>
-            </a:r>
-          </a:p>
-          <a:p>
-            <a:r>
-              <a:rPr lang="en-US" dirty="0"/>
-              <a:t>Suppose that the elements in the </a:t>
-            </a:r>
-            <a:r>
-              <a:rPr lang="en-US" dirty="0" err="1"/>
-              <a:t>codomain</a:t>
-            </a:r>
-            <a:r>
-              <a:rPr lang="en-US" dirty="0"/>
-              <a:t> are </a:t>
-            </a:r>
-            <a:r>
-              <a:rPr lang="en-US" i="1" dirty="0"/>
-              <a:t>b</a:t>
-            </a:r>
-            <a:r>
-              <a:rPr lang="en-US" baseline="-25000" dirty="0"/>
-              <a:t>1</a:t>
-            </a:r>
-            <a:r>
-              <a:rPr lang="en-US" dirty="0"/>
-              <a:t>, </a:t>
-            </a:r>
-            <a:r>
-              <a:rPr lang="en-US" i="1" dirty="0"/>
-              <a:t>b</a:t>
-            </a:r>
-            <a:r>
-              <a:rPr lang="en-US" baseline="-25000" dirty="0"/>
-              <a:t>2</a:t>
-            </a:r>
-            <a:r>
-              <a:rPr lang="en-US" dirty="0"/>
-              <a:t>, and </a:t>
-            </a:r>
-            <a:r>
-              <a:rPr lang="en-US" i="1" dirty="0"/>
-              <a:t>b</a:t>
-            </a:r>
-            <a:r>
-              <a:rPr lang="en-US" baseline="-25000" dirty="0"/>
-              <a:t>3</a:t>
-            </a:r>
-            <a:r>
-              <a:rPr lang="en-US" dirty="0"/>
-              <a:t>. </a:t>
-            </a:r>
-          </a:p>
-          <a:p>
-            <a:r>
-              <a:rPr lang="en-US" dirty="0"/>
-              <a:t>Let </a:t>
-            </a:r>
-            <a:r>
-              <a:rPr lang="en-US" i="1" dirty="0"/>
-              <a:t>P</a:t>
-            </a:r>
-            <a:r>
-              <a:rPr lang="en-US" baseline="-25000" dirty="0"/>
-              <a:t>1</a:t>
-            </a:r>
-            <a:r>
-              <a:rPr lang="en-US" dirty="0"/>
-              <a:t>, </a:t>
-            </a:r>
-            <a:r>
-              <a:rPr lang="en-US" i="1" dirty="0"/>
-              <a:t>P</a:t>
-            </a:r>
-            <a:r>
-              <a:rPr lang="en-US" baseline="-25000" dirty="0"/>
-              <a:t>2</a:t>
-            </a:r>
-            <a:r>
-              <a:rPr lang="en-US" dirty="0"/>
-              <a:t>, and </a:t>
-            </a:r>
-            <a:r>
-              <a:rPr lang="en-US" i="1" dirty="0"/>
-              <a:t>P</a:t>
-            </a:r>
-            <a:r>
-              <a:rPr lang="en-US" baseline="-25000" dirty="0"/>
-              <a:t>3 </a:t>
-            </a:r>
-            <a:r>
-              <a:rPr lang="en-US" dirty="0"/>
-              <a:t> be the properties that </a:t>
-            </a:r>
-            <a:r>
-              <a:rPr lang="en-US" i="1" dirty="0"/>
-              <a:t>b</a:t>
-            </a:r>
-            <a:r>
-              <a:rPr lang="en-US" baseline="-25000" dirty="0"/>
-              <a:t>1</a:t>
-            </a:r>
-            <a:r>
-              <a:rPr lang="en-US" dirty="0"/>
-              <a:t>, </a:t>
-            </a:r>
-            <a:r>
-              <a:rPr lang="en-US" i="1" dirty="0"/>
-              <a:t>b</a:t>
-            </a:r>
-            <a:r>
-              <a:rPr lang="en-US" baseline="-25000" dirty="0"/>
-              <a:t>2</a:t>
-            </a:r>
-            <a:r>
-              <a:rPr lang="en-US" dirty="0"/>
-              <a:t>, and </a:t>
-            </a:r>
-            <a:r>
-              <a:rPr lang="en-US" i="1" dirty="0"/>
-              <a:t>b</a:t>
-            </a:r>
-            <a:r>
-              <a:rPr lang="en-US" baseline="-25000" dirty="0"/>
-              <a:t>3</a:t>
-            </a:r>
-            <a:r>
-              <a:rPr lang="en-US" dirty="0"/>
-              <a:t> are not in the range of the function, respectively. </a:t>
-            </a:r>
-          </a:p>
-          <a:p>
-            <a:r>
-              <a:rPr lang="en-US" dirty="0"/>
-              <a:t>The function is onto if </a:t>
-            </a:r>
-            <a:r>
-              <a:rPr lang="en-US" b="1" dirty="0"/>
-              <a:t>none</a:t>
-            </a:r>
-            <a:r>
-              <a:rPr lang="en-US" dirty="0"/>
-              <a:t> of the properties </a:t>
-            </a:r>
-            <a:r>
-              <a:rPr lang="en-US" i="1" dirty="0"/>
-              <a:t>P</a:t>
-            </a:r>
-            <a:r>
-              <a:rPr lang="en-US" baseline="-25000" dirty="0"/>
-              <a:t>1</a:t>
-            </a:r>
-            <a:r>
-              <a:rPr lang="en-US" dirty="0"/>
-              <a:t>, </a:t>
-            </a:r>
-            <a:r>
-              <a:rPr lang="en-US" i="1" dirty="0"/>
-              <a:t>P</a:t>
-            </a:r>
-            <a:r>
-              <a:rPr lang="en-US" baseline="-25000" dirty="0"/>
-              <a:t>2</a:t>
-            </a:r>
-            <a:r>
-              <a:rPr lang="en-US" dirty="0"/>
-              <a:t>, and </a:t>
-            </a:r>
-            <a:r>
-              <a:rPr lang="en-US" i="1" dirty="0"/>
-              <a:t>P</a:t>
-            </a:r>
-            <a:r>
-              <a:rPr lang="en-US" baseline="-25000" dirty="0"/>
-              <a:t>3</a:t>
-            </a:r>
-            <a:r>
-              <a:rPr lang="en-US" dirty="0"/>
-              <a:t>  hold. </a:t>
-            </a:r>
-          </a:p>
-          <a:p>
-            <a:r>
-              <a:rPr lang="en-US" dirty="0"/>
-              <a:t>Let N be </a:t>
-            </a:r>
-            <a:r>
-              <a:rPr lang="en-US" dirty="0">
-                <a:ea typeface="Cambria Math"/>
-              </a:rPr>
-              <a:t>the total number of functions from a set with 6 elements to one with 3 elements.</a:t>
-            </a:r>
-            <a:endParaRPr lang="en-US" dirty="0"/>
-          </a:p>
-          <a:p>
-            <a:r>
-              <a:rPr lang="en-US" dirty="0"/>
-              <a:t>By the inclusion-exclusion principle the number is</a:t>
-            </a:r>
-          </a:p>
-          <a:p>
-            <a:pPr>
-              <a:buNone/>
-            </a:pPr>
-            <a:r>
-              <a:rPr lang="en-US" dirty="0"/>
-              <a:t>           N </a:t>
-            </a:r>
-            <a:r>
-              <a:rPr lang="en-US" dirty="0">
-                <a:ea typeface="Cambria Math"/>
-              </a:rPr>
-              <a:t>− [N(</a:t>
-            </a:r>
-            <a:r>
-              <a:rPr lang="en-US" i="1" dirty="0"/>
-              <a:t>P</a:t>
-            </a:r>
-            <a:r>
-              <a:rPr lang="en-US" baseline="-25000" dirty="0"/>
-              <a:t>1</a:t>
-            </a:r>
-            <a:r>
-              <a:rPr lang="en-US" dirty="0">
-                <a:ea typeface="Cambria Math"/>
-              </a:rPr>
-              <a:t>) + N(</a:t>
-            </a:r>
-            <a:r>
-              <a:rPr lang="en-US" i="1" dirty="0"/>
-              <a:t>P</a:t>
-            </a:r>
-            <a:r>
-              <a:rPr lang="en-US" baseline="-25000" dirty="0"/>
-              <a:t>2</a:t>
-            </a:r>
-            <a:r>
-              <a:rPr lang="en-US" dirty="0">
-                <a:ea typeface="Cambria Math"/>
-              </a:rPr>
-              <a:t>) + N(</a:t>
-            </a:r>
-            <a:r>
-              <a:rPr lang="en-US" i="1" dirty="0"/>
-              <a:t>P</a:t>
-            </a:r>
-            <a:r>
-              <a:rPr lang="en-US" baseline="-25000" dirty="0"/>
-              <a:t>3</a:t>
-            </a:r>
-            <a:r>
-              <a:rPr lang="en-US" dirty="0">
-                <a:ea typeface="Cambria Math"/>
-              </a:rPr>
-              <a:t>)]  +  [N(</a:t>
-            </a:r>
-            <a:r>
-              <a:rPr lang="en-US" i="1" dirty="0"/>
-              <a:t>P</a:t>
-            </a:r>
-            <a:r>
-              <a:rPr lang="en-US" baseline="-25000" dirty="0"/>
-              <a:t>1</a:t>
-            </a:r>
-            <a:r>
-              <a:rPr lang="en-US" i="1" dirty="0"/>
-              <a:t>P</a:t>
-            </a:r>
-            <a:r>
-              <a:rPr lang="en-US" baseline="-25000" dirty="0"/>
-              <a:t>2</a:t>
-            </a:r>
-            <a:r>
-              <a:rPr lang="en-US" dirty="0">
-                <a:ea typeface="Cambria Math"/>
-              </a:rPr>
-              <a:t>) + N(</a:t>
-            </a:r>
-            <a:r>
-              <a:rPr lang="en-US" i="1" dirty="0"/>
-              <a:t>P</a:t>
-            </a:r>
-            <a:r>
-              <a:rPr lang="en-US" baseline="-25000" dirty="0"/>
-              <a:t>1</a:t>
-            </a:r>
-            <a:r>
-              <a:rPr lang="en-US" i="1" dirty="0"/>
-              <a:t>P</a:t>
-            </a:r>
-            <a:r>
-              <a:rPr lang="en-US" baseline="-25000" dirty="0"/>
-              <a:t>3</a:t>
-            </a:r>
-            <a:r>
-              <a:rPr lang="en-US" dirty="0">
-                <a:ea typeface="Cambria Math"/>
-              </a:rPr>
-              <a:t>) + N(</a:t>
-            </a:r>
-            <a:r>
-              <a:rPr lang="en-US" i="1" dirty="0"/>
-              <a:t>P</a:t>
-            </a:r>
-            <a:r>
-              <a:rPr lang="en-US" baseline="-25000" dirty="0"/>
-              <a:t>2</a:t>
-            </a:r>
-            <a:r>
-              <a:rPr lang="en-US" i="1" dirty="0"/>
-              <a:t>P</a:t>
-            </a:r>
-            <a:r>
-              <a:rPr lang="en-US" baseline="-25000" dirty="0"/>
-              <a:t>3</a:t>
-            </a:r>
-            <a:r>
-              <a:rPr lang="en-US" dirty="0">
-                <a:ea typeface="Cambria Math"/>
-              </a:rPr>
-              <a:t>)] − N(</a:t>
-            </a:r>
-            <a:r>
-              <a:rPr lang="en-US" i="1" dirty="0"/>
-              <a:t>P</a:t>
-            </a:r>
-            <a:r>
-              <a:rPr lang="en-US" baseline="-25000" dirty="0"/>
-              <a:t>1</a:t>
-            </a:r>
-            <a:r>
-              <a:rPr lang="en-US" i="1" dirty="0"/>
-              <a:t>P</a:t>
-            </a:r>
-            <a:r>
-              <a:rPr lang="en-US" baseline="-25000" dirty="0"/>
-              <a:t>2</a:t>
-            </a:r>
-            <a:r>
-              <a:rPr lang="en-US" i="1" dirty="0"/>
-              <a:t>P</a:t>
-            </a:r>
-            <a:r>
-              <a:rPr lang="en-US" baseline="-25000" dirty="0"/>
-              <a:t>3</a:t>
-            </a:r>
-            <a:r>
-              <a:rPr lang="en-US" dirty="0">
-                <a:ea typeface="Cambria Math"/>
-              </a:rPr>
-              <a:t>)</a:t>
-            </a:r>
-          </a:p>
-        </p:txBody>
-      </p:sp>
-    </p:spTree>
-    <p:extLst>
-      <p:ext uri="{BB962C8B-B14F-4D97-AF65-F5344CB8AC3E}">
-        <p14:creationId xmlns:p14="http://schemas.microsoft.com/office/powerpoint/2010/main" val="3816391129"/>
-      </p:ext>
-    </p:extLst>
-  </p:cSld>
-  <p:clrMapOvr>
-    <a:masterClrMapping/>
-  </p:clrMapOvr>
-</p:sld>
-</file>
-
-<file path=ppt/slides/slide65.xml><?xml version="1.0" encoding="utf-8"?>
-<p:sld xmlns:a="http://schemas.openxmlformats.org/drawingml/2006/main" xmlns:r="http://schemas.openxmlformats.org/officeDocument/2006/relationships" xmlns:p="http://schemas.openxmlformats.org/presentationml/2006/main">
-  <p:cSld>
-    <p:spTree>
-      <p:nvGrpSpPr>
-        <p:cNvPr id="1" name=""/>
-        <p:cNvGrpSpPr/>
-        <p:nvPr/>
-      </p:nvGrpSpPr>
-      <p:grpSpPr>
-        <a:xfrm>
-          <a:off x="0" y="0"/>
-          <a:ext cx="0" cy="0"/>
-          <a:chOff x="0" y="0"/>
-          <a:chExt cx="0" cy="0"/>
-        </a:xfrm>
-      </p:grpSpPr>
-      <p:sp>
-        <p:nvSpPr>
-          <p:cNvPr id="2" name="Title 1">
-            <a:extLst>
-              <a:ext uri="{FF2B5EF4-FFF2-40B4-BE49-F238E27FC236}">
-                <a16:creationId xmlns:a16="http://schemas.microsoft.com/office/drawing/2014/main" id="{5E689A55-0902-1F48-96F6-F6B5C886391F}"/>
-              </a:ext>
-            </a:extLst>
-          </p:cNvPr>
-          <p:cNvSpPr>
-            <a:spLocks noGrp="1"/>
-          </p:cNvSpPr>
-          <p:nvPr>
-            <p:ph type="title"/>
-          </p:nvPr>
-        </p:nvSpPr>
-        <p:spPr/>
-        <p:txBody>
-          <a:bodyPr/>
-          <a:lstStyle/>
-          <a:p>
-            <a:r>
-              <a:rPr lang="en-US" dirty="0"/>
-              <a:t>Example: The Number of Onto Functions</a:t>
-            </a:r>
-            <a:endParaRPr lang="en-US"/>
-          </a:p>
-        </p:txBody>
-      </p:sp>
-      <p:sp>
-        <p:nvSpPr>
-          <p:cNvPr id="3" name="Content Placeholder 2">
-            <a:extLst>
-              <a:ext uri="{FF2B5EF4-FFF2-40B4-BE49-F238E27FC236}">
-                <a16:creationId xmlns:a16="http://schemas.microsoft.com/office/drawing/2014/main" id="{E787DEFD-E5B4-1F48-A78A-ABA02A730405}"/>
-              </a:ext>
-            </a:extLst>
-          </p:cNvPr>
-          <p:cNvSpPr>
-            <a:spLocks noGrp="1"/>
-          </p:cNvSpPr>
-          <p:nvPr>
-            <p:ph idx="1"/>
-          </p:nvPr>
-        </p:nvSpPr>
-        <p:spPr/>
-        <p:txBody>
-          <a:bodyPr>
-            <a:normAutofit fontScale="92500" lnSpcReduction="10000"/>
-          </a:bodyPr>
-          <a:lstStyle/>
-          <a:p>
-            <a:pPr>
-              <a:buNone/>
-            </a:pPr>
-            <a:r>
-              <a:rPr lang="en-US" dirty="0">
-                <a:ea typeface="Cambria Math"/>
-              </a:rPr>
-              <a:t>N = 3</a:t>
-            </a:r>
-            <a:r>
-              <a:rPr lang="en-US" baseline="30000" dirty="0">
-                <a:ea typeface="Cambria Math"/>
-              </a:rPr>
-              <a:t>6</a:t>
-            </a:r>
-            <a:r>
-              <a:rPr lang="en-US" dirty="0">
-                <a:ea typeface="Cambria Math"/>
-              </a:rPr>
-              <a:t> </a:t>
-            </a:r>
-          </a:p>
-          <a:p>
-            <a:pPr lvl="1"/>
-            <a:r>
-              <a:rPr lang="en-US" dirty="0">
-                <a:ea typeface="Cambria Math"/>
-              </a:rPr>
-              <a:t>total number of functions from a set with six elements to one with three elements</a:t>
-            </a:r>
-            <a:endParaRPr lang="en-US" baseline="30000" dirty="0">
-              <a:ea typeface="Cambria Math"/>
-            </a:endParaRPr>
-          </a:p>
-          <a:p>
-            <a:pPr>
-              <a:buNone/>
-            </a:pPr>
-            <a:r>
-              <a:rPr lang="en-US" dirty="0">
-                <a:ea typeface="Cambria Math"/>
-              </a:rPr>
-              <a:t>N(</a:t>
-            </a:r>
-            <a:r>
-              <a:rPr lang="en-US" i="1" dirty="0"/>
-              <a:t>P</a:t>
-            </a:r>
-            <a:r>
-              <a:rPr lang="en-US" baseline="-25000" dirty="0"/>
-              <a:t>1</a:t>
-            </a:r>
-            <a:r>
-              <a:rPr lang="en-US" dirty="0">
-                <a:ea typeface="Cambria Math"/>
-              </a:rPr>
-              <a:t>) = N(</a:t>
-            </a:r>
-            <a:r>
-              <a:rPr lang="en-US" i="1" dirty="0"/>
-              <a:t>P</a:t>
-            </a:r>
-            <a:r>
-              <a:rPr lang="en-US" baseline="-25000" dirty="0"/>
-              <a:t>2</a:t>
-            </a:r>
-            <a:r>
-              <a:rPr lang="en-US" dirty="0">
-                <a:ea typeface="Cambria Math"/>
-              </a:rPr>
-              <a:t>) =  N(</a:t>
-            </a:r>
-            <a:r>
-              <a:rPr lang="en-US" i="1" dirty="0"/>
-              <a:t>P</a:t>
-            </a:r>
-            <a:r>
-              <a:rPr lang="en-US" baseline="-25000" dirty="0"/>
-              <a:t>3</a:t>
-            </a:r>
-            <a:r>
-              <a:rPr lang="en-US" dirty="0">
-                <a:ea typeface="Cambria Math"/>
-              </a:rPr>
-              <a:t>) = 2</a:t>
-            </a:r>
-            <a:r>
-              <a:rPr lang="en-US" baseline="30000" dirty="0">
-                <a:ea typeface="Cambria Math"/>
-              </a:rPr>
-              <a:t>6</a:t>
-            </a:r>
-            <a:r>
-              <a:rPr lang="en-US" dirty="0">
-                <a:ea typeface="Cambria Math"/>
-              </a:rPr>
-              <a:t> </a:t>
-            </a:r>
-          </a:p>
-          <a:p>
-            <a:pPr lvl="1"/>
-            <a:r>
-              <a:rPr lang="en-US" dirty="0">
-                <a:ea typeface="Cambria Math"/>
-              </a:rPr>
-              <a:t>total number of functions from a set with six elements to one with two elements</a:t>
-            </a:r>
-            <a:endParaRPr lang="en-US" baseline="30000" dirty="0">
-              <a:ea typeface="Cambria Math"/>
-            </a:endParaRPr>
-          </a:p>
-          <a:p>
-            <a:pPr>
-              <a:buNone/>
-            </a:pPr>
-            <a:r>
-              <a:rPr lang="en-US" dirty="0">
-                <a:ea typeface="Cambria Math"/>
-              </a:rPr>
-              <a:t>N(</a:t>
-            </a:r>
-            <a:r>
-              <a:rPr lang="en-US" i="1" dirty="0"/>
-              <a:t>P</a:t>
-            </a:r>
-            <a:r>
-              <a:rPr lang="en-US" baseline="-25000" dirty="0"/>
-              <a:t>1</a:t>
-            </a:r>
-            <a:r>
-              <a:rPr lang="en-US" i="1" dirty="0"/>
-              <a:t>P</a:t>
-            </a:r>
-            <a:r>
-              <a:rPr lang="en-US" baseline="-25000" dirty="0"/>
-              <a:t>2</a:t>
-            </a:r>
-            <a:r>
-              <a:rPr lang="en-US" dirty="0">
-                <a:ea typeface="Cambria Math"/>
-              </a:rPr>
-              <a:t>) = N(</a:t>
-            </a:r>
-            <a:r>
-              <a:rPr lang="en-US" i="1" dirty="0"/>
-              <a:t>P</a:t>
-            </a:r>
-            <a:r>
-              <a:rPr lang="en-US" baseline="-25000" dirty="0"/>
-              <a:t>1</a:t>
-            </a:r>
-            <a:r>
-              <a:rPr lang="en-US" i="1" dirty="0"/>
-              <a:t>P</a:t>
-            </a:r>
-            <a:r>
-              <a:rPr lang="en-US" baseline="-25000" dirty="0"/>
-              <a:t>3</a:t>
-            </a:r>
-            <a:r>
-              <a:rPr lang="en-US" dirty="0">
-                <a:ea typeface="Cambria Math"/>
-              </a:rPr>
-              <a:t>) = N(</a:t>
-            </a:r>
-            <a:r>
-              <a:rPr lang="en-US" i="1" dirty="0"/>
-              <a:t>P</a:t>
-            </a:r>
-            <a:r>
-              <a:rPr lang="en-US" baseline="-25000" dirty="0"/>
-              <a:t>2</a:t>
-            </a:r>
-            <a:r>
-              <a:rPr lang="en-US" i="1" dirty="0"/>
-              <a:t>P</a:t>
-            </a:r>
-            <a:r>
-              <a:rPr lang="en-US" baseline="-25000" dirty="0"/>
-              <a:t>3</a:t>
-            </a:r>
-            <a:r>
-              <a:rPr lang="en-US" dirty="0">
-                <a:ea typeface="Cambria Math"/>
-              </a:rPr>
-              <a:t>) = 1 </a:t>
-            </a:r>
-          </a:p>
-          <a:p>
-            <a:pPr lvl="1"/>
-            <a:r>
-              <a:rPr lang="en-US" dirty="0">
-                <a:ea typeface="Cambria Math"/>
-              </a:rPr>
-              <a:t>total number of functions from a set with six elements to one with one element</a:t>
-            </a:r>
-          </a:p>
-          <a:p>
-            <a:pPr>
-              <a:buNone/>
-            </a:pPr>
-            <a:r>
-              <a:rPr lang="en-US" dirty="0">
-                <a:ea typeface="Cambria Math"/>
-              </a:rPr>
-              <a:t>N(</a:t>
-            </a:r>
-            <a:r>
-              <a:rPr lang="en-US" i="1" dirty="0"/>
-              <a:t>P</a:t>
-            </a:r>
-            <a:r>
-              <a:rPr lang="en-US" baseline="-25000" dirty="0"/>
-              <a:t>1</a:t>
-            </a:r>
-            <a:r>
-              <a:rPr lang="en-US" i="1" dirty="0"/>
-              <a:t>P</a:t>
-            </a:r>
-            <a:r>
-              <a:rPr lang="en-US" baseline="-25000" dirty="0"/>
-              <a:t>2</a:t>
-            </a:r>
-            <a:r>
-              <a:rPr lang="en-US" i="1" dirty="0"/>
-              <a:t>P</a:t>
-            </a:r>
-            <a:r>
-              <a:rPr lang="en-US" baseline="-25000" dirty="0"/>
-              <a:t>3</a:t>
-            </a:r>
-            <a:r>
-              <a:rPr lang="en-US" dirty="0">
-                <a:ea typeface="Cambria Math"/>
-              </a:rPr>
-              <a:t>)= 0</a:t>
-            </a:r>
-          </a:p>
-          <a:p>
-            <a:pPr lvl="1"/>
-            <a:r>
-              <a:rPr lang="en-US" dirty="0">
-                <a:ea typeface="Cambria Math"/>
-              </a:rPr>
-              <a:t>no functions if the co-domain is empty</a:t>
-            </a:r>
-          </a:p>
-          <a:p>
-            <a:pPr>
-              <a:buNone/>
-            </a:pPr>
-            <a:r>
-              <a:rPr lang="en-US" dirty="0">
-                <a:ea typeface="Cambria Math"/>
-              </a:rPr>
-              <a:t>Hence, the number of onto functions from a set with 6 elements to a set with 3 elements is:</a:t>
-            </a:r>
-          </a:p>
-          <a:p>
-            <a:pPr>
-              <a:buNone/>
-            </a:pPr>
-            <a:r>
-              <a:rPr lang="en-US" dirty="0">
-                <a:ea typeface="Cambria Math"/>
-              </a:rPr>
-              <a:t>			3</a:t>
-            </a:r>
-            <a:r>
-              <a:rPr lang="en-US" baseline="30000" dirty="0">
-                <a:ea typeface="Cambria Math"/>
-              </a:rPr>
-              <a:t>6</a:t>
-            </a:r>
-            <a:r>
-              <a:rPr lang="en-US" dirty="0">
-                <a:ea typeface="Cambria Math"/>
-              </a:rPr>
-              <a:t> − 3 ∙ 2</a:t>
-            </a:r>
-            <a:r>
-              <a:rPr lang="en-US" baseline="30000" dirty="0">
-                <a:ea typeface="Cambria Math"/>
-              </a:rPr>
-              <a:t>6  </a:t>
-            </a:r>
-            <a:r>
-              <a:rPr lang="en-US" dirty="0">
-                <a:ea typeface="Cambria Math"/>
-              </a:rPr>
-              <a:t>+ 3  = 729 − 192 + 3  = 540</a:t>
-            </a:r>
-            <a:endParaRPr lang="en-US" dirty="0"/>
-          </a:p>
-          <a:p>
-            <a:endParaRPr lang="en-US"/>
-          </a:p>
-        </p:txBody>
-      </p:sp>
-    </p:spTree>
-    <p:extLst>
-      <p:ext uri="{BB962C8B-B14F-4D97-AF65-F5344CB8AC3E}">
-        <p14:creationId xmlns:p14="http://schemas.microsoft.com/office/powerpoint/2010/main" val="1641159951"/>
-      </p:ext>
-    </p:extLst>
-  </p:cSld>
-  <p:clrMapOvr>
-    <a:masterClrMapping/>
-  </p:clrMapOvr>
-</p:sld>
-</file>
-
-<file path=ppt/slides/slide66.xml><?xml version="1.0" encoding="utf-8"?>
-<p:sld xmlns:a="http://schemas.openxmlformats.org/drawingml/2006/main" xmlns:r="http://schemas.openxmlformats.org/officeDocument/2006/relationships" xmlns:p="http://schemas.openxmlformats.org/presentationml/2006/main">
-  <p:cSld>
-    <p:spTree>
-      <p:nvGrpSpPr>
-        <p:cNvPr id="1" name=""/>
-        <p:cNvGrpSpPr/>
-        <p:nvPr/>
-      </p:nvGrpSpPr>
-      <p:grpSpPr>
-        <a:xfrm>
-          <a:off x="0" y="0"/>
-          <a:ext cx="0" cy="0"/>
-          <a:chOff x="0" y="0"/>
-          <a:chExt cx="0" cy="0"/>
-        </a:xfrm>
-      </p:grpSpPr>
-      <p:sp>
-        <p:nvSpPr>
-          <p:cNvPr id="2" name="Title 1"/>
-          <p:cNvSpPr>
-            <a:spLocks noGrp="1"/>
-          </p:cNvSpPr>
-          <p:nvPr>
-            <p:ph type="title"/>
-          </p:nvPr>
-        </p:nvSpPr>
-        <p:spPr/>
-        <p:txBody>
-          <a:bodyPr>
-            <a:normAutofit/>
-          </a:bodyPr>
-          <a:lstStyle/>
-          <a:p>
-            <a:r>
-              <a:rPr lang="en-US" dirty="0"/>
-              <a:t>The Number of Onto Functions</a:t>
-            </a:r>
-          </a:p>
-        </p:txBody>
-      </p:sp>
-      <p:sp>
-        <p:nvSpPr>
-          <p:cNvPr id="3" name="Content Placeholder 2"/>
-          <p:cNvSpPr>
-            <a:spLocks noGrp="1"/>
-          </p:cNvSpPr>
-          <p:nvPr>
-            <p:ph idx="1"/>
-          </p:nvPr>
-        </p:nvSpPr>
-        <p:spPr/>
-        <p:txBody>
-          <a:bodyPr>
-            <a:normAutofit/>
-          </a:bodyPr>
-          <a:lstStyle/>
-          <a:p>
-            <a:pPr>
-              <a:buNone/>
-            </a:pPr>
-            <a:r>
-              <a:rPr lang="en-US" b="1" dirty="0"/>
-              <a:t>Theorem</a:t>
-            </a:r>
-            <a:r>
-              <a:rPr lang="en-US" dirty="0"/>
-              <a:t>: Let m and n be positive integers with </a:t>
-            </a:r>
-            <a:r>
-              <a:rPr lang="en-US" i="1" dirty="0"/>
-              <a:t>m</a:t>
-            </a:r>
-            <a:r>
-              <a:rPr lang="en-US" dirty="0"/>
-              <a:t> </a:t>
-            </a:r>
-            <a:r>
-              <a:rPr lang="en-US" dirty="0">
-                <a:ea typeface="Cambria Math"/>
-              </a:rPr>
-              <a:t>≥ </a:t>
-            </a:r>
-            <a:r>
-              <a:rPr lang="en-US" i="1" dirty="0">
-                <a:ea typeface="Cambria Math"/>
-              </a:rPr>
-              <a:t>n</a:t>
-            </a:r>
-            <a:r>
-              <a:rPr lang="en-US" dirty="0">
-                <a:ea typeface="Cambria Math"/>
-              </a:rPr>
-              <a:t>. Then there are </a:t>
-            </a:r>
-          </a:p>
-          <a:p>
-            <a:pPr>
-              <a:buNone/>
-            </a:pPr>
-            <a:endParaRPr lang="en-US" dirty="0">
-              <a:ea typeface="Cambria Math"/>
-            </a:endParaRPr>
-          </a:p>
-          <a:p>
-            <a:pPr>
-              <a:buNone/>
-            </a:pPr>
-            <a:endParaRPr lang="en-US" dirty="0">
-              <a:ea typeface="Cambria Math"/>
-            </a:endParaRPr>
-          </a:p>
-          <a:p>
-            <a:pPr>
-              <a:buNone/>
-            </a:pPr>
-            <a:endParaRPr lang="en-US" dirty="0">
-              <a:ea typeface="Cambria Math"/>
-            </a:endParaRPr>
-          </a:p>
-          <a:p>
-            <a:pPr>
-              <a:buNone/>
-            </a:pPr>
-            <a:r>
-              <a:rPr lang="en-US" dirty="0">
-                <a:ea typeface="Cambria Math"/>
-              </a:rPr>
-              <a:t>surjective functions from a set with </a:t>
-            </a:r>
-            <a:r>
-              <a:rPr lang="en-US" i="1" dirty="0">
-                <a:ea typeface="Cambria Math"/>
-              </a:rPr>
-              <a:t>m</a:t>
-            </a:r>
-            <a:r>
-              <a:rPr lang="en-US" dirty="0">
-                <a:ea typeface="Cambria Math"/>
-              </a:rPr>
-              <a:t> elements to a set with </a:t>
-            </a:r>
-            <a:r>
-              <a:rPr lang="en-US" i="1" dirty="0">
-                <a:ea typeface="Cambria Math"/>
-              </a:rPr>
-              <a:t>n</a:t>
-            </a:r>
-            <a:r>
-              <a:rPr lang="en-US" dirty="0">
-                <a:ea typeface="Cambria Math"/>
-              </a:rPr>
-              <a:t> elements. </a:t>
-            </a:r>
-          </a:p>
-          <a:p>
-            <a:pPr>
-              <a:buNone/>
-            </a:pPr>
-            <a:endParaRPr lang="en-US" dirty="0">
-              <a:latin typeface="Cambria Math"/>
-              <a:ea typeface="Cambria Math"/>
-            </a:endParaRPr>
-          </a:p>
-          <a:p>
-            <a:pPr>
-              <a:buNone/>
-            </a:pPr>
-            <a:r>
-              <a:rPr lang="en-US" b="1" dirty="0"/>
-              <a:t>      </a:t>
-            </a:r>
-            <a:endParaRPr lang="en-US" dirty="0"/>
-          </a:p>
-        </p:txBody>
-      </p:sp>
-      <p:pic>
-        <p:nvPicPr>
-          <p:cNvPr id="4" name="Picture 3" descr="addin_tmp.png"/>
-          <p:cNvPicPr>
-            <a:picLocks noChangeAspect="1"/>
-          </p:cNvPicPr>
-          <p:nvPr>
-            <p:custDataLst>
-              <p:tags r:id="rId1"/>
-            </p:custDataLst>
-          </p:nvPr>
-        </p:nvPicPr>
-        <p:blipFill>
-          <a:blip r:embed="rId3" cstate="print"/>
-          <a:stretch>
-            <a:fillRect/>
-          </a:stretch>
-        </p:blipFill>
-        <p:spPr>
-          <a:xfrm>
-            <a:off x="1274297" y="2897945"/>
-            <a:ext cx="10289115" cy="365467"/>
-          </a:xfrm>
-          <a:prstGeom prst="rect">
-            <a:avLst/>
-          </a:prstGeom>
-        </p:spPr>
-      </p:pic>
-    </p:spTree>
-    <p:extLst>
-      <p:ext uri="{BB962C8B-B14F-4D97-AF65-F5344CB8AC3E}">
-        <p14:creationId xmlns:p14="http://schemas.microsoft.com/office/powerpoint/2010/main" val="1648528614"/>
-      </p:ext>
-    </p:extLst>
-  </p:cSld>
-  <p:clrMapOvr>
-    <a:masterClrMapping/>
-  </p:clrMapOvr>
-</p:sld>
-</file>
-
-<file path=ppt/slides/slide67.xml><?xml version="1.0" encoding="utf-8"?>
-<p:sld xmlns:a="http://schemas.openxmlformats.org/drawingml/2006/main" xmlns:r="http://schemas.openxmlformats.org/officeDocument/2006/relationships" xmlns:p="http://schemas.openxmlformats.org/presentationml/2006/main">
-  <p:cSld>
-    <p:spTree>
-      <p:nvGrpSpPr>
-        <p:cNvPr id="1" name=""/>
-        <p:cNvGrpSpPr/>
-        <p:nvPr/>
-      </p:nvGrpSpPr>
-      <p:grpSpPr>
-        <a:xfrm>
-          <a:off x="0" y="0"/>
-          <a:ext cx="0" cy="0"/>
-          <a:chOff x="0" y="0"/>
-          <a:chExt cx="0" cy="0"/>
-        </a:xfrm>
-      </p:grpSpPr>
-      <p:sp>
-        <p:nvSpPr>
-          <p:cNvPr id="2" name="Title 1">
-            <a:extLst>
-              <a:ext uri="{FF2B5EF4-FFF2-40B4-BE49-F238E27FC236}">
-                <a16:creationId xmlns:a16="http://schemas.microsoft.com/office/drawing/2014/main" id="{ED7DC80B-0798-FC46-A88D-7E01EFF96EB3}"/>
-              </a:ext>
-            </a:extLst>
-          </p:cNvPr>
-          <p:cNvSpPr>
-            <a:spLocks noGrp="1"/>
-          </p:cNvSpPr>
-          <p:nvPr>
-            <p:ph type="title"/>
-          </p:nvPr>
-        </p:nvSpPr>
-        <p:spPr/>
-        <p:txBody>
-          <a:bodyPr/>
-          <a:lstStyle/>
-          <a:p>
-            <a:r>
-              <a:rPr lang="en-US"/>
-              <a:t>Example</a:t>
-            </a:r>
-          </a:p>
-        </p:txBody>
-      </p:sp>
-      <mc:AlternateContent xmlns:mc="http://schemas.openxmlformats.org/markup-compatibility/2006">
-        <mc:Choice xmlns:a14="http://schemas.microsoft.com/office/drawing/2010/main" Requires="a14">
-          <p:sp>
-            <p:nvSpPr>
-              <p:cNvPr id="3" name="Content Placeholder 2">
-                <a:extLst>
-                  <a:ext uri="{FF2B5EF4-FFF2-40B4-BE49-F238E27FC236}">
-                    <a16:creationId xmlns:a16="http://schemas.microsoft.com/office/drawing/2014/main" id="{03C974BC-69A7-8048-B9AA-2C2BB4817A8A}"/>
-                  </a:ext>
-                </a:extLst>
-              </p:cNvPr>
-              <p:cNvSpPr>
-                <a:spLocks noGrp="1"/>
-              </p:cNvSpPr>
-              <p:nvPr>
-                <p:ph idx="1"/>
-              </p:nvPr>
-            </p:nvSpPr>
-            <p:spPr/>
-            <p:txBody>
-              <a:bodyPr/>
-              <a:lstStyle/>
-              <a:p>
-                <a:pPr marL="0" indent="0">
-                  <a:buNone/>
-                </a:pPr>
-                <a:r>
-                  <a:rPr lang="en-GB"/>
-                  <a:t>How many ways are there to assign 5 different jobs to 4 different employees so that every employee is assigned at least one job?</a:t>
-                </a:r>
-              </a:p>
-              <a:p>
-                <a:pPr marL="0" indent="0">
-                  <a:buNone/>
-                </a:pPr>
-                <a:endParaRPr lang="en-GB"/>
-              </a:p>
-              <a:p>
-                <a:pPr marL="0" indent="0">
-                  <a:buNone/>
-                </a:pPr>
-                <a:r>
-                  <a:rPr lang="en-GB"/>
-                  <a:t>An assignment is a surjective function from the employees to the jobs</a:t>
-                </a:r>
-              </a:p>
-              <a:p>
-                <a:pPr marL="0" indent="0">
-                  <a:buNone/>
-                </a:pPr>
-                <a:endParaRPr lang="en-GB"/>
-              </a:p>
-              <a:p>
-                <a:pPr marL="0" indent="0">
-                  <a:buNone/>
-                </a:pPr>
-                <a14:m>
-                  <m:oMathPara xmlns:m="http://schemas.openxmlformats.org/officeDocument/2006/math">
-                    <m:oMathParaPr>
-                      <m:jc m:val="centerGroup"/>
-                    </m:oMathParaPr>
-                    <m:oMath xmlns:m="http://schemas.openxmlformats.org/officeDocument/2006/math">
-                      <m:sSup>
-                        <m:sSupPr>
-                          <m:ctrlPr>
-                            <a:rPr lang="en-GB" i="1">
-                              <a:latin typeface="Cambria Math" panose="02040503050406030204" pitchFamily="18" charset="0"/>
-                            </a:rPr>
-                          </m:ctrlPr>
-                        </m:sSupPr>
-                        <m:e>
-                          <m:r>
-                            <a:rPr lang="fr-CH" b="0" i="1">
-                              <a:latin typeface="Cambria Math" panose="02040503050406030204" pitchFamily="18" charset="0"/>
-                            </a:rPr>
-                            <m:t>4</m:t>
-                          </m:r>
-                        </m:e>
-                        <m:sup>
-                          <m:r>
-                            <a:rPr lang="fr-CH" b="0" i="1">
-                              <a:latin typeface="Cambria Math" panose="02040503050406030204" pitchFamily="18" charset="0"/>
-                            </a:rPr>
-                            <m:t>5</m:t>
-                          </m:r>
-                        </m:sup>
-                      </m:sSup>
-                      <m:r>
-                        <a:rPr lang="en-GB" i="1">
-                          <a:latin typeface="Cambria Math" panose="02040503050406030204" pitchFamily="18" charset="0"/>
-                        </a:rPr>
-                        <m:t> −</m:t>
-                      </m:r>
-                      <m:r>
-                        <a:rPr lang="en-GB" i="1">
-                          <a:latin typeface="Cambria Math" panose="02040503050406030204" pitchFamily="18" charset="0"/>
-                        </a:rPr>
-                        <m:t>𝐶</m:t>
-                      </m:r>
-                      <m:d>
-                        <m:dPr>
-                          <m:ctrlPr>
-                            <a:rPr lang="en-GB" i="1">
-                              <a:latin typeface="Cambria Math" panose="02040503050406030204" pitchFamily="18" charset="0"/>
-                            </a:rPr>
-                          </m:ctrlPr>
-                        </m:dPr>
-                        <m:e>
-                          <m:r>
-                            <a:rPr lang="en-GB" i="1">
-                              <a:latin typeface="Cambria Math" panose="02040503050406030204" pitchFamily="18" charset="0"/>
-                            </a:rPr>
-                            <m:t>4,1</m:t>
-                          </m:r>
-                        </m:e>
-                      </m:d>
-                      <m:sSup>
-                        <m:sSupPr>
-                          <m:ctrlPr>
-                            <a:rPr lang="en-GB" i="1">
-                              <a:latin typeface="Cambria Math" panose="02040503050406030204" pitchFamily="18" charset="0"/>
-                            </a:rPr>
-                          </m:ctrlPr>
-                        </m:sSupPr>
-                        <m:e>
-                          <m:r>
-                            <a:rPr lang="fr-CH" b="0" i="1">
-                              <a:latin typeface="Cambria Math" panose="02040503050406030204" pitchFamily="18" charset="0"/>
-                            </a:rPr>
-                            <m:t>3</m:t>
-                          </m:r>
-                        </m:e>
-                        <m:sup>
-                          <m:r>
-                            <a:rPr lang="fr-CH" b="0" i="1">
-                              <a:latin typeface="Cambria Math" panose="02040503050406030204" pitchFamily="18" charset="0"/>
-                            </a:rPr>
-                            <m:t>5</m:t>
-                          </m:r>
-                        </m:sup>
-                      </m:sSup>
-                      <m:r>
-                        <a:rPr lang="en-GB" i="1">
-                          <a:latin typeface="Cambria Math" panose="02040503050406030204" pitchFamily="18" charset="0"/>
-                        </a:rPr>
-                        <m:t> +</m:t>
-                      </m:r>
-                      <m:r>
-                        <a:rPr lang="en-GB" i="1">
-                          <a:latin typeface="Cambria Math" panose="02040503050406030204" pitchFamily="18" charset="0"/>
-                        </a:rPr>
-                        <m:t>𝐶</m:t>
-                      </m:r>
-                      <m:d>
-                        <m:dPr>
-                          <m:ctrlPr>
-                            <a:rPr lang="en-GB" i="1">
-                              <a:latin typeface="Cambria Math" panose="02040503050406030204" pitchFamily="18" charset="0"/>
-                            </a:rPr>
-                          </m:ctrlPr>
-                        </m:dPr>
-                        <m:e>
-                          <m:r>
-                            <a:rPr lang="en-GB" i="1">
-                              <a:latin typeface="Cambria Math" panose="02040503050406030204" pitchFamily="18" charset="0"/>
-                            </a:rPr>
-                            <m:t>4,2</m:t>
-                          </m:r>
-                        </m:e>
-                      </m:d>
-                      <m:sSup>
-                        <m:sSupPr>
-                          <m:ctrlPr>
-                            <a:rPr lang="en-GB" i="1">
-                              <a:latin typeface="Cambria Math" panose="02040503050406030204" pitchFamily="18" charset="0"/>
-                            </a:rPr>
-                          </m:ctrlPr>
-                        </m:sSupPr>
-                        <m:e>
-                          <m:r>
-                            <a:rPr lang="fr-CH" b="0" i="1">
-                              <a:latin typeface="Cambria Math" panose="02040503050406030204" pitchFamily="18" charset="0"/>
-                            </a:rPr>
-                            <m:t>2</m:t>
-                          </m:r>
-                        </m:e>
-                        <m:sup>
-                          <m:r>
-                            <a:rPr lang="fr-CH" b="0" i="1">
-                              <a:latin typeface="Cambria Math" panose="02040503050406030204" pitchFamily="18" charset="0"/>
-                            </a:rPr>
-                            <m:t>5</m:t>
-                          </m:r>
-                        </m:sup>
-                      </m:sSup>
-                      <m:r>
-                        <a:rPr lang="en-GB" i="1">
-                          <a:latin typeface="Cambria Math" panose="02040503050406030204" pitchFamily="18" charset="0"/>
-                        </a:rPr>
-                        <m:t> −</m:t>
-                      </m:r>
-                      <m:r>
-                        <a:rPr lang="en-GB" i="1">
-                          <a:latin typeface="Cambria Math" panose="02040503050406030204" pitchFamily="18" charset="0"/>
-                        </a:rPr>
-                        <m:t>𝐶</m:t>
-                      </m:r>
-                      <m:d>
-                        <m:dPr>
-                          <m:ctrlPr>
-                            <a:rPr lang="en-GB" i="1">
-                              <a:latin typeface="Cambria Math" panose="02040503050406030204" pitchFamily="18" charset="0"/>
-                            </a:rPr>
-                          </m:ctrlPr>
-                        </m:dPr>
-                        <m:e>
-                          <m:r>
-                            <a:rPr lang="en-GB" i="1">
-                              <a:latin typeface="Cambria Math" panose="02040503050406030204" pitchFamily="18" charset="0"/>
-                            </a:rPr>
-                            <m:t>4,3</m:t>
-                          </m:r>
-                        </m:e>
-                      </m:d>
-                      <m:sSup>
-                        <m:sSupPr>
-                          <m:ctrlPr>
-                            <a:rPr lang="en-GB" i="1">
-                              <a:latin typeface="Cambria Math" panose="02040503050406030204" pitchFamily="18" charset="0"/>
-                            </a:rPr>
-                          </m:ctrlPr>
-                        </m:sSupPr>
-                        <m:e>
-                          <m:r>
-                            <a:rPr lang="fr-CH" b="0" i="1">
-                              <a:latin typeface="Cambria Math" panose="02040503050406030204" pitchFamily="18" charset="0"/>
-                            </a:rPr>
-                            <m:t>1</m:t>
-                          </m:r>
-                        </m:e>
-                        <m:sup>
-                          <m:r>
-                            <a:rPr lang="fr-CH" b="0" i="1">
-                              <a:latin typeface="Cambria Math" panose="02040503050406030204" pitchFamily="18" charset="0"/>
-                            </a:rPr>
-                            <m:t>5</m:t>
-                          </m:r>
-                        </m:sup>
-                      </m:sSup>
-                    </m:oMath>
-                  </m:oMathPara>
-                </a14:m>
-                <a:endParaRPr lang="fr-CH" i="1">
-                  <a:latin typeface="Cambria Math" panose="02040503050406030204" pitchFamily="18" charset="0"/>
-                </a:endParaRPr>
-              </a:p>
-              <a:p>
-                <a:pPr marL="0" indent="0">
-                  <a:buNone/>
-                </a:pPr>
-                <a:br>
-                  <a:rPr lang="en-GB" i="1">
-                    <a:latin typeface="Cambria Math" panose="02040503050406030204" pitchFamily="18" charset="0"/>
-                  </a:rPr>
-                </a:br>
-                <a14:m>
-                  <m:oMathPara xmlns:m="http://schemas.openxmlformats.org/officeDocument/2006/math">
-                    <m:oMathParaPr>
-                      <m:jc m:val="centerGroup"/>
-                    </m:oMathParaPr>
-                    <m:oMath xmlns:m="http://schemas.openxmlformats.org/officeDocument/2006/math">
-                      <m:r>
-                        <a:rPr lang="en-GB" i="1">
-                          <a:latin typeface="Cambria Math" panose="02040503050406030204" pitchFamily="18" charset="0"/>
-                        </a:rPr>
-                        <m:t> = 1024−972+192−4 = 240</m:t>
-                      </m:r>
-                    </m:oMath>
-                  </m:oMathPara>
-                </a14:m>
-                <a:br>
-                  <a:rPr lang="en-GB"/>
-                </a:br>
-                <a:endParaRPr lang="en-GB"/>
-              </a:p>
-              <a:p>
-                <a:pPr marL="0" indent="0">
-                  <a:buNone/>
-                </a:pPr>
-                <a:endParaRPr lang="en-GB"/>
-              </a:p>
-              <a:p>
-                <a:pPr marL="0" indent="0">
-                  <a:buNone/>
-                </a:pPr>
-                <a:endParaRPr lang="en-US"/>
-              </a:p>
-            </p:txBody>
-          </p:sp>
-        </mc:Choice>
-        <mc:Fallback>
-          <p:sp>
-            <p:nvSpPr>
-              <p:cNvPr id="3" name="Content Placeholder 2">
-                <a:extLst>
-                  <a:ext uri="{FF2B5EF4-FFF2-40B4-BE49-F238E27FC236}">
-                    <a16:creationId xmlns:a16="http://schemas.microsoft.com/office/drawing/2014/main" id="{03C974BC-69A7-8048-B9AA-2C2BB4817A8A}"/>
-                  </a:ext>
-                </a:extLst>
-              </p:cNvPr>
-              <p:cNvSpPr>
-                <a:spLocks noGrp="1" noRot="1" noChangeAspect="1" noMove="1" noResize="1" noEditPoints="1" noAdjustHandles="1" noChangeArrowheads="1" noChangeShapeType="1" noTextEdit="1"/>
-              </p:cNvSpPr>
-              <p:nvPr>
-                <p:ph idx="1"/>
-              </p:nvPr>
-            </p:nvSpPr>
-            <p:spPr>
-              <a:blipFill>
-                <a:blip r:embed="rId2"/>
-                <a:stretch>
-                  <a:fillRect l="-1086" t="-2632"/>
-                </a:stretch>
-              </a:blipFill>
-            </p:spPr>
-            <p:txBody>
-              <a:bodyPr/>
-              <a:lstStyle/>
-              <a:p>
-                <a:r>
-                  <a:rPr lang="en-US">
-                    <a:noFill/>
-                  </a:rPr>
-                  <a:t> </a:t>
-                </a:r>
-              </a:p>
-            </p:txBody>
-          </p:sp>
-        </mc:Fallback>
-      </mc:AlternateContent>
-    </p:spTree>
-    <p:extLst>
-      <p:ext uri="{BB962C8B-B14F-4D97-AF65-F5344CB8AC3E}">
-        <p14:creationId xmlns:p14="http://schemas.microsoft.com/office/powerpoint/2010/main" val="3515830870"/>
-      </p:ext>
-    </p:extLst>
-  </p:cSld>
-  <p:clrMapOvr>
-    <a:masterClrMapping/>
-  </p:clrMapOvr>
-</p:sld>
-</file>
-
-<file path=ppt/slides/slide68.xml><?xml version="1.0" encoding="utf-8"?>
-<p:sld xmlns:a="http://schemas.openxmlformats.org/drawingml/2006/main" xmlns:r="http://schemas.openxmlformats.org/officeDocument/2006/relationships" xmlns:p="http://schemas.openxmlformats.org/presentationml/2006/main">
-  <p:cSld>
-    <p:spTree>
-      <p:nvGrpSpPr>
-        <p:cNvPr id="1" name=""/>
-        <p:cNvGrpSpPr/>
-        <p:nvPr/>
-      </p:nvGrpSpPr>
-      <p:grpSpPr>
-        <a:xfrm>
-          <a:off x="0" y="0"/>
-          <a:ext cx="0" cy="0"/>
-          <a:chOff x="0" y="0"/>
-          <a:chExt cx="0" cy="0"/>
-        </a:xfrm>
-      </p:grpSpPr>
-      <p:sp>
-        <p:nvSpPr>
-          <p:cNvPr id="2" name="Title 1"/>
-          <p:cNvSpPr>
-            <a:spLocks noGrp="1"/>
-          </p:cNvSpPr>
-          <p:nvPr>
-            <p:ph type="title"/>
-          </p:nvPr>
-        </p:nvSpPr>
-        <p:spPr/>
-        <p:txBody>
-          <a:bodyPr/>
-          <a:lstStyle/>
-          <a:p>
-            <a:r>
-              <a:rPr lang="en-US" dirty="0"/>
               <a:t>Derangements</a:t>
             </a:r>
           </a:p>
@@ -27327,183 +26465,7 @@
             </a:pPr>
             <a:r>
               <a:rPr lang="en-US" b="1" dirty="0"/>
-              <a:t>Definition</a:t>
-            </a:r>
-            <a:r>
-              <a:rPr lang="en-US" dirty="0"/>
-              <a:t>: A </a:t>
-            </a:r>
-            <a:r>
-              <a:rPr lang="en-US" b="1" dirty="0"/>
-              <a:t>derangement</a:t>
-            </a:r>
-            <a:r>
-              <a:rPr lang="en-US" dirty="0"/>
-              <a:t> is a permutation of objects that leaves no object in the original position.</a:t>
-            </a:r>
-          </a:p>
-          <a:p>
-            <a:pPr>
-              <a:buNone/>
-            </a:pPr>
-            <a:endParaRPr lang="en-US" dirty="0"/>
-          </a:p>
-          <a:p>
-            <a:pPr>
-              <a:buNone/>
-            </a:pPr>
-            <a:r>
-              <a:rPr lang="en-US" b="1" dirty="0"/>
-              <a:t>Example</a:t>
-            </a:r>
-            <a:r>
-              <a:rPr lang="en-US" dirty="0"/>
-              <a:t>: </a:t>
-            </a:r>
-          </a:p>
-          <a:p>
-            <a:pPr>
-              <a:buNone/>
-            </a:pPr>
-            <a:r>
-              <a:rPr lang="en-US" dirty="0"/>
-              <a:t>The permutation of </a:t>
-            </a:r>
-            <a:r>
-              <a:rPr lang="en-US" dirty="0">
-                <a:ea typeface="Cambria Math" pitchFamily="18" charset="0"/>
-              </a:rPr>
-              <a:t>21453 </a:t>
-            </a:r>
-            <a:r>
-              <a:rPr lang="en-US" dirty="0"/>
-              <a:t>is a derangement of </a:t>
-            </a:r>
-            <a:r>
-              <a:rPr lang="en-US" dirty="0">
-                <a:ea typeface="Cambria Math" pitchFamily="18" charset="0"/>
-              </a:rPr>
-              <a:t>12345</a:t>
-            </a:r>
-            <a:r>
-              <a:rPr lang="en-US" dirty="0"/>
-              <a:t>. </a:t>
-            </a:r>
-          </a:p>
-          <a:p>
-            <a:pPr>
-              <a:buNone/>
-            </a:pPr>
-            <a:r>
-              <a:rPr lang="en-US" dirty="0"/>
-              <a:t>But </a:t>
-            </a:r>
-            <a:r>
-              <a:rPr lang="en-US" dirty="0">
-                <a:ea typeface="Cambria Math" pitchFamily="18" charset="0"/>
-              </a:rPr>
-              <a:t>21543</a:t>
-            </a:r>
-            <a:r>
-              <a:rPr lang="en-US" dirty="0"/>
-              <a:t> is not a derangement of </a:t>
-            </a:r>
-            <a:r>
-              <a:rPr lang="en-US" dirty="0">
-                <a:ea typeface="Cambria Math" pitchFamily="18" charset="0"/>
-              </a:rPr>
-              <a:t>12345</a:t>
-            </a:r>
-            <a:r>
-              <a:rPr lang="en-US" dirty="0"/>
-              <a:t>, because </a:t>
-            </a:r>
-            <a:r>
-              <a:rPr lang="en-US" dirty="0">
-                <a:ea typeface="Cambria Math" pitchFamily="18" charset="0"/>
-              </a:rPr>
-              <a:t>4</a:t>
-            </a:r>
-            <a:r>
-              <a:rPr lang="en-US" dirty="0"/>
-              <a:t> is in its original position. </a:t>
-            </a:r>
-          </a:p>
-        </p:txBody>
-      </p:sp>
-    </p:spTree>
-    <p:extLst>
-      <p:ext uri="{BB962C8B-B14F-4D97-AF65-F5344CB8AC3E}">
-        <p14:creationId xmlns:p14="http://schemas.microsoft.com/office/powerpoint/2010/main" val="1532371265"/>
-      </p:ext>
-    </p:extLst>
-  </p:cSld>
-  <p:clrMapOvr>
-    <a:masterClrMapping/>
-  </p:clrMapOvr>
-</p:sld>
-</file>
-
-<file path=ppt/slides/slide69.xml><?xml version="1.0" encoding="utf-8"?>
-<p:sld xmlns:a="http://schemas.openxmlformats.org/drawingml/2006/main" xmlns:r="http://schemas.openxmlformats.org/officeDocument/2006/relationships" xmlns:p="http://schemas.openxmlformats.org/presentationml/2006/main">
-  <p:cSld>
-    <p:spTree>
-      <p:nvGrpSpPr>
-        <p:cNvPr id="1" name=""/>
-        <p:cNvGrpSpPr/>
-        <p:nvPr/>
-      </p:nvGrpSpPr>
-      <p:grpSpPr>
-        <a:xfrm>
-          <a:off x="0" y="0"/>
-          <a:ext cx="0" cy="0"/>
-          <a:chOff x="0" y="0"/>
-          <a:chExt cx="0" cy="0"/>
-        </a:xfrm>
-      </p:grpSpPr>
-      <p:sp>
-        <p:nvSpPr>
-          <p:cNvPr id="2" name="Title 1"/>
-          <p:cNvSpPr>
-            <a:spLocks noGrp="1"/>
-          </p:cNvSpPr>
-          <p:nvPr>
-            <p:ph type="title"/>
-          </p:nvPr>
-        </p:nvSpPr>
-        <p:spPr/>
-        <p:txBody>
-          <a:bodyPr/>
-          <a:lstStyle/>
-          <a:p>
-            <a:r>
-              <a:rPr lang="en-US" dirty="0"/>
-              <a:t>Derangements</a:t>
-            </a:r>
-          </a:p>
-        </p:txBody>
-      </p:sp>
-      <p:sp>
-        <p:nvSpPr>
-          <p:cNvPr id="3" name="Content Placeholder 2"/>
-          <p:cNvSpPr>
-            <a:spLocks noGrp="1"/>
-          </p:cNvSpPr>
-          <p:nvPr>
-            <p:ph idx="1"/>
-          </p:nvPr>
-        </p:nvSpPr>
-        <p:spPr/>
-        <p:txBody>
-          <a:bodyPr/>
-          <a:lstStyle/>
-          <a:p>
-            <a:pPr>
-              <a:buNone/>
-            </a:pPr>
-            <a:r>
-              <a:rPr lang="en-US" b="1" dirty="0"/>
-              <a:t>Theorem</a:t>
+              <a:t>Theorem 2</a:t>
             </a:r>
             <a:r>
               <a:rPr lang="en-US" dirty="0"/>
@@ -27561,7 +26523,7 @@
 </p:sld>
 </file>
 
-<file path=ppt/slides/slide7.xml><?xml version="1.0" encoding="utf-8"?>
+<file path=ppt/slides/slide63.xml><?xml version="1.0" encoding="utf-8"?>
 <p:sld xmlns:a="http://schemas.openxmlformats.org/drawingml/2006/main" xmlns:r="http://schemas.openxmlformats.org/officeDocument/2006/relationships" xmlns:p="http://schemas.openxmlformats.org/presentationml/2006/main">
   <p:cSld>
     <p:spTree>
@@ -27583,7 +26545,7 @@
           <p:cNvPr id="2" name="Title 1">
             <a:extLst>
               <a:ext uri="{FF2B5EF4-FFF2-40B4-BE49-F238E27FC236}">
-                <a16:creationId xmlns:a16="http://schemas.microsoft.com/office/drawing/2014/main" id="{E346428C-9116-5D48-9BAE-CB7639E3C948}"/>
+                <a16:creationId xmlns:a16="http://schemas.microsoft.com/office/drawing/2014/main" id="{7D941055-59EF-924F-8EF1-3B93D3024C65}"/>
               </a:ext>
             </a:extLst>
           </p:cNvPr>
@@ -27601,348 +26563,1572 @@
           <a:p>
             <a:r>
               <a:rPr lang="en-US" dirty="0"/>
-              <a:t>Counting Bit Strings</a:t>
-            </a:r>
-            <a:endParaRPr lang="en-US"/>
+              <a:t>Derangements - Proof</a:t>
+            </a:r>
           </a:p>
         </p:txBody>
       </p:sp>
-      <p:sp>
-        <p:nvSpPr>
-          <p:cNvPr id="3" name="Content Placeholder 2">
-            <a:extLst>
-              <a:ext uri="{FF2B5EF4-FFF2-40B4-BE49-F238E27FC236}">
-                <a16:creationId xmlns:a16="http://schemas.microsoft.com/office/drawing/2014/main" id="{AECB7C75-F66B-7E42-B3E9-55B9ABE01F70}"/>
-              </a:ext>
-            </a:extLst>
-          </p:cNvPr>
-          <p:cNvSpPr>
-            <a:spLocks noGrp="1"/>
-          </p:cNvSpPr>
-          <p:nvPr>
-            <p:ph idx="1"/>
-          </p:nvPr>
-        </p:nvSpPr>
-        <p:spPr/>
-        <p:txBody>
-          <a:bodyPr>
-            <a:normAutofit lnSpcReduction="10000"/>
-          </a:bodyPr>
-          <a:lstStyle/>
-          <a:p>
-            <a:pPr marL="0" indent="0">
-              <a:buNone/>
-            </a:pPr>
-            <a:r>
-              <a:rPr lang="en-US" dirty="0"/>
-              <a:t>How many such bit strings are there of length five?</a:t>
-            </a:r>
-          </a:p>
-          <a:p>
-            <a:pPr>
-              <a:buNone/>
-            </a:pPr>
-            <a:r>
-              <a:rPr lang="en-US" dirty="0"/>
-              <a:t>The initial conditions are:</a:t>
-            </a:r>
-            <a:r>
-              <a:rPr lang="en-US" dirty="0">
-                <a:ea typeface="Cambria Math" pitchFamily="18" charset="0"/>
-              </a:rPr>
-              <a:t> </a:t>
-            </a:r>
-          </a:p>
-          <a:p>
-            <a:pPr lvl="1"/>
-            <a:r>
-              <a:rPr lang="en-US" i="1" dirty="0"/>
-              <a:t>a</a:t>
-            </a:r>
-            <a:r>
-              <a:rPr lang="en-US" baseline="-25000" dirty="0">
-                <a:ea typeface="Cambria Math"/>
-              </a:rPr>
-              <a:t>1 </a:t>
-            </a:r>
-            <a:r>
-              <a:rPr lang="en-US" dirty="0">
-                <a:ea typeface="Cambria Math" pitchFamily="18" charset="0"/>
-              </a:rPr>
-              <a:t> = 2, since both the bit strings 0 and 1 do not have consecutive 0s.</a:t>
-            </a:r>
-          </a:p>
-          <a:p>
-            <a:pPr lvl="1"/>
-            <a:r>
-              <a:rPr lang="en-US" i="1" dirty="0"/>
-              <a:t>a</a:t>
-            </a:r>
-            <a:r>
-              <a:rPr lang="en-US" baseline="-25000" dirty="0">
-                <a:ea typeface="Cambria Math"/>
-              </a:rPr>
-              <a:t>2 </a:t>
-            </a:r>
-            <a:r>
-              <a:rPr lang="en-US" dirty="0">
-                <a:ea typeface="Cambria Math" pitchFamily="18" charset="0"/>
-              </a:rPr>
-              <a:t> = 3, since the bit strings 01, 10, and 11 do not have consecutive 0s, </a:t>
-            </a:r>
-            <a:br>
-              <a:rPr lang="en-US" dirty="0">
-                <a:ea typeface="Cambria Math" pitchFamily="18" charset="0"/>
-              </a:rPr>
-            </a:br>
-            <a:r>
-              <a:rPr lang="en-US" dirty="0">
-                <a:ea typeface="Cambria Math" pitchFamily="18" charset="0"/>
-              </a:rPr>
-              <a:t>while 00 does.</a:t>
-            </a:r>
-          </a:p>
-          <a:p>
-            <a:pPr>
-              <a:buNone/>
-            </a:pPr>
-            <a:r>
-              <a:rPr lang="en-US" dirty="0">
-                <a:ea typeface="Cambria Math" pitchFamily="18" charset="0"/>
-              </a:rPr>
-              <a:t>To obtain </a:t>
-            </a:r>
-            <a:r>
-              <a:rPr lang="en-US" i="1" dirty="0"/>
-              <a:t>a</a:t>
-            </a:r>
-            <a:r>
-              <a:rPr lang="en-US" baseline="-25000" dirty="0">
-                <a:ea typeface="Cambria Math"/>
-              </a:rPr>
-              <a:t>5 </a:t>
-            </a:r>
-            <a:r>
-              <a:rPr lang="en-US" dirty="0">
-                <a:ea typeface="Cambria Math" pitchFamily="18" charset="0"/>
-              </a:rPr>
-              <a:t>, we use the recurrence relation three times to find that:</a:t>
-            </a:r>
-          </a:p>
-          <a:p>
-            <a:pPr lvl="1"/>
-            <a:r>
-              <a:rPr lang="en-US" dirty="0">
-                <a:ea typeface="Cambria Math" pitchFamily="18" charset="0"/>
-              </a:rPr>
-              <a:t> </a:t>
-            </a:r>
-            <a:r>
-              <a:rPr lang="en-US" i="1" dirty="0"/>
-              <a:t>a</a:t>
-            </a:r>
-            <a:r>
-              <a:rPr lang="en-US" baseline="-25000" dirty="0">
-                <a:ea typeface="Cambria Math"/>
-              </a:rPr>
-              <a:t>3</a:t>
-            </a:r>
-            <a:r>
-              <a:rPr lang="en-US" dirty="0">
-                <a:ea typeface="Cambria Math"/>
-              </a:rPr>
-              <a:t> </a:t>
-            </a:r>
-            <a:r>
-              <a:rPr lang="en-US" dirty="0">
-                <a:ea typeface="Cambria Math" pitchFamily="18" charset="0"/>
-              </a:rPr>
-              <a:t>= </a:t>
-            </a:r>
-            <a:r>
-              <a:rPr lang="en-US" i="1" dirty="0"/>
-              <a:t>a</a:t>
-            </a:r>
-            <a:r>
-              <a:rPr lang="en-US" baseline="-25000" dirty="0">
-                <a:ea typeface="Cambria Math"/>
-              </a:rPr>
-              <a:t>2 </a:t>
-            </a:r>
-            <a:r>
-              <a:rPr lang="en-US" dirty="0">
-                <a:ea typeface="Cambria Math" pitchFamily="18" charset="0"/>
-              </a:rPr>
-              <a:t> + </a:t>
-            </a:r>
-            <a:r>
-              <a:rPr lang="en-US" i="1" dirty="0"/>
-              <a:t>a</a:t>
-            </a:r>
-            <a:r>
-              <a:rPr lang="en-US" baseline="-25000" dirty="0">
-                <a:ea typeface="Cambria Math"/>
-              </a:rPr>
-              <a:t>1 </a:t>
-            </a:r>
-            <a:r>
-              <a:rPr lang="en-US" dirty="0">
-                <a:ea typeface="Cambria Math" pitchFamily="18" charset="0"/>
-              </a:rPr>
-              <a:t> = 3 + 2 = 5</a:t>
-            </a:r>
-          </a:p>
-          <a:p>
-            <a:pPr lvl="1"/>
-            <a:r>
-              <a:rPr lang="en-US" i="1" dirty="0"/>
-              <a:t> a</a:t>
-            </a:r>
-            <a:r>
-              <a:rPr lang="en-US" baseline="-25000" dirty="0">
-                <a:ea typeface="Cambria Math"/>
-              </a:rPr>
-              <a:t>4</a:t>
-            </a:r>
-            <a:r>
-              <a:rPr lang="en-US" dirty="0">
-                <a:ea typeface="Cambria Math"/>
-              </a:rPr>
-              <a:t> </a:t>
-            </a:r>
-            <a:r>
-              <a:rPr lang="en-US" dirty="0">
-                <a:ea typeface="Cambria Math" pitchFamily="18" charset="0"/>
-              </a:rPr>
-              <a:t>= </a:t>
-            </a:r>
-            <a:r>
-              <a:rPr lang="en-US" i="1" dirty="0"/>
-              <a:t>a</a:t>
-            </a:r>
-            <a:r>
-              <a:rPr lang="en-US" baseline="-25000" dirty="0">
-                <a:ea typeface="Cambria Math"/>
-              </a:rPr>
-              <a:t>3 </a:t>
-            </a:r>
-            <a:r>
-              <a:rPr lang="en-US" dirty="0">
-                <a:ea typeface="Cambria Math" pitchFamily="18" charset="0"/>
-              </a:rPr>
-              <a:t> + </a:t>
-            </a:r>
-            <a:r>
-              <a:rPr lang="en-US" i="1" dirty="0"/>
-              <a:t>a</a:t>
-            </a:r>
-            <a:r>
-              <a:rPr lang="en-US" baseline="-25000" dirty="0">
-                <a:ea typeface="Cambria Math"/>
-              </a:rPr>
-              <a:t>2 </a:t>
-            </a:r>
-            <a:r>
-              <a:rPr lang="en-US" dirty="0">
-                <a:ea typeface="Cambria Math" pitchFamily="18" charset="0"/>
-              </a:rPr>
-              <a:t> = 5 + 3 = 8</a:t>
-            </a:r>
-          </a:p>
-          <a:p>
-            <a:pPr lvl="1"/>
-            <a:r>
-              <a:rPr lang="en-US" i="1" dirty="0"/>
-              <a:t> a</a:t>
-            </a:r>
-            <a:r>
-              <a:rPr lang="en-US" baseline="-25000" dirty="0">
-                <a:ea typeface="Cambria Math"/>
-              </a:rPr>
-              <a:t>5</a:t>
-            </a:r>
-            <a:r>
-              <a:rPr lang="en-US" dirty="0">
-                <a:ea typeface="Cambria Math"/>
-              </a:rPr>
-              <a:t> </a:t>
-            </a:r>
-            <a:r>
-              <a:rPr lang="en-US" dirty="0">
-                <a:ea typeface="Cambria Math" pitchFamily="18" charset="0"/>
-              </a:rPr>
-              <a:t>= </a:t>
-            </a:r>
-            <a:r>
-              <a:rPr lang="en-US" i="1" dirty="0"/>
-              <a:t>a</a:t>
-            </a:r>
-            <a:r>
-              <a:rPr lang="en-US" baseline="-25000" dirty="0">
-                <a:ea typeface="Cambria Math"/>
-              </a:rPr>
-              <a:t>4 </a:t>
-            </a:r>
-            <a:r>
-              <a:rPr lang="en-US" dirty="0">
-                <a:ea typeface="Cambria Math" pitchFamily="18" charset="0"/>
-              </a:rPr>
-              <a:t> + </a:t>
-            </a:r>
-            <a:r>
-              <a:rPr lang="en-US" i="1" dirty="0"/>
-              <a:t>a</a:t>
-            </a:r>
-            <a:r>
-              <a:rPr lang="en-US" baseline="-25000" dirty="0">
-                <a:ea typeface="Cambria Math"/>
-              </a:rPr>
-              <a:t>3 </a:t>
-            </a:r>
-            <a:r>
-              <a:rPr lang="en-US" dirty="0">
-                <a:ea typeface="Cambria Math" pitchFamily="18" charset="0"/>
-              </a:rPr>
-              <a:t> = 8 + 5 = 13</a:t>
-            </a:r>
-          </a:p>
-          <a:p>
-            <a:pPr marL="0" indent="0">
-              <a:buNone/>
-            </a:pPr>
-            <a:r>
-              <a:rPr lang="en-US" dirty="0"/>
-              <a:t>Note that {</a:t>
-            </a:r>
-            <a:r>
-              <a:rPr lang="en-US" i="1" dirty="0"/>
-              <a:t>a</a:t>
-            </a:r>
-            <a:r>
-              <a:rPr lang="en-US" i="1" baseline="-25000" dirty="0"/>
-              <a:t>n </a:t>
-            </a:r>
-            <a:r>
-              <a:rPr lang="en-US" dirty="0"/>
-              <a:t>} satisfies the same recurrence relation as the Fibonacci sequence.</a:t>
-            </a:r>
-            <a:r>
-              <a:rPr lang="en-US" dirty="0">
-                <a:ea typeface="Cambria Math" pitchFamily="18" charset="0"/>
-              </a:rPr>
-              <a:t>      </a:t>
-            </a:r>
-            <a:endParaRPr lang="en-US" dirty="0"/>
-          </a:p>
-          <a:p>
-            <a:endParaRPr lang="en-US"/>
-          </a:p>
-        </p:txBody>
-      </p:sp>
+      <mc:AlternateContent xmlns:mc="http://schemas.openxmlformats.org/markup-compatibility/2006" xmlns:a14="http://schemas.microsoft.com/office/drawing/2010/main">
+        <mc:Choice Requires="a14">
+          <p:sp>
+            <p:nvSpPr>
+              <p:cNvPr id="3" name="Content Placeholder 2">
+                <a:extLst>
+                  <a:ext uri="{FF2B5EF4-FFF2-40B4-BE49-F238E27FC236}">
+                    <a16:creationId xmlns:a16="http://schemas.microsoft.com/office/drawing/2014/main" id="{725C2B4F-9C59-CF48-B6F9-2231A0B65A93}"/>
+                  </a:ext>
+                </a:extLst>
+              </p:cNvPr>
+              <p:cNvSpPr>
+                <a:spLocks noGrp="1"/>
+              </p:cNvSpPr>
+              <p:nvPr>
+                <p:ph idx="1"/>
+              </p:nvPr>
+            </p:nvSpPr>
+            <p:spPr/>
+            <p:txBody>
+              <a:bodyPr>
+                <a:normAutofit/>
+              </a:bodyPr>
+              <a:lstStyle/>
+              <a:p>
+                <a:pPr marL="0" indent="0">
+                  <a:buNone/>
+                </a:pPr>
+                <a:r>
+                  <a:rPr lang="en-US" sz="1800" b="1" dirty="0"/>
+                  <a:t>Proof</a:t>
+                </a:r>
+                <a:r>
+                  <a:rPr lang="en-US" sz="1800" dirty="0"/>
+                  <a:t>: Let P</a:t>
+                </a:r>
+                <a:r>
+                  <a:rPr lang="en-US" sz="1800" baseline="-25000" dirty="0"/>
+                  <a:t>i</a:t>
+                </a:r>
+                <a:r>
+                  <a:rPr lang="en-US" sz="1800" dirty="0"/>
+                  <a:t> be the set of permutations that fix element </a:t>
+                </a:r>
+                <a:r>
+                  <a:rPr lang="en-US" sz="1800" dirty="0" err="1"/>
+                  <a:t>i</a:t>
+                </a:r>
+                <a:r>
+                  <a:rPr lang="en-US" sz="1800" dirty="0"/>
+                  <a:t>.</a:t>
+                </a:r>
+              </a:p>
+              <a:p>
+                <a:pPr marL="0" indent="0">
+                  <a:buNone/>
+                </a:pPr>
+                <a:r>
+                  <a:rPr lang="en-US" sz="1800" dirty="0"/>
+                  <a:t>The set of permutations that are not derangements is then P</a:t>
+                </a:r>
+                <a:r>
+                  <a:rPr lang="en-US" sz="1800" baseline="-25000" dirty="0"/>
+                  <a:t>1</a:t>
+                </a:r>
+                <a:r>
+                  <a:rPr lang="en-US" sz="1800" dirty="0"/>
+                  <a:t> ∪ P</a:t>
+                </a:r>
+                <a:r>
+                  <a:rPr lang="en-US" sz="1800" baseline="-25000" dirty="0"/>
+                  <a:t>2</a:t>
+                </a:r>
+                <a:r>
+                  <a:rPr lang="en-US" sz="1800" dirty="0"/>
+                  <a:t> ∪ … ∪ </a:t>
+                </a:r>
+                <a:r>
+                  <a:rPr lang="en-US" sz="1800" dirty="0" err="1"/>
+                  <a:t>P</a:t>
+                </a:r>
+                <a:r>
+                  <a:rPr lang="en-US" sz="1800" baseline="-25000" dirty="0" err="1"/>
+                  <a:t>n</a:t>
+                </a:r>
+                <a:r>
+                  <a:rPr lang="en-US" sz="1800" dirty="0"/>
+                  <a:t>.</a:t>
+                </a:r>
+                <a:endParaRPr lang="en-US" sz="1800" baseline="-25000" dirty="0"/>
+              </a:p>
+              <a:p>
+                <a:pPr marL="0" indent="0">
+                  <a:buNone/>
+                </a:pPr>
+                <a:r>
+                  <a:rPr lang="en-US" sz="1800" dirty="0"/>
+                  <a:t>Thus the number of derangements </a:t>
+                </a:r>
+                <a:r>
+                  <a:rPr lang="en-US" sz="1800" dirty="0" err="1"/>
+                  <a:t>D</a:t>
+                </a:r>
+                <a:r>
+                  <a:rPr lang="en-US" sz="1800" baseline="-25000" dirty="0" err="1"/>
+                  <a:t>n</a:t>
+                </a:r>
+                <a:r>
+                  <a:rPr lang="en-US" sz="1800" baseline="-25000" dirty="0"/>
+                  <a:t> </a:t>
+                </a:r>
+                <a:r>
+                  <a:rPr lang="en-US" sz="1800" dirty="0"/>
+                  <a:t>= n! - | P</a:t>
+                </a:r>
+                <a:r>
+                  <a:rPr lang="en-US" sz="1800" baseline="-25000" dirty="0"/>
+                  <a:t>1</a:t>
+                </a:r>
+                <a:r>
+                  <a:rPr lang="en-US" sz="1800" dirty="0"/>
+                  <a:t> ∪ P</a:t>
+                </a:r>
+                <a:r>
+                  <a:rPr lang="en-US" sz="1800" baseline="-25000" dirty="0"/>
+                  <a:t>2</a:t>
+                </a:r>
+                <a:r>
+                  <a:rPr lang="en-US" sz="1800" dirty="0"/>
+                  <a:t> ∪ … ∪ </a:t>
+                </a:r>
+                <a:r>
+                  <a:rPr lang="en-US" sz="1800" dirty="0" err="1"/>
+                  <a:t>P</a:t>
+                </a:r>
+                <a:r>
+                  <a:rPr lang="en-US" sz="1800" baseline="-25000" dirty="0" err="1"/>
+                  <a:t>n</a:t>
+                </a:r>
+                <a:r>
+                  <a:rPr lang="en-US" sz="1800" dirty="0"/>
+                  <a:t>|.</a:t>
+                </a:r>
+              </a:p>
+              <a:p>
+                <a:pPr marL="0" indent="0">
+                  <a:buNone/>
+                </a:pPr>
+                <a:r>
+                  <a:rPr lang="en-US" sz="1800" dirty="0"/>
+                  <a:t>Now |P</a:t>
+                </a:r>
+                <a:r>
+                  <a:rPr lang="en-US" sz="1800" baseline="-25000" dirty="0"/>
+                  <a:t>i</a:t>
+                </a:r>
+                <a:r>
+                  <a:rPr lang="en-US" sz="1800" dirty="0"/>
+                  <a:t>| = (n-1)!, |P</a:t>
+                </a:r>
+                <a:r>
+                  <a:rPr lang="en-US" sz="1800" baseline="-25000" dirty="0"/>
+                  <a:t>i </a:t>
+                </a:r>
+                <a:r>
+                  <a:rPr lang="en-US" sz="1800" dirty="0"/>
+                  <a:t>∩ </a:t>
+                </a:r>
+                <a:r>
+                  <a:rPr lang="en-US" sz="1800" dirty="0" err="1"/>
+                  <a:t>P</a:t>
+                </a:r>
+                <a:r>
+                  <a:rPr lang="en-US" sz="1800" baseline="-25000" dirty="0" err="1"/>
+                  <a:t>k</a:t>
+                </a:r>
+                <a:r>
+                  <a:rPr lang="en-US" sz="1800" dirty="0"/>
+                  <a:t>| = (n-2)!, if </a:t>
+                </a:r>
+                <a:r>
+                  <a:rPr lang="en-US" sz="1800" dirty="0" err="1"/>
+                  <a:t>i</a:t>
+                </a:r>
+                <a:r>
+                  <a:rPr lang="en-US" sz="1800" dirty="0"/>
+                  <a:t> ≠ k, and in general </a:t>
+                </a:r>
+                <a14:m>
+                  <m:oMath xmlns:m="http://schemas.openxmlformats.org/officeDocument/2006/math">
+                    <m:d>
+                      <m:dPr>
+                        <m:begChr m:val="|"/>
+                        <m:endChr m:val="|"/>
+                        <m:ctrlPr>
+                          <a:rPr lang="en-US" sz="1800" i="1" smtClean="0">
+                            <a:latin typeface="Cambria Math" panose="02040503050406030204" pitchFamily="18" charset="0"/>
+                          </a:rPr>
+                        </m:ctrlPr>
+                      </m:dPr>
+                      <m:e>
+                        <m:nary>
+                          <m:naryPr>
+                            <m:chr m:val="⋂"/>
+                            <m:supHide m:val="on"/>
+                            <m:ctrlPr>
+                              <a:rPr lang="en-US" sz="1800" i="1" smtClean="0">
+                                <a:latin typeface="Cambria Math" panose="02040503050406030204" pitchFamily="18" charset="0"/>
+                              </a:rPr>
+                            </m:ctrlPr>
+                          </m:naryPr>
+                          <m:sub>
+                            <m:r>
+                              <m:rPr>
+                                <m:brk m:alnAt="7"/>
+                              </m:rPr>
+                              <a:rPr lang="fr-CH" sz="1800" b="0" i="1" smtClean="0">
+                                <a:latin typeface="Cambria Math" panose="02040503050406030204" pitchFamily="18" charset="0"/>
+                              </a:rPr>
+                              <m:t>𝑖</m:t>
+                            </m:r>
+                            <m:r>
+                              <a:rPr lang="fr-CH" sz="1800" b="0" i="1" smtClean="0">
+                                <a:latin typeface="Cambria Math" panose="02040503050406030204" pitchFamily="18" charset="0"/>
+                                <a:ea typeface="Cambria Math" panose="02040503050406030204" pitchFamily="18" charset="0"/>
+                              </a:rPr>
+                              <m:t>∈</m:t>
+                            </m:r>
+                            <m:r>
+                              <a:rPr lang="fr-CH" sz="1800" b="0" i="1" smtClean="0">
+                                <a:latin typeface="Cambria Math" panose="02040503050406030204" pitchFamily="18" charset="0"/>
+                                <a:ea typeface="Cambria Math" panose="02040503050406030204" pitchFamily="18" charset="0"/>
+                              </a:rPr>
+                              <m:t>𝐼</m:t>
+                            </m:r>
+                          </m:sub>
+                          <m:sup/>
+                          <m:e>
+                            <m:sSub>
+                              <m:sSubPr>
+                                <m:ctrlPr>
+                                  <a:rPr lang="en-US" sz="1800" i="1" smtClean="0">
+                                    <a:latin typeface="Cambria Math" panose="02040503050406030204" pitchFamily="18" charset="0"/>
+                                  </a:rPr>
+                                </m:ctrlPr>
+                              </m:sSubPr>
+                              <m:e>
+                                <m:r>
+                                  <a:rPr lang="fr-CH" sz="1800" b="0" i="1" smtClean="0">
+                                    <a:latin typeface="Cambria Math" panose="02040503050406030204" pitchFamily="18" charset="0"/>
+                                  </a:rPr>
+                                  <m:t>𝑃</m:t>
+                                </m:r>
+                              </m:e>
+                              <m:sub>
+                                <m:r>
+                                  <a:rPr lang="fr-CH" sz="1800" b="0" i="1" smtClean="0">
+                                    <a:latin typeface="Cambria Math" panose="02040503050406030204" pitchFamily="18" charset="0"/>
+                                  </a:rPr>
+                                  <m:t>𝑖</m:t>
+                                </m:r>
+                              </m:sub>
+                            </m:sSub>
+                          </m:e>
+                        </m:nary>
+                      </m:e>
+                    </m:d>
+                    <m:r>
+                      <a:rPr lang="fr-CH" sz="1800" b="0" i="1" smtClean="0">
+                        <a:latin typeface="Cambria Math" panose="02040503050406030204" pitchFamily="18" charset="0"/>
+                      </a:rPr>
+                      <m:t>=</m:t>
+                    </m:r>
+                    <m:d>
+                      <m:dPr>
+                        <m:ctrlPr>
+                          <a:rPr lang="fr-CH" sz="1800" b="0" i="1" smtClean="0">
+                            <a:latin typeface="Cambria Math" panose="02040503050406030204" pitchFamily="18" charset="0"/>
+                          </a:rPr>
+                        </m:ctrlPr>
+                      </m:dPr>
+                      <m:e>
+                        <m:r>
+                          <a:rPr lang="fr-CH" sz="1800" b="0" i="1" smtClean="0">
+                            <a:latin typeface="Cambria Math" panose="02040503050406030204" pitchFamily="18" charset="0"/>
+                          </a:rPr>
+                          <m:t>𝑛</m:t>
+                        </m:r>
+                        <m:r>
+                          <a:rPr lang="fr-CH" sz="1800" b="0" i="1" smtClean="0">
+                            <a:latin typeface="Cambria Math" panose="02040503050406030204" pitchFamily="18" charset="0"/>
+                          </a:rPr>
+                          <m:t>−</m:t>
+                        </m:r>
+                        <m:r>
+                          <a:rPr lang="fr-CH" sz="1800" b="0" i="1" smtClean="0">
+                            <a:latin typeface="Cambria Math" panose="02040503050406030204" pitchFamily="18" charset="0"/>
+                          </a:rPr>
+                          <m:t>𝑠</m:t>
+                        </m:r>
+                      </m:e>
+                    </m:d>
+                    <m:r>
+                      <a:rPr lang="fr-CH" sz="1800" b="0" i="1" smtClean="0">
+                        <a:latin typeface="Cambria Math" panose="02040503050406030204" pitchFamily="18" charset="0"/>
+                      </a:rPr>
+                      <m:t>!</m:t>
+                    </m:r>
+                  </m:oMath>
+                </a14:m>
+                <a:r>
+                  <a:rPr lang="en-US" sz="1800" dirty="0"/>
+                  <a:t> if </a:t>
+                </a:r>
+                <a14:m>
+                  <m:oMath xmlns:m="http://schemas.openxmlformats.org/officeDocument/2006/math">
+                    <m:d>
+                      <m:dPr>
+                        <m:begChr m:val="|"/>
+                        <m:endChr m:val="|"/>
+                        <m:ctrlPr>
+                          <a:rPr lang="fr-CH" sz="1800" b="0" i="1" smtClean="0">
+                            <a:latin typeface="Cambria Math" panose="02040503050406030204" pitchFamily="18" charset="0"/>
+                          </a:rPr>
+                        </m:ctrlPr>
+                      </m:dPr>
+                      <m:e>
+                        <m:r>
+                          <a:rPr lang="fr-CH" sz="1800" b="0" i="1" smtClean="0">
+                            <a:latin typeface="Cambria Math" panose="02040503050406030204" pitchFamily="18" charset="0"/>
+                          </a:rPr>
+                          <m:t>𝐼</m:t>
+                        </m:r>
+                      </m:e>
+                    </m:d>
+                    <m:r>
+                      <a:rPr lang="fr-CH" sz="1800" b="0" i="1" smtClean="0">
+                        <a:latin typeface="Cambria Math" panose="02040503050406030204" pitchFamily="18" charset="0"/>
+                      </a:rPr>
+                      <m:t>=</m:t>
+                    </m:r>
+                    <m:r>
+                      <a:rPr lang="fr-CH" sz="1800" b="0" i="1" smtClean="0">
+                        <a:latin typeface="Cambria Math" panose="02040503050406030204" pitchFamily="18" charset="0"/>
+                      </a:rPr>
+                      <m:t>𝑠</m:t>
+                    </m:r>
+                    <m:r>
+                      <a:rPr lang="fr-CH" sz="1800" b="0" i="1" smtClean="0">
+                        <a:latin typeface="Cambria Math" panose="02040503050406030204" pitchFamily="18" charset="0"/>
+                      </a:rPr>
+                      <m:t>.</m:t>
+                    </m:r>
+                  </m:oMath>
+                </a14:m>
+                <a:r>
+                  <a:rPr lang="en-US" sz="1800" dirty="0"/>
+                  <a:t> </a:t>
+                </a:r>
+              </a:p>
+              <a:p>
+                <a:pPr marL="0" indent="0">
+                  <a:buNone/>
+                </a:pPr>
+                <a:r>
+                  <a:rPr lang="en-US" sz="1800" dirty="0"/>
+                  <a:t>Using the principle of inclusion-exclusion:</a:t>
+                </a:r>
+              </a:p>
+              <a:p>
+                <a:pPr marL="0" indent="0">
+                  <a:buNone/>
+                </a:pPr>
+                <a:r>
+                  <a:rPr lang="en-US" sz="1800" dirty="0"/>
+                  <a:t>| P</a:t>
+                </a:r>
+                <a:r>
+                  <a:rPr lang="en-US" sz="1800" baseline="-25000" dirty="0"/>
+                  <a:t>1</a:t>
+                </a:r>
+                <a:r>
+                  <a:rPr lang="en-US" sz="1800" dirty="0"/>
+                  <a:t> ∪ P</a:t>
+                </a:r>
+                <a:r>
+                  <a:rPr lang="en-US" sz="1800" baseline="-25000" dirty="0"/>
+                  <a:t>2</a:t>
+                </a:r>
+                <a:r>
+                  <a:rPr lang="en-US" sz="1800" dirty="0"/>
+                  <a:t> ∪ … ∪ </a:t>
+                </a:r>
+                <a:r>
+                  <a:rPr lang="en-US" sz="1800" dirty="0" err="1"/>
+                  <a:t>P</a:t>
+                </a:r>
+                <a:r>
+                  <a:rPr lang="en-US" sz="1800" baseline="-25000" dirty="0" err="1"/>
+                  <a:t>n</a:t>
+                </a:r>
+                <a:r>
+                  <a:rPr lang="en-US" sz="1800" dirty="0"/>
+                  <a:t>|=</a:t>
+                </a:r>
+              </a:p>
+              <a:p>
+                <a:pPr marL="0" indent="0">
+                  <a:buNone/>
+                </a:pPr>
+                <a14:m>
+                  <m:oMathPara xmlns:m="http://schemas.openxmlformats.org/officeDocument/2006/math">
+                    <m:oMathParaPr>
+                      <m:jc m:val="centerGroup"/>
+                    </m:oMathParaPr>
+                    <m:oMath xmlns:m="http://schemas.openxmlformats.org/officeDocument/2006/math">
+                      <m:nary>
+                        <m:naryPr>
+                          <m:chr m:val="∑"/>
+                          <m:supHide m:val="on"/>
+                          <m:ctrlPr>
+                            <a:rPr lang="en-US" sz="1800" i="1" smtClean="0">
+                              <a:latin typeface="Cambria Math" panose="02040503050406030204" pitchFamily="18" charset="0"/>
+                            </a:rPr>
+                          </m:ctrlPr>
+                        </m:naryPr>
+                        <m:sub>
+                          <m:r>
+                            <m:rPr>
+                              <m:brk m:alnAt="7"/>
+                            </m:rPr>
+                            <a:rPr lang="fr-CH" sz="1800" b="0" i="1" smtClean="0">
+                              <a:latin typeface="Cambria Math" panose="02040503050406030204" pitchFamily="18" charset="0"/>
+                            </a:rPr>
+                            <m:t>1</m:t>
+                          </m:r>
+                          <m:r>
+                            <a:rPr lang="fr-CH" sz="1800" b="0" i="1" smtClean="0">
+                              <a:latin typeface="Cambria Math" panose="02040503050406030204" pitchFamily="18" charset="0"/>
+                              <a:ea typeface="Cambria Math" panose="02040503050406030204" pitchFamily="18" charset="0"/>
+                            </a:rPr>
+                            <m:t>≤</m:t>
+                          </m:r>
+                          <m:r>
+                            <a:rPr lang="fr-CH" sz="1800" b="0" i="1" smtClean="0">
+                              <a:latin typeface="Cambria Math" panose="02040503050406030204" pitchFamily="18" charset="0"/>
+                              <a:ea typeface="Cambria Math" panose="02040503050406030204" pitchFamily="18" charset="0"/>
+                            </a:rPr>
+                            <m:t>𝑖</m:t>
+                          </m:r>
+                          <m:r>
+                            <a:rPr lang="fr-CH" sz="1800" b="0" i="1" smtClean="0">
+                              <a:latin typeface="Cambria Math" panose="02040503050406030204" pitchFamily="18" charset="0"/>
+                              <a:ea typeface="Cambria Math" panose="02040503050406030204" pitchFamily="18" charset="0"/>
+                            </a:rPr>
+                            <m:t>≤</m:t>
+                          </m:r>
+                          <m:r>
+                            <a:rPr lang="fr-CH" sz="1800" b="0" i="1" smtClean="0">
+                              <a:latin typeface="Cambria Math" panose="02040503050406030204" pitchFamily="18" charset="0"/>
+                              <a:ea typeface="Cambria Math" panose="02040503050406030204" pitchFamily="18" charset="0"/>
+                            </a:rPr>
+                            <m:t>𝑛</m:t>
+                          </m:r>
+                        </m:sub>
+                        <m:sup/>
+                        <m:e>
+                          <m:d>
+                            <m:dPr>
+                              <m:begChr m:val="|"/>
+                              <m:endChr m:val="|"/>
+                              <m:ctrlPr>
+                                <a:rPr lang="en-US" sz="1800" i="1" smtClean="0">
+                                  <a:latin typeface="Cambria Math" panose="02040503050406030204" pitchFamily="18" charset="0"/>
+                                </a:rPr>
+                              </m:ctrlPr>
+                            </m:dPr>
+                            <m:e>
+                              <m:sSub>
+                                <m:sSubPr>
+                                  <m:ctrlPr>
+                                    <a:rPr lang="en-US" sz="1800" i="1">
+                                      <a:latin typeface="Cambria Math" panose="02040503050406030204" pitchFamily="18" charset="0"/>
+                                    </a:rPr>
+                                  </m:ctrlPr>
+                                </m:sSubPr>
+                                <m:e>
+                                  <m:r>
+                                    <a:rPr lang="fr-CH" sz="1800" i="1">
+                                      <a:latin typeface="Cambria Math" panose="02040503050406030204" pitchFamily="18" charset="0"/>
+                                    </a:rPr>
+                                    <m:t>𝑃</m:t>
+                                  </m:r>
+                                </m:e>
+                                <m:sub>
+                                  <m:r>
+                                    <a:rPr lang="fr-CH" sz="1800" i="1">
+                                      <a:latin typeface="Cambria Math" panose="02040503050406030204" pitchFamily="18" charset="0"/>
+                                    </a:rPr>
+                                    <m:t>𝑖</m:t>
+                                  </m:r>
+                                </m:sub>
+                              </m:sSub>
+                            </m:e>
+                          </m:d>
+                        </m:e>
+                      </m:nary>
+                      <m:r>
+                        <a:rPr lang="fr-CH" sz="1800" b="0" i="0" smtClean="0">
+                          <a:latin typeface="Cambria Math" panose="02040503050406030204" pitchFamily="18" charset="0"/>
+                        </a:rPr>
+                        <m:t>−</m:t>
+                      </m:r>
+                      <m:nary>
+                        <m:naryPr>
+                          <m:chr m:val="∑"/>
+                          <m:supHide m:val="on"/>
+                          <m:ctrlPr>
+                            <a:rPr lang="en-US" sz="1800" i="1">
+                              <a:latin typeface="Cambria Math" panose="02040503050406030204" pitchFamily="18" charset="0"/>
+                            </a:rPr>
+                          </m:ctrlPr>
+                        </m:naryPr>
+                        <m:sub>
+                          <m:r>
+                            <m:rPr>
+                              <m:brk m:alnAt="7"/>
+                            </m:rPr>
+                            <a:rPr lang="fr-CH" sz="1800" i="1">
+                              <a:latin typeface="Cambria Math" panose="02040503050406030204" pitchFamily="18" charset="0"/>
+                            </a:rPr>
+                            <m:t>1</m:t>
+                          </m:r>
+                          <m:r>
+                            <a:rPr lang="fr-CH" sz="1800" i="1">
+                              <a:latin typeface="Cambria Math" panose="02040503050406030204" pitchFamily="18" charset="0"/>
+                              <a:ea typeface="Cambria Math" panose="02040503050406030204" pitchFamily="18" charset="0"/>
+                            </a:rPr>
+                            <m:t>≤</m:t>
+                          </m:r>
+                          <m:r>
+                            <a:rPr lang="fr-CH" sz="1800" i="1">
+                              <a:latin typeface="Cambria Math" panose="02040503050406030204" pitchFamily="18" charset="0"/>
+                              <a:ea typeface="Cambria Math" panose="02040503050406030204" pitchFamily="18" charset="0"/>
+                            </a:rPr>
+                            <m:t>𝑖</m:t>
+                          </m:r>
+                          <m:r>
+                            <a:rPr lang="fr-CH" sz="1800" b="0" i="1" smtClean="0">
+                              <a:latin typeface="Cambria Math" panose="02040503050406030204" pitchFamily="18" charset="0"/>
+                              <a:ea typeface="Cambria Math" panose="02040503050406030204" pitchFamily="18" charset="0"/>
+                            </a:rPr>
+                            <m:t>&lt;</m:t>
+                          </m:r>
+                          <m:r>
+                            <a:rPr lang="fr-CH" sz="1800" b="0" i="1" smtClean="0">
+                              <a:latin typeface="Cambria Math" panose="02040503050406030204" pitchFamily="18" charset="0"/>
+                              <a:ea typeface="Cambria Math" panose="02040503050406030204" pitchFamily="18" charset="0"/>
+                            </a:rPr>
+                            <m:t>𝑘</m:t>
+                          </m:r>
+                          <m:r>
+                            <a:rPr lang="fr-CH" sz="1800" i="1">
+                              <a:latin typeface="Cambria Math" panose="02040503050406030204" pitchFamily="18" charset="0"/>
+                              <a:ea typeface="Cambria Math" panose="02040503050406030204" pitchFamily="18" charset="0"/>
+                            </a:rPr>
+                            <m:t>≤</m:t>
+                          </m:r>
+                          <m:r>
+                            <a:rPr lang="fr-CH" sz="1800" i="1">
+                              <a:latin typeface="Cambria Math" panose="02040503050406030204" pitchFamily="18" charset="0"/>
+                              <a:ea typeface="Cambria Math" panose="02040503050406030204" pitchFamily="18" charset="0"/>
+                            </a:rPr>
+                            <m:t>𝑛</m:t>
+                          </m:r>
+                        </m:sub>
+                        <m:sup/>
+                        <m:e>
+                          <m:d>
+                            <m:dPr>
+                              <m:begChr m:val="|"/>
+                              <m:endChr m:val="|"/>
+                              <m:ctrlPr>
+                                <a:rPr lang="en-US" sz="1800" i="1">
+                                  <a:latin typeface="Cambria Math" panose="02040503050406030204" pitchFamily="18" charset="0"/>
+                                </a:rPr>
+                              </m:ctrlPr>
+                            </m:dPr>
+                            <m:e>
+                              <m:sSub>
+                                <m:sSubPr>
+                                  <m:ctrlPr>
+                                    <a:rPr lang="en-US" sz="1800" i="1">
+                                      <a:latin typeface="Cambria Math" panose="02040503050406030204" pitchFamily="18" charset="0"/>
+                                    </a:rPr>
+                                  </m:ctrlPr>
+                                </m:sSubPr>
+                                <m:e>
+                                  <m:r>
+                                    <a:rPr lang="fr-CH" sz="1800" i="1">
+                                      <a:latin typeface="Cambria Math" panose="02040503050406030204" pitchFamily="18" charset="0"/>
+                                    </a:rPr>
+                                    <m:t>𝑃</m:t>
+                                  </m:r>
+                                </m:e>
+                                <m:sub>
+                                  <m:r>
+                                    <a:rPr lang="fr-CH" sz="1800" i="1">
+                                      <a:latin typeface="Cambria Math" panose="02040503050406030204" pitchFamily="18" charset="0"/>
+                                    </a:rPr>
+                                    <m:t>𝑖</m:t>
+                                  </m:r>
+                                </m:sub>
+                              </m:sSub>
+                              <m:r>
+                                <a:rPr lang="fr-CH" sz="1800" i="1" smtClean="0">
+                                  <a:latin typeface="Cambria Math" panose="02040503050406030204" pitchFamily="18" charset="0"/>
+                                  <a:ea typeface="Cambria Math" panose="02040503050406030204" pitchFamily="18" charset="0"/>
+                                </a:rPr>
+                                <m:t>∩</m:t>
+                              </m:r>
+                              <m:sSub>
+                                <m:sSubPr>
+                                  <m:ctrlPr>
+                                    <a:rPr lang="en-US" sz="1800" i="1">
+                                      <a:latin typeface="Cambria Math" panose="02040503050406030204" pitchFamily="18" charset="0"/>
+                                    </a:rPr>
+                                  </m:ctrlPr>
+                                </m:sSubPr>
+                                <m:e>
+                                  <m:r>
+                                    <a:rPr lang="fr-CH" sz="1800" i="1">
+                                      <a:latin typeface="Cambria Math" panose="02040503050406030204" pitchFamily="18" charset="0"/>
+                                    </a:rPr>
+                                    <m:t>𝑃</m:t>
+                                  </m:r>
+                                </m:e>
+                                <m:sub>
+                                  <m:r>
+                                    <a:rPr lang="fr-CH" sz="1800" b="0" i="1" smtClean="0">
+                                      <a:latin typeface="Cambria Math" panose="02040503050406030204" pitchFamily="18" charset="0"/>
+                                    </a:rPr>
+                                    <m:t>𝑘</m:t>
+                                  </m:r>
+                                </m:sub>
+                              </m:sSub>
+                            </m:e>
+                          </m:d>
+                          <m:r>
+                            <a:rPr lang="fr-CH" sz="1800" b="0" i="1" smtClean="0">
+                              <a:latin typeface="Cambria Math" panose="02040503050406030204" pitchFamily="18" charset="0"/>
+                            </a:rPr>
+                            <m:t>+…+</m:t>
+                          </m:r>
+                          <m:sSup>
+                            <m:sSupPr>
+                              <m:ctrlPr>
+                                <a:rPr lang="fr-CH" sz="1800" b="0" i="1" smtClean="0">
+                                  <a:latin typeface="Cambria Math" panose="02040503050406030204" pitchFamily="18" charset="0"/>
+                                </a:rPr>
+                              </m:ctrlPr>
+                            </m:sSupPr>
+                            <m:e>
+                              <m:d>
+                                <m:dPr>
+                                  <m:ctrlPr>
+                                    <a:rPr lang="fr-CH" sz="1800" i="1">
+                                      <a:latin typeface="Cambria Math" panose="02040503050406030204" pitchFamily="18" charset="0"/>
+                                    </a:rPr>
+                                  </m:ctrlPr>
+                                </m:dPr>
+                                <m:e>
+                                  <m:r>
+                                    <a:rPr lang="fr-CH" sz="1800" i="1">
+                                      <a:latin typeface="Cambria Math" panose="02040503050406030204" pitchFamily="18" charset="0"/>
+                                    </a:rPr>
+                                    <m:t>−1</m:t>
+                                  </m:r>
+                                </m:e>
+                              </m:d>
+                            </m:e>
+                            <m:sup>
+                              <m:r>
+                                <a:rPr lang="fr-CH" sz="1800" b="0" i="1" smtClean="0">
+                                  <a:latin typeface="Cambria Math" panose="02040503050406030204" pitchFamily="18" charset="0"/>
+                                </a:rPr>
+                                <m:t>𝑛</m:t>
+                              </m:r>
+                            </m:sup>
+                          </m:sSup>
+                          <m:d>
+                            <m:dPr>
+                              <m:begChr m:val="|"/>
+                              <m:endChr m:val="|"/>
+                              <m:ctrlPr>
+                                <a:rPr lang="en-US" sz="1800" i="1">
+                                  <a:latin typeface="Cambria Math" panose="02040503050406030204" pitchFamily="18" charset="0"/>
+                                </a:rPr>
+                              </m:ctrlPr>
+                            </m:dPr>
+                            <m:e>
+                              <m:nary>
+                                <m:naryPr>
+                                  <m:chr m:val="⋂"/>
+                                  <m:supHide m:val="on"/>
+                                  <m:ctrlPr>
+                                    <a:rPr lang="en-US" sz="1800" i="1" smtClean="0">
+                                      <a:latin typeface="Cambria Math" panose="02040503050406030204" pitchFamily="18" charset="0"/>
+                                    </a:rPr>
+                                  </m:ctrlPr>
+                                </m:naryPr>
+                                <m:sub>
+                                  <m:r>
+                                    <m:rPr>
+                                      <m:brk m:alnAt="7"/>
+                                    </m:rPr>
+                                    <a:rPr lang="fr-CH" sz="1800" i="1">
+                                      <a:latin typeface="Cambria Math" panose="02040503050406030204" pitchFamily="18" charset="0"/>
+                                    </a:rPr>
+                                    <m:t>1</m:t>
+                                  </m:r>
+                                  <m:r>
+                                    <a:rPr lang="fr-CH" sz="1800" i="1">
+                                      <a:latin typeface="Cambria Math" panose="02040503050406030204" pitchFamily="18" charset="0"/>
+                                      <a:ea typeface="Cambria Math" panose="02040503050406030204" pitchFamily="18" charset="0"/>
+                                    </a:rPr>
+                                    <m:t>≤</m:t>
+                                  </m:r>
+                                  <m:r>
+                                    <a:rPr lang="fr-CH" sz="1800" i="1">
+                                      <a:latin typeface="Cambria Math" panose="02040503050406030204" pitchFamily="18" charset="0"/>
+                                      <a:ea typeface="Cambria Math" panose="02040503050406030204" pitchFamily="18" charset="0"/>
+                                    </a:rPr>
+                                    <m:t>𝑖</m:t>
+                                  </m:r>
+                                  <m:r>
+                                    <a:rPr lang="fr-CH" sz="1800" i="1">
+                                      <a:latin typeface="Cambria Math" panose="02040503050406030204" pitchFamily="18" charset="0"/>
+                                      <a:ea typeface="Cambria Math" panose="02040503050406030204" pitchFamily="18" charset="0"/>
+                                    </a:rPr>
+                                    <m:t>≤</m:t>
+                                  </m:r>
+                                  <m:r>
+                                    <a:rPr lang="fr-CH" sz="1800" i="1">
+                                      <a:latin typeface="Cambria Math" panose="02040503050406030204" pitchFamily="18" charset="0"/>
+                                      <a:ea typeface="Cambria Math" panose="02040503050406030204" pitchFamily="18" charset="0"/>
+                                    </a:rPr>
+                                    <m:t>𝑛</m:t>
+                                  </m:r>
+                                </m:sub>
+                                <m:sup/>
+                                <m:e>
+                                  <m:sSub>
+                                    <m:sSubPr>
+                                      <m:ctrlPr>
+                                        <a:rPr lang="en-US" sz="1800" i="1">
+                                          <a:latin typeface="Cambria Math" panose="02040503050406030204" pitchFamily="18" charset="0"/>
+                                        </a:rPr>
+                                      </m:ctrlPr>
+                                    </m:sSubPr>
+                                    <m:e>
+                                      <m:r>
+                                        <a:rPr lang="fr-CH" sz="1800" i="1">
+                                          <a:latin typeface="Cambria Math" panose="02040503050406030204" pitchFamily="18" charset="0"/>
+                                        </a:rPr>
+                                        <m:t>𝑃</m:t>
+                                      </m:r>
+                                    </m:e>
+                                    <m:sub>
+                                      <m:r>
+                                        <a:rPr lang="fr-CH" sz="1800" i="1">
+                                          <a:latin typeface="Cambria Math" panose="02040503050406030204" pitchFamily="18" charset="0"/>
+                                        </a:rPr>
+                                        <m:t>𝑖</m:t>
+                                      </m:r>
+                                    </m:sub>
+                                  </m:sSub>
+                                </m:e>
+                              </m:nary>
+                            </m:e>
+                          </m:d>
+                        </m:e>
+                      </m:nary>
+                      <m:r>
+                        <a:rPr lang="fr-CH" sz="1800" b="0" i="1" smtClean="0">
+                          <a:latin typeface="Cambria Math" panose="02040503050406030204" pitchFamily="18" charset="0"/>
+                        </a:rPr>
+                        <m:t>=</m:t>
+                      </m:r>
+                      <m:d>
+                        <m:dPr>
+                          <m:ctrlPr>
+                            <a:rPr lang="fr-CH" sz="1800" b="0" i="1" smtClean="0">
+                              <a:latin typeface="Cambria Math" panose="02040503050406030204" pitchFamily="18" charset="0"/>
+                            </a:rPr>
+                          </m:ctrlPr>
+                        </m:dPr>
+                        <m:e>
+                          <m:f>
+                            <m:fPr>
+                              <m:type m:val="noBar"/>
+                              <m:ctrlPr>
+                                <a:rPr lang="fr-CH" sz="1800" b="0" i="1" smtClean="0">
+                                  <a:latin typeface="Cambria Math" panose="02040503050406030204" pitchFamily="18" charset="0"/>
+                                </a:rPr>
+                              </m:ctrlPr>
+                            </m:fPr>
+                            <m:num>
+                              <m:r>
+                                <a:rPr lang="fr-CH" sz="1800" b="0" i="1" smtClean="0">
+                                  <a:latin typeface="Cambria Math" panose="02040503050406030204" pitchFamily="18" charset="0"/>
+                                </a:rPr>
+                                <m:t>𝑛</m:t>
+                              </m:r>
+                            </m:num>
+                            <m:den>
+                              <m:r>
+                                <a:rPr lang="fr-CH" sz="1800" b="0" i="1" smtClean="0">
+                                  <a:latin typeface="Cambria Math" panose="02040503050406030204" pitchFamily="18" charset="0"/>
+                                </a:rPr>
+                                <m:t>1</m:t>
+                              </m:r>
+                            </m:den>
+                          </m:f>
+                        </m:e>
+                      </m:d>
+                      <m:d>
+                        <m:dPr>
+                          <m:ctrlPr>
+                            <a:rPr lang="fr-CH" sz="1800" b="0" i="1" smtClean="0">
+                              <a:latin typeface="Cambria Math" panose="02040503050406030204" pitchFamily="18" charset="0"/>
+                            </a:rPr>
+                          </m:ctrlPr>
+                        </m:dPr>
+                        <m:e>
+                          <m:r>
+                            <a:rPr lang="fr-CH" sz="1800" b="0" i="1" smtClean="0">
+                              <a:latin typeface="Cambria Math" panose="02040503050406030204" pitchFamily="18" charset="0"/>
+                            </a:rPr>
+                            <m:t>𝑛</m:t>
+                          </m:r>
+                          <m:r>
+                            <a:rPr lang="fr-CH" sz="1800" b="0" i="1" smtClean="0">
+                              <a:latin typeface="Cambria Math" panose="02040503050406030204" pitchFamily="18" charset="0"/>
+                            </a:rPr>
+                            <m:t>−1</m:t>
+                          </m:r>
+                        </m:e>
+                      </m:d>
+                      <m:r>
+                        <a:rPr lang="fr-CH" sz="1800" b="0" i="1" smtClean="0">
+                          <a:latin typeface="Cambria Math" panose="02040503050406030204" pitchFamily="18" charset="0"/>
+                        </a:rPr>
+                        <m:t>!−</m:t>
+                      </m:r>
+                      <m:d>
+                        <m:dPr>
+                          <m:ctrlPr>
+                            <a:rPr lang="fr-CH" sz="1800" b="0" i="1" smtClean="0">
+                              <a:latin typeface="Cambria Math" panose="02040503050406030204" pitchFamily="18" charset="0"/>
+                            </a:rPr>
+                          </m:ctrlPr>
+                        </m:dPr>
+                        <m:e>
+                          <m:f>
+                            <m:fPr>
+                              <m:type m:val="noBar"/>
+                              <m:ctrlPr>
+                                <a:rPr lang="fr-CH" sz="1800" b="0" i="1" smtClean="0">
+                                  <a:latin typeface="Cambria Math" panose="02040503050406030204" pitchFamily="18" charset="0"/>
+                                </a:rPr>
+                              </m:ctrlPr>
+                            </m:fPr>
+                            <m:num>
+                              <m:r>
+                                <a:rPr lang="fr-CH" sz="1800" b="0" i="1" smtClean="0">
+                                  <a:latin typeface="Cambria Math" panose="02040503050406030204" pitchFamily="18" charset="0"/>
+                                </a:rPr>
+                                <m:t>𝑛</m:t>
+                              </m:r>
+                            </m:num>
+                            <m:den>
+                              <m:r>
+                                <a:rPr lang="fr-CH" sz="1800" b="0" i="1" smtClean="0">
+                                  <a:latin typeface="Cambria Math" panose="02040503050406030204" pitchFamily="18" charset="0"/>
+                                </a:rPr>
+                                <m:t>2</m:t>
+                              </m:r>
+                            </m:den>
+                          </m:f>
+                        </m:e>
+                      </m:d>
+                      <m:d>
+                        <m:dPr>
+                          <m:ctrlPr>
+                            <a:rPr lang="fr-CH" sz="1800" b="0" i="1" smtClean="0">
+                              <a:latin typeface="Cambria Math" panose="02040503050406030204" pitchFamily="18" charset="0"/>
+                            </a:rPr>
+                          </m:ctrlPr>
+                        </m:dPr>
+                        <m:e>
+                          <m:r>
+                            <a:rPr lang="fr-CH" sz="1800" b="0" i="1" smtClean="0">
+                              <a:latin typeface="Cambria Math" panose="02040503050406030204" pitchFamily="18" charset="0"/>
+                            </a:rPr>
+                            <m:t>𝑛</m:t>
+                          </m:r>
+                          <m:r>
+                            <a:rPr lang="fr-CH" sz="1800" b="0" i="1" smtClean="0">
+                              <a:latin typeface="Cambria Math" panose="02040503050406030204" pitchFamily="18" charset="0"/>
+                            </a:rPr>
+                            <m:t>−2</m:t>
+                          </m:r>
+                        </m:e>
+                      </m:d>
+                      <m:r>
+                        <a:rPr lang="fr-CH" sz="1800" b="0" i="1" smtClean="0">
+                          <a:latin typeface="Cambria Math" panose="02040503050406030204" pitchFamily="18" charset="0"/>
+                        </a:rPr>
+                        <m:t>!+…+</m:t>
+                      </m:r>
+                      <m:d>
+                        <m:dPr>
+                          <m:ctrlPr>
+                            <a:rPr lang="fr-CH" sz="1800" b="0" i="1" smtClean="0">
+                              <a:latin typeface="Cambria Math" panose="02040503050406030204" pitchFamily="18" charset="0"/>
+                            </a:rPr>
+                          </m:ctrlPr>
+                        </m:dPr>
+                        <m:e>
+                          <m:f>
+                            <m:fPr>
+                              <m:type m:val="noBar"/>
+                              <m:ctrlPr>
+                                <a:rPr lang="fr-CH" sz="1800" b="0" i="1" smtClean="0">
+                                  <a:latin typeface="Cambria Math" panose="02040503050406030204" pitchFamily="18" charset="0"/>
+                                </a:rPr>
+                              </m:ctrlPr>
+                            </m:fPr>
+                            <m:num>
+                              <m:r>
+                                <a:rPr lang="fr-CH" sz="1800" b="0" i="1" smtClean="0">
+                                  <a:latin typeface="Cambria Math" panose="02040503050406030204" pitchFamily="18" charset="0"/>
+                                </a:rPr>
+                                <m:t>𝑛</m:t>
+                              </m:r>
+                            </m:num>
+                            <m:den>
+                              <m:r>
+                                <a:rPr lang="fr-CH" sz="1800" b="0" i="1" smtClean="0">
+                                  <a:latin typeface="Cambria Math" panose="02040503050406030204" pitchFamily="18" charset="0"/>
+                                </a:rPr>
+                                <m:t>𝑛</m:t>
+                              </m:r>
+                            </m:den>
+                          </m:f>
+                        </m:e>
+                      </m:d>
+                      <m:sSup>
+                        <m:sSupPr>
+                          <m:ctrlPr>
+                            <a:rPr lang="fr-CH" sz="1800" i="1">
+                              <a:latin typeface="Cambria Math" panose="02040503050406030204" pitchFamily="18" charset="0"/>
+                            </a:rPr>
+                          </m:ctrlPr>
+                        </m:sSupPr>
+                        <m:e>
+                          <m:d>
+                            <m:dPr>
+                              <m:ctrlPr>
+                                <a:rPr lang="fr-CH" sz="1800" i="1">
+                                  <a:latin typeface="Cambria Math" panose="02040503050406030204" pitchFamily="18" charset="0"/>
+                                </a:rPr>
+                              </m:ctrlPr>
+                            </m:dPr>
+                            <m:e>
+                              <m:r>
+                                <a:rPr lang="fr-CH" sz="1800" i="1">
+                                  <a:latin typeface="Cambria Math" panose="02040503050406030204" pitchFamily="18" charset="0"/>
+                                </a:rPr>
+                                <m:t>−1</m:t>
+                              </m:r>
+                            </m:e>
+                          </m:d>
+                        </m:e>
+                        <m:sup>
+                          <m:r>
+                            <a:rPr lang="fr-CH" sz="1800" i="1">
+                              <a:latin typeface="Cambria Math" panose="02040503050406030204" pitchFamily="18" charset="0"/>
+                            </a:rPr>
+                            <m:t>𝑛</m:t>
+                          </m:r>
+                        </m:sup>
+                      </m:sSup>
+                    </m:oMath>
+                  </m:oMathPara>
+                </a14:m>
+                <a:endParaRPr lang="en-US" sz="1800" dirty="0"/>
+              </a:p>
+              <a:p>
+                <a:pPr marL="0" indent="0">
+                  <a:buNone/>
+                </a:pPr>
+                <a:endParaRPr lang="en-US" sz="1800" dirty="0"/>
+              </a:p>
+              <a:p>
+                <a:pPr marL="0" indent="0">
+                  <a:buNone/>
+                </a:pPr>
+                <a:r>
+                  <a:rPr lang="en-US" sz="1800" dirty="0"/>
+                  <a:t>and since </a:t>
+                </a:r>
+                <a14:m>
+                  <m:oMath xmlns:m="http://schemas.openxmlformats.org/officeDocument/2006/math">
+                    <m:d>
+                      <m:dPr>
+                        <m:ctrlPr>
+                          <a:rPr lang="en-US" sz="1800" i="1" dirty="0">
+                            <a:latin typeface="Cambria Math" panose="02040503050406030204" pitchFamily="18" charset="0"/>
+                          </a:rPr>
+                        </m:ctrlPr>
+                      </m:dPr>
+                      <m:e>
+                        <m:f>
+                          <m:fPr>
+                            <m:type m:val="noBar"/>
+                            <m:ctrlPr>
+                              <a:rPr lang="en-US" sz="1800" i="1" dirty="0">
+                                <a:latin typeface="Cambria Math" panose="02040503050406030204" pitchFamily="18" charset="0"/>
+                              </a:rPr>
+                            </m:ctrlPr>
+                          </m:fPr>
+                          <m:num>
+                            <m:r>
+                              <a:rPr lang="fr-CH" sz="1800" b="0" i="1" dirty="0">
+                                <a:latin typeface="Cambria Math" panose="02040503050406030204" pitchFamily="18" charset="0"/>
+                              </a:rPr>
+                              <m:t>𝑛</m:t>
+                            </m:r>
+                          </m:num>
+                          <m:den>
+                            <m:r>
+                              <a:rPr lang="fr-CH" sz="1800" b="0" i="1" dirty="0">
+                                <a:latin typeface="Cambria Math" panose="02040503050406030204" pitchFamily="18" charset="0"/>
+                              </a:rPr>
+                              <m:t>𝑘</m:t>
+                            </m:r>
+                          </m:den>
+                        </m:f>
+                      </m:e>
+                    </m:d>
+                    <m:d>
+                      <m:dPr>
+                        <m:ctrlPr>
+                          <a:rPr lang="fr-CH" sz="1800" b="0" i="1" dirty="0">
+                            <a:latin typeface="Cambria Math" panose="02040503050406030204" pitchFamily="18" charset="0"/>
+                          </a:rPr>
+                        </m:ctrlPr>
+                      </m:dPr>
+                      <m:e>
+                        <m:r>
+                          <a:rPr lang="fr-CH" sz="1800" b="0" i="1" dirty="0">
+                            <a:latin typeface="Cambria Math" panose="02040503050406030204" pitchFamily="18" charset="0"/>
+                          </a:rPr>
+                          <m:t>𝑛</m:t>
+                        </m:r>
+                        <m:r>
+                          <a:rPr lang="fr-CH" sz="1800" b="0" i="1" dirty="0">
+                            <a:latin typeface="Cambria Math" panose="02040503050406030204" pitchFamily="18" charset="0"/>
+                          </a:rPr>
+                          <m:t>−</m:t>
+                        </m:r>
+                        <m:r>
+                          <a:rPr lang="fr-CH" sz="1800" b="0" i="1" dirty="0">
+                            <a:latin typeface="Cambria Math" panose="02040503050406030204" pitchFamily="18" charset="0"/>
+                          </a:rPr>
+                          <m:t>𝑘</m:t>
+                        </m:r>
+                      </m:e>
+                    </m:d>
+                    <m:r>
+                      <a:rPr lang="fr-CH" sz="1800" b="0" i="1" dirty="0">
+                        <a:latin typeface="Cambria Math" panose="02040503050406030204" pitchFamily="18" charset="0"/>
+                      </a:rPr>
+                      <m:t>!= </m:t>
+                    </m:r>
+                    <m:f>
+                      <m:fPr>
+                        <m:ctrlPr>
+                          <a:rPr lang="fr-CH" sz="1800" b="0" i="1" dirty="0">
+                            <a:latin typeface="Cambria Math" panose="02040503050406030204" pitchFamily="18" charset="0"/>
+                          </a:rPr>
+                        </m:ctrlPr>
+                      </m:fPr>
+                      <m:num>
+                        <m:r>
+                          <a:rPr lang="fr-CH" sz="1800" b="0" i="1" dirty="0">
+                            <a:latin typeface="Cambria Math" panose="02040503050406030204" pitchFamily="18" charset="0"/>
+                          </a:rPr>
+                          <m:t>𝑛</m:t>
+                        </m:r>
+                        <m:r>
+                          <a:rPr lang="fr-CH" sz="1800" b="0" i="1" dirty="0">
+                            <a:latin typeface="Cambria Math" panose="02040503050406030204" pitchFamily="18" charset="0"/>
+                          </a:rPr>
+                          <m:t>!</m:t>
+                        </m:r>
+                      </m:num>
+                      <m:den>
+                        <m:r>
+                          <a:rPr lang="fr-CH" sz="1800" b="0" i="1" dirty="0">
+                            <a:latin typeface="Cambria Math" panose="02040503050406030204" pitchFamily="18" charset="0"/>
+                          </a:rPr>
+                          <m:t>𝑘</m:t>
+                        </m:r>
+                        <m:r>
+                          <a:rPr lang="fr-CH" sz="1800" b="0" i="1" dirty="0">
+                            <a:latin typeface="Cambria Math" panose="02040503050406030204" pitchFamily="18" charset="0"/>
+                          </a:rPr>
+                          <m:t>!</m:t>
+                        </m:r>
+                      </m:den>
+                    </m:f>
+                  </m:oMath>
+                </a14:m>
+                <a:endParaRPr lang="en-US" sz="1800" dirty="0"/>
+              </a:p>
+              <a:p>
+                <a:pPr marL="0" indent="0">
+                  <a:buNone/>
+                </a:pPr>
+                <a:r>
+                  <a:rPr lang="en-US" sz="1800" dirty="0"/>
+                  <a:t>and therefore </a:t>
+                </a:r>
+                <a14:m>
+                  <m:oMath xmlns:m="http://schemas.openxmlformats.org/officeDocument/2006/math">
+                    <m:sSub>
+                      <m:sSubPr>
+                        <m:ctrlPr>
+                          <a:rPr lang="en-US" sz="1800" i="1" smtClean="0">
+                            <a:latin typeface="Cambria Math" panose="02040503050406030204" pitchFamily="18" charset="0"/>
+                          </a:rPr>
+                        </m:ctrlPr>
+                      </m:sSubPr>
+                      <m:e>
+                        <m:r>
+                          <a:rPr lang="fr-CH" sz="1800" b="0" i="1" smtClean="0">
+                            <a:latin typeface="Cambria Math" panose="02040503050406030204" pitchFamily="18" charset="0"/>
+                          </a:rPr>
+                          <m:t>𝐷</m:t>
+                        </m:r>
+                      </m:e>
+                      <m:sub>
+                        <m:r>
+                          <a:rPr lang="fr-CH" sz="1800" b="0" i="1" smtClean="0">
+                            <a:latin typeface="Cambria Math" panose="02040503050406030204" pitchFamily="18" charset="0"/>
+                          </a:rPr>
+                          <m:t>𝑛</m:t>
+                        </m:r>
+                      </m:sub>
+                    </m:sSub>
+                    <m:r>
+                      <a:rPr lang="fr-CH" sz="1800" b="0" i="1" smtClean="0">
+                        <a:latin typeface="Cambria Math" panose="02040503050406030204" pitchFamily="18" charset="0"/>
+                      </a:rPr>
+                      <m:t>=</m:t>
+                    </m:r>
+                    <m:r>
+                      <a:rPr lang="fr-CH" sz="1800" b="0" i="1" smtClean="0">
+                        <a:latin typeface="Cambria Math" panose="02040503050406030204" pitchFamily="18" charset="0"/>
+                      </a:rPr>
+                      <m:t>𝑛</m:t>
+                    </m:r>
+                    <m:r>
+                      <a:rPr lang="fr-CH" sz="1800" b="0" i="1" smtClean="0">
+                        <a:latin typeface="Cambria Math" panose="02040503050406030204" pitchFamily="18" charset="0"/>
+                      </a:rPr>
+                      <m:t>!−</m:t>
+                    </m:r>
+                    <m:f>
+                      <m:fPr>
+                        <m:ctrlPr>
+                          <a:rPr lang="fr-CH" sz="1800" b="0" i="1" smtClean="0">
+                            <a:latin typeface="Cambria Math" panose="02040503050406030204" pitchFamily="18" charset="0"/>
+                          </a:rPr>
+                        </m:ctrlPr>
+                      </m:fPr>
+                      <m:num>
+                        <m:r>
+                          <a:rPr lang="fr-CH" sz="1800" b="0" i="1" smtClean="0">
+                            <a:latin typeface="Cambria Math" panose="02040503050406030204" pitchFamily="18" charset="0"/>
+                          </a:rPr>
+                          <m:t>𝑛</m:t>
+                        </m:r>
+                        <m:r>
+                          <a:rPr lang="fr-CH" sz="1800" b="0" i="1" smtClean="0">
+                            <a:latin typeface="Cambria Math" panose="02040503050406030204" pitchFamily="18" charset="0"/>
+                          </a:rPr>
+                          <m:t>!</m:t>
+                        </m:r>
+                      </m:num>
+                      <m:den>
+                        <m:r>
+                          <a:rPr lang="fr-CH" sz="1800" b="0" i="1" smtClean="0">
+                            <a:latin typeface="Cambria Math" panose="02040503050406030204" pitchFamily="18" charset="0"/>
+                          </a:rPr>
+                          <m:t>1!</m:t>
+                        </m:r>
+                      </m:den>
+                    </m:f>
+                    <m:r>
+                      <a:rPr lang="fr-CH" sz="1800" b="0" i="1" smtClean="0">
+                        <a:latin typeface="Cambria Math" panose="02040503050406030204" pitchFamily="18" charset="0"/>
+                      </a:rPr>
+                      <m:t>+</m:t>
+                    </m:r>
+                    <m:f>
+                      <m:fPr>
+                        <m:ctrlPr>
+                          <a:rPr lang="fr-CH" sz="1800" i="1">
+                            <a:latin typeface="Cambria Math" panose="02040503050406030204" pitchFamily="18" charset="0"/>
+                          </a:rPr>
+                        </m:ctrlPr>
+                      </m:fPr>
+                      <m:num>
+                        <m:r>
+                          <a:rPr lang="fr-CH" sz="1800" i="1">
+                            <a:latin typeface="Cambria Math" panose="02040503050406030204" pitchFamily="18" charset="0"/>
+                          </a:rPr>
+                          <m:t>𝑛</m:t>
+                        </m:r>
+                        <m:r>
+                          <a:rPr lang="fr-CH" sz="1800" i="1">
+                            <a:latin typeface="Cambria Math" panose="02040503050406030204" pitchFamily="18" charset="0"/>
+                          </a:rPr>
+                          <m:t>!</m:t>
+                        </m:r>
+                      </m:num>
+                      <m:den>
+                        <m:r>
+                          <a:rPr lang="fr-CH" sz="1800" b="0" i="1">
+                            <a:latin typeface="Cambria Math" panose="02040503050406030204" pitchFamily="18" charset="0"/>
+                          </a:rPr>
+                          <m:t>2</m:t>
+                        </m:r>
+                        <m:r>
+                          <a:rPr lang="fr-CH" sz="1800" i="1">
+                            <a:latin typeface="Cambria Math" panose="02040503050406030204" pitchFamily="18" charset="0"/>
+                          </a:rPr>
+                          <m:t>!</m:t>
+                        </m:r>
+                      </m:den>
+                    </m:f>
+                    <m:r>
+                      <a:rPr lang="fr-CH" sz="1800" b="0" i="1" smtClean="0">
+                        <a:latin typeface="Cambria Math" panose="02040503050406030204" pitchFamily="18" charset="0"/>
+                      </a:rPr>
+                      <m:t>−…+</m:t>
+                    </m:r>
+                    <m:f>
+                      <m:fPr>
+                        <m:ctrlPr>
+                          <a:rPr lang="fr-CH" sz="1800" i="1">
+                            <a:latin typeface="Cambria Math" panose="02040503050406030204" pitchFamily="18" charset="0"/>
+                          </a:rPr>
+                        </m:ctrlPr>
+                      </m:fPr>
+                      <m:num>
+                        <m:r>
+                          <a:rPr lang="fr-CH" sz="1800" i="1">
+                            <a:latin typeface="Cambria Math" panose="02040503050406030204" pitchFamily="18" charset="0"/>
+                          </a:rPr>
+                          <m:t>𝑛</m:t>
+                        </m:r>
+                        <m:r>
+                          <a:rPr lang="fr-CH" sz="1800" i="1">
+                            <a:latin typeface="Cambria Math" panose="02040503050406030204" pitchFamily="18" charset="0"/>
+                          </a:rPr>
+                          <m:t>!</m:t>
+                        </m:r>
+                      </m:num>
+                      <m:den>
+                        <m:r>
+                          <a:rPr lang="fr-CH" sz="1800" b="0" i="1">
+                            <a:latin typeface="Cambria Math" panose="02040503050406030204" pitchFamily="18" charset="0"/>
+                          </a:rPr>
+                          <m:t>𝑛</m:t>
+                        </m:r>
+                        <m:r>
+                          <a:rPr lang="fr-CH" sz="1800" i="1">
+                            <a:latin typeface="Cambria Math" panose="02040503050406030204" pitchFamily="18" charset="0"/>
+                          </a:rPr>
+                          <m:t>!</m:t>
+                        </m:r>
+                      </m:den>
+                    </m:f>
+                    <m:sSup>
+                      <m:sSupPr>
+                        <m:ctrlPr>
+                          <a:rPr lang="fr-CH" sz="1800" i="1">
+                            <a:latin typeface="Cambria Math" panose="02040503050406030204" pitchFamily="18" charset="0"/>
+                          </a:rPr>
+                        </m:ctrlPr>
+                      </m:sSupPr>
+                      <m:e>
+                        <m:d>
+                          <m:dPr>
+                            <m:ctrlPr>
+                              <a:rPr lang="fr-CH" sz="1800" i="1">
+                                <a:latin typeface="Cambria Math" panose="02040503050406030204" pitchFamily="18" charset="0"/>
+                              </a:rPr>
+                            </m:ctrlPr>
+                          </m:dPr>
+                          <m:e>
+                            <m:r>
+                              <a:rPr lang="fr-CH" sz="1800" i="1">
+                                <a:latin typeface="Cambria Math" panose="02040503050406030204" pitchFamily="18" charset="0"/>
+                              </a:rPr>
+                              <m:t>−1</m:t>
+                            </m:r>
+                          </m:e>
+                        </m:d>
+                      </m:e>
+                      <m:sup>
+                        <m:r>
+                          <a:rPr lang="fr-CH" sz="1800" i="1">
+                            <a:latin typeface="Cambria Math" panose="02040503050406030204" pitchFamily="18" charset="0"/>
+                          </a:rPr>
+                          <m:t>𝑛</m:t>
+                        </m:r>
+                      </m:sup>
+                    </m:sSup>
+                    <m:r>
+                      <a:rPr lang="fr-CH" sz="1800" b="0" i="1" smtClean="0">
+                        <a:latin typeface="Cambria Math" panose="02040503050406030204" pitchFamily="18" charset="0"/>
+                      </a:rPr>
+                      <m:t>=</m:t>
+                    </m:r>
+                    <m:r>
+                      <a:rPr lang="fr-CH" sz="1800" b="0" i="1" smtClean="0">
+                        <a:latin typeface="Cambria Math" panose="02040503050406030204" pitchFamily="18" charset="0"/>
+                      </a:rPr>
+                      <m:t>𝑛</m:t>
+                    </m:r>
+                    <m:r>
+                      <a:rPr lang="fr-CH" sz="1800" b="0" i="1" smtClean="0">
+                        <a:latin typeface="Cambria Math" panose="02040503050406030204" pitchFamily="18" charset="0"/>
+                      </a:rPr>
+                      <m:t>!</m:t>
+                    </m:r>
+                    <m:d>
+                      <m:dPr>
+                        <m:ctrlPr>
+                          <a:rPr lang="fr-CH" sz="1800" b="0" i="1" smtClean="0">
+                            <a:latin typeface="Cambria Math" panose="02040503050406030204" pitchFamily="18" charset="0"/>
+                          </a:rPr>
+                        </m:ctrlPr>
+                      </m:dPr>
+                      <m:e>
+                        <m:r>
+                          <a:rPr lang="fr-CH" sz="1800" b="0" i="1" smtClean="0">
+                            <a:latin typeface="Cambria Math" panose="02040503050406030204" pitchFamily="18" charset="0"/>
+                          </a:rPr>
+                          <m:t>1−</m:t>
+                        </m:r>
+                        <m:f>
+                          <m:fPr>
+                            <m:ctrlPr>
+                              <a:rPr lang="fr-CH" sz="1800" b="0" i="1" smtClean="0">
+                                <a:latin typeface="Cambria Math" panose="02040503050406030204" pitchFamily="18" charset="0"/>
+                              </a:rPr>
+                            </m:ctrlPr>
+                          </m:fPr>
+                          <m:num>
+                            <m:r>
+                              <a:rPr lang="fr-CH" sz="1800" b="0" i="1" smtClean="0">
+                                <a:latin typeface="Cambria Math" panose="02040503050406030204" pitchFamily="18" charset="0"/>
+                              </a:rPr>
+                              <m:t>1</m:t>
+                            </m:r>
+                          </m:num>
+                          <m:den>
+                            <m:r>
+                              <a:rPr lang="fr-CH" sz="1800" b="0" i="1" smtClean="0">
+                                <a:latin typeface="Cambria Math" panose="02040503050406030204" pitchFamily="18" charset="0"/>
+                              </a:rPr>
+                              <m:t>1!</m:t>
+                            </m:r>
+                          </m:den>
+                        </m:f>
+                        <m:r>
+                          <a:rPr lang="fr-CH" sz="1800" b="0" i="1" smtClean="0">
+                            <a:latin typeface="Cambria Math" panose="02040503050406030204" pitchFamily="18" charset="0"/>
+                          </a:rPr>
+                          <m:t>+</m:t>
+                        </m:r>
+                        <m:f>
+                          <m:fPr>
+                            <m:ctrlPr>
+                              <a:rPr lang="fr-CH" sz="1800" i="1">
+                                <a:latin typeface="Cambria Math" panose="02040503050406030204" pitchFamily="18" charset="0"/>
+                              </a:rPr>
+                            </m:ctrlPr>
+                          </m:fPr>
+                          <m:num>
+                            <m:r>
+                              <a:rPr lang="fr-CH" sz="1800" i="1">
+                                <a:latin typeface="Cambria Math" panose="02040503050406030204" pitchFamily="18" charset="0"/>
+                              </a:rPr>
+                              <m:t>1</m:t>
+                            </m:r>
+                          </m:num>
+                          <m:den>
+                            <m:r>
+                              <a:rPr lang="fr-CH" sz="1800" b="0" i="1" smtClean="0">
+                                <a:latin typeface="Cambria Math" panose="02040503050406030204" pitchFamily="18" charset="0"/>
+                              </a:rPr>
+                              <m:t>2</m:t>
+                            </m:r>
+                            <m:r>
+                              <a:rPr lang="fr-CH" sz="1800" i="1">
+                                <a:latin typeface="Cambria Math" panose="02040503050406030204" pitchFamily="18" charset="0"/>
+                              </a:rPr>
+                              <m:t>!</m:t>
+                            </m:r>
+                          </m:den>
+                        </m:f>
+                        <m:r>
+                          <a:rPr lang="fr-CH" sz="1800" b="0" i="1" smtClean="0">
+                            <a:latin typeface="Cambria Math" panose="02040503050406030204" pitchFamily="18" charset="0"/>
+                          </a:rPr>
+                          <m:t>−…−</m:t>
+                        </m:r>
+                        <m:sSup>
+                          <m:sSupPr>
+                            <m:ctrlPr>
+                              <a:rPr lang="fr-CH" sz="1800" i="1">
+                                <a:latin typeface="Cambria Math" panose="02040503050406030204" pitchFamily="18" charset="0"/>
+                              </a:rPr>
+                            </m:ctrlPr>
+                          </m:sSupPr>
+                          <m:e>
+                            <m:d>
+                              <m:dPr>
+                                <m:ctrlPr>
+                                  <a:rPr lang="fr-CH" sz="1800" i="1">
+                                    <a:latin typeface="Cambria Math" panose="02040503050406030204" pitchFamily="18" charset="0"/>
+                                  </a:rPr>
+                                </m:ctrlPr>
+                              </m:dPr>
+                              <m:e>
+                                <m:r>
+                                  <a:rPr lang="fr-CH" sz="1800" i="1">
+                                    <a:latin typeface="Cambria Math" panose="02040503050406030204" pitchFamily="18" charset="0"/>
+                                  </a:rPr>
+                                  <m:t>−1</m:t>
+                                </m:r>
+                              </m:e>
+                            </m:d>
+                          </m:e>
+                          <m:sup>
+                            <m:r>
+                              <a:rPr lang="fr-CH" sz="1800" i="1">
+                                <a:latin typeface="Cambria Math" panose="02040503050406030204" pitchFamily="18" charset="0"/>
+                              </a:rPr>
+                              <m:t>𝑛</m:t>
+                            </m:r>
+                          </m:sup>
+                        </m:sSup>
+                        <m:f>
+                          <m:fPr>
+                            <m:ctrlPr>
+                              <a:rPr lang="fr-CH" sz="1800" i="1">
+                                <a:latin typeface="Cambria Math" panose="02040503050406030204" pitchFamily="18" charset="0"/>
+                              </a:rPr>
+                            </m:ctrlPr>
+                          </m:fPr>
+                          <m:num>
+                            <m:r>
+                              <a:rPr lang="fr-CH" sz="1800" i="1">
+                                <a:latin typeface="Cambria Math" panose="02040503050406030204" pitchFamily="18" charset="0"/>
+                              </a:rPr>
+                              <m:t>1</m:t>
+                            </m:r>
+                          </m:num>
+                          <m:den>
+                            <m:r>
+                              <a:rPr lang="fr-CH" sz="1800" b="0" i="1" smtClean="0">
+                                <a:latin typeface="Cambria Math" panose="02040503050406030204" pitchFamily="18" charset="0"/>
+                              </a:rPr>
+                              <m:t>𝑛</m:t>
+                            </m:r>
+                            <m:r>
+                              <a:rPr lang="fr-CH" sz="1800" i="1">
+                                <a:latin typeface="Cambria Math" panose="02040503050406030204" pitchFamily="18" charset="0"/>
+                              </a:rPr>
+                              <m:t>!</m:t>
+                            </m:r>
+                          </m:den>
+                        </m:f>
+                      </m:e>
+                    </m:d>
+                  </m:oMath>
+                </a14:m>
+                <a:endParaRPr lang="en-US" sz="1800" dirty="0"/>
+              </a:p>
+              <a:p>
+                <a:pPr marL="0" indent="0">
+                  <a:buNone/>
+                </a:pPr>
+                <a:endParaRPr lang="en-US" sz="1800" dirty="0"/>
+              </a:p>
+            </p:txBody>
+          </p:sp>
+        </mc:Choice>
+        <mc:Fallback xmlns="">
+          <p:sp>
+            <p:nvSpPr>
+              <p:cNvPr id="3" name="Content Placeholder 2">
+                <a:extLst>
+                  <a:ext uri="{FF2B5EF4-FFF2-40B4-BE49-F238E27FC236}">
+                    <a16:creationId xmlns:a16="http://schemas.microsoft.com/office/drawing/2014/main" id="{725C2B4F-9C59-CF48-B6F9-2231A0B65A93}"/>
+                  </a:ext>
+                </a:extLst>
+              </p:cNvPr>
+              <p:cNvSpPr>
+                <a:spLocks noGrp="1" noRot="1" noChangeAspect="1" noMove="1" noResize="1" noEditPoints="1" noAdjustHandles="1" noChangeArrowheads="1" noChangeShapeType="1" noTextEdit="1"/>
+              </p:cNvSpPr>
+              <p:nvPr>
+                <p:ph idx="1"/>
+              </p:nvPr>
+            </p:nvSpPr>
+            <p:spPr>
+              <a:blipFill>
+                <a:blip r:embed="rId2"/>
+                <a:stretch>
+                  <a:fillRect l="-2774" t="-1462"/>
+                </a:stretch>
+              </a:blipFill>
+            </p:spPr>
+            <p:txBody>
+              <a:bodyPr/>
+              <a:lstStyle/>
+              <a:p>
+                <a:r>
+                  <a:rPr lang="en-US">
+                    <a:noFill/>
+                  </a:rPr>
+                  <a:t> </a:t>
+                </a:r>
+              </a:p>
+            </p:txBody>
+          </p:sp>
+        </mc:Fallback>
+      </mc:AlternateContent>
     </p:spTree>
     <p:extLst>
       <p:ext uri="{BB962C8B-B14F-4D97-AF65-F5344CB8AC3E}">
-        <p14:creationId xmlns:p14="http://schemas.microsoft.com/office/powerpoint/2010/main" val="3441717779"/>
+        <p14:creationId xmlns:p14="http://schemas.microsoft.com/office/powerpoint/2010/main" val="2357891636"/>
       </p:ext>
     </p:extLst>
   </p:cSld>
@@ -27952,7 +28138,7 @@
 </p:sld>
 </file>
 
-<file path=ppt/slides/slide70.xml><?xml version="1.0" encoding="utf-8"?>
+<file path=ppt/slides/slide64.xml><?xml version="1.0" encoding="utf-8"?>
 <p:sld xmlns:a="http://schemas.openxmlformats.org/drawingml/2006/main" xmlns:r="http://schemas.openxmlformats.org/officeDocument/2006/relationships" xmlns:p="http://schemas.openxmlformats.org/presentationml/2006/main">
   <p:cSld>
     <p:spTree>
@@ -28225,7 +28411,7 @@
 </p:sld>
 </file>
 
-<file path=ppt/slides/slide71.xml><?xml version="1.0" encoding="utf-8"?>
+<file path=ppt/slides/slide65.xml><?xml version="1.0" encoding="utf-8"?>
 <p:sld xmlns:a="http://schemas.openxmlformats.org/drawingml/2006/main" xmlns:r="http://schemas.openxmlformats.org/officeDocument/2006/relationships" xmlns:p="http://schemas.openxmlformats.org/presentationml/2006/main">
   <p:cSld>
     <p:bg>
@@ -28257,7 +28443,7 @@
           <p:cNvPr id="2" name="Title 1">
             <a:extLst>
               <a:ext uri="{FF2B5EF4-FFF2-40B4-BE49-F238E27FC236}">
-                <a16:creationId xmlns:a16="http://schemas.microsoft.com/office/drawing/2014/main" id="{9859B221-6AB2-984A-9620-9B9D6CF443BE}"/>
+                <a16:creationId xmlns:a16="http://schemas.microsoft.com/office/drawing/2014/main" id="{30DEF578-F6C4-A943-90AB-2D7C11DE4C0F}"/>
               </a:ext>
             </a:extLst>
           </p:cNvPr>
@@ -28285,7 +28471,7 @@
           <p:cNvPr id="3" name="Content Placeholder 2">
             <a:extLst>
               <a:ext uri="{FF2B5EF4-FFF2-40B4-BE49-F238E27FC236}">
-                <a16:creationId xmlns:a16="http://schemas.microsoft.com/office/drawing/2014/main" id="{82035276-988F-714F-85E6-8EC41CC30F11}"/>
+                <a16:creationId xmlns:a16="http://schemas.microsoft.com/office/drawing/2014/main" id="{F189135A-648E-9943-B59C-B45A2E496EBA}"/>
               </a:ext>
             </a:extLst>
           </p:cNvPr>
@@ -28303,7 +28489,19 @@
           <a:p>
             <a:r>
               <a:rPr lang="en-US" dirty="0"/>
-              <a:t>Number of surjective functions</a:t>
+              <a:t>Principle of Inclusion-Exclusion for 2 sets</a:t>
+            </a:r>
+          </a:p>
+          <a:p>
+            <a:r>
+              <a:rPr lang="en-US" dirty="0"/>
+              <a:t>Principle of Inclusion-Exclusion for 3 sets</a:t>
+            </a:r>
+          </a:p>
+          <a:p>
+            <a:r>
+              <a:rPr lang="en-US" dirty="0"/>
+              <a:t>Principle of Inclusion-Exclusion for n sets</a:t>
             </a:r>
           </a:p>
           <a:p>
@@ -28313,14 +28511,405 @@
             </a:r>
           </a:p>
           <a:p>
-            <a:endParaRPr lang="en-US"/>
+            <a:endParaRPr lang="en-US" dirty="0"/>
           </a:p>
         </p:txBody>
       </p:sp>
     </p:spTree>
     <p:extLst>
       <p:ext uri="{BB962C8B-B14F-4D97-AF65-F5344CB8AC3E}">
-        <p14:creationId xmlns:p14="http://schemas.microsoft.com/office/powerpoint/2010/main" val="1114608095"/>
+        <p14:creationId xmlns:p14="http://schemas.microsoft.com/office/powerpoint/2010/main" val="1558037444"/>
+      </p:ext>
+    </p:extLst>
+  </p:cSld>
+  <p:clrMapOvr>
+    <a:masterClrMapping/>
+  </p:clrMapOvr>
+</p:sld>
+</file>
+
+<file path=ppt/slides/slide7.xml><?xml version="1.0" encoding="utf-8"?>
+<p:sld xmlns:a="http://schemas.openxmlformats.org/drawingml/2006/main" xmlns:r="http://schemas.openxmlformats.org/officeDocument/2006/relationships" xmlns:p="http://schemas.openxmlformats.org/presentationml/2006/main">
+  <p:cSld>
+    <p:spTree>
+      <p:nvGrpSpPr>
+        <p:cNvPr id="1" name=""/>
+        <p:cNvGrpSpPr/>
+        <p:nvPr/>
+      </p:nvGrpSpPr>
+      <p:grpSpPr>
+        <a:xfrm>
+          <a:off x="0" y="0"/>
+          <a:ext cx="0" cy="0"/>
+          <a:chOff x="0" y="0"/>
+          <a:chExt cx="0" cy="0"/>
+        </a:xfrm>
+      </p:grpSpPr>
+      <p:sp>
+        <p:nvSpPr>
+          <p:cNvPr id="2" name="Title 1">
+            <a:extLst>
+              <a:ext uri="{FF2B5EF4-FFF2-40B4-BE49-F238E27FC236}">
+                <a16:creationId xmlns:a16="http://schemas.microsoft.com/office/drawing/2014/main" id="{E346428C-9116-5D48-9BAE-CB7639E3C948}"/>
+              </a:ext>
+            </a:extLst>
+          </p:cNvPr>
+          <p:cNvSpPr>
+            <a:spLocks noGrp="1"/>
+          </p:cNvSpPr>
+          <p:nvPr>
+            <p:ph type="title"/>
+          </p:nvPr>
+        </p:nvSpPr>
+        <p:spPr/>
+        <p:txBody>
+          <a:bodyPr/>
+          <a:lstStyle/>
+          <a:p>
+            <a:r>
+              <a:rPr lang="en-US" dirty="0"/>
+              <a:t>Counting Bit Strings</a:t>
+            </a:r>
+            <a:endParaRPr lang="en-US"/>
+          </a:p>
+        </p:txBody>
+      </p:sp>
+      <p:sp>
+        <p:nvSpPr>
+          <p:cNvPr id="3" name="Content Placeholder 2">
+            <a:extLst>
+              <a:ext uri="{FF2B5EF4-FFF2-40B4-BE49-F238E27FC236}">
+                <a16:creationId xmlns:a16="http://schemas.microsoft.com/office/drawing/2014/main" id="{AECB7C75-F66B-7E42-B3E9-55B9ABE01F70}"/>
+              </a:ext>
+            </a:extLst>
+          </p:cNvPr>
+          <p:cNvSpPr>
+            <a:spLocks noGrp="1"/>
+          </p:cNvSpPr>
+          <p:nvPr>
+            <p:ph idx="1"/>
+          </p:nvPr>
+        </p:nvSpPr>
+        <p:spPr/>
+        <p:txBody>
+          <a:bodyPr>
+            <a:normAutofit lnSpcReduction="10000"/>
+          </a:bodyPr>
+          <a:lstStyle/>
+          <a:p>
+            <a:pPr marL="0" indent="0">
+              <a:buNone/>
+            </a:pPr>
+            <a:r>
+              <a:rPr lang="en-US" dirty="0"/>
+              <a:t>How many such bit strings are there of length five?</a:t>
+            </a:r>
+          </a:p>
+          <a:p>
+            <a:pPr>
+              <a:buNone/>
+            </a:pPr>
+            <a:r>
+              <a:rPr lang="en-US" dirty="0"/>
+              <a:t>The initial conditions are:</a:t>
+            </a:r>
+            <a:r>
+              <a:rPr lang="en-US" dirty="0">
+                <a:ea typeface="Cambria Math" pitchFamily="18" charset="0"/>
+              </a:rPr>
+              <a:t> </a:t>
+            </a:r>
+          </a:p>
+          <a:p>
+            <a:pPr lvl="1"/>
+            <a:r>
+              <a:rPr lang="en-US" i="1" dirty="0"/>
+              <a:t>a</a:t>
+            </a:r>
+            <a:r>
+              <a:rPr lang="en-US" baseline="-25000" dirty="0">
+                <a:ea typeface="Cambria Math"/>
+              </a:rPr>
+              <a:t>1 </a:t>
+            </a:r>
+            <a:r>
+              <a:rPr lang="en-US" dirty="0">
+                <a:ea typeface="Cambria Math" pitchFamily="18" charset="0"/>
+              </a:rPr>
+              <a:t> = 2, since both the bit strings 0 and 1 do not have consecutive 0s.</a:t>
+            </a:r>
+          </a:p>
+          <a:p>
+            <a:pPr lvl="1"/>
+            <a:r>
+              <a:rPr lang="en-US" i="1" dirty="0"/>
+              <a:t>a</a:t>
+            </a:r>
+            <a:r>
+              <a:rPr lang="en-US" baseline="-25000" dirty="0">
+                <a:ea typeface="Cambria Math"/>
+              </a:rPr>
+              <a:t>2 </a:t>
+            </a:r>
+            <a:r>
+              <a:rPr lang="en-US" dirty="0">
+                <a:ea typeface="Cambria Math" pitchFamily="18" charset="0"/>
+              </a:rPr>
+              <a:t> = 3, since the bit strings 01, 10, and 11 do not have consecutive 0s, </a:t>
+            </a:r>
+            <a:br>
+              <a:rPr lang="en-US" dirty="0">
+                <a:ea typeface="Cambria Math" pitchFamily="18" charset="0"/>
+              </a:rPr>
+            </a:br>
+            <a:r>
+              <a:rPr lang="en-US" dirty="0">
+                <a:ea typeface="Cambria Math" pitchFamily="18" charset="0"/>
+              </a:rPr>
+              <a:t>while 00 does.</a:t>
+            </a:r>
+          </a:p>
+          <a:p>
+            <a:pPr>
+              <a:buNone/>
+            </a:pPr>
+            <a:r>
+              <a:rPr lang="en-US" dirty="0">
+                <a:ea typeface="Cambria Math" pitchFamily="18" charset="0"/>
+              </a:rPr>
+              <a:t>To obtain </a:t>
+            </a:r>
+            <a:r>
+              <a:rPr lang="en-US" i="1" dirty="0"/>
+              <a:t>a</a:t>
+            </a:r>
+            <a:r>
+              <a:rPr lang="en-US" baseline="-25000" dirty="0">
+                <a:ea typeface="Cambria Math"/>
+              </a:rPr>
+              <a:t>5 </a:t>
+            </a:r>
+            <a:r>
+              <a:rPr lang="en-US" dirty="0">
+                <a:ea typeface="Cambria Math" pitchFamily="18" charset="0"/>
+              </a:rPr>
+              <a:t>, we use the recurrence relation three times to find that:</a:t>
+            </a:r>
+          </a:p>
+          <a:p>
+            <a:pPr lvl="1"/>
+            <a:r>
+              <a:rPr lang="en-US" dirty="0">
+                <a:ea typeface="Cambria Math" pitchFamily="18" charset="0"/>
+              </a:rPr>
+              <a:t> </a:t>
+            </a:r>
+            <a:r>
+              <a:rPr lang="en-US" i="1" dirty="0"/>
+              <a:t>a</a:t>
+            </a:r>
+            <a:r>
+              <a:rPr lang="en-US" baseline="-25000" dirty="0">
+                <a:ea typeface="Cambria Math"/>
+              </a:rPr>
+              <a:t>3</a:t>
+            </a:r>
+            <a:r>
+              <a:rPr lang="en-US" dirty="0">
+                <a:ea typeface="Cambria Math"/>
+              </a:rPr>
+              <a:t> </a:t>
+            </a:r>
+            <a:r>
+              <a:rPr lang="en-US" dirty="0">
+                <a:ea typeface="Cambria Math" pitchFamily="18" charset="0"/>
+              </a:rPr>
+              <a:t>= </a:t>
+            </a:r>
+            <a:r>
+              <a:rPr lang="en-US" i="1" dirty="0"/>
+              <a:t>a</a:t>
+            </a:r>
+            <a:r>
+              <a:rPr lang="en-US" baseline="-25000" dirty="0">
+                <a:ea typeface="Cambria Math"/>
+              </a:rPr>
+              <a:t>2 </a:t>
+            </a:r>
+            <a:r>
+              <a:rPr lang="en-US" dirty="0">
+                <a:ea typeface="Cambria Math" pitchFamily="18" charset="0"/>
+              </a:rPr>
+              <a:t> + </a:t>
+            </a:r>
+            <a:r>
+              <a:rPr lang="en-US" i="1" dirty="0"/>
+              <a:t>a</a:t>
+            </a:r>
+            <a:r>
+              <a:rPr lang="en-US" baseline="-25000" dirty="0">
+                <a:ea typeface="Cambria Math"/>
+              </a:rPr>
+              <a:t>1 </a:t>
+            </a:r>
+            <a:r>
+              <a:rPr lang="en-US" dirty="0">
+                <a:ea typeface="Cambria Math" pitchFamily="18" charset="0"/>
+              </a:rPr>
+              <a:t> = 3 + 2 = 5</a:t>
+            </a:r>
+          </a:p>
+          <a:p>
+            <a:pPr lvl="1"/>
+            <a:r>
+              <a:rPr lang="en-US" i="1" dirty="0"/>
+              <a:t> a</a:t>
+            </a:r>
+            <a:r>
+              <a:rPr lang="en-US" baseline="-25000" dirty="0">
+                <a:ea typeface="Cambria Math"/>
+              </a:rPr>
+              <a:t>4</a:t>
+            </a:r>
+            <a:r>
+              <a:rPr lang="en-US" dirty="0">
+                <a:ea typeface="Cambria Math"/>
+              </a:rPr>
+              <a:t> </a:t>
+            </a:r>
+            <a:r>
+              <a:rPr lang="en-US" dirty="0">
+                <a:ea typeface="Cambria Math" pitchFamily="18" charset="0"/>
+              </a:rPr>
+              <a:t>= </a:t>
+            </a:r>
+            <a:r>
+              <a:rPr lang="en-US" i="1" dirty="0"/>
+              <a:t>a</a:t>
+            </a:r>
+            <a:r>
+              <a:rPr lang="en-US" baseline="-25000" dirty="0">
+                <a:ea typeface="Cambria Math"/>
+              </a:rPr>
+              <a:t>3 </a:t>
+            </a:r>
+            <a:r>
+              <a:rPr lang="en-US" dirty="0">
+                <a:ea typeface="Cambria Math" pitchFamily="18" charset="0"/>
+              </a:rPr>
+              <a:t> + </a:t>
+            </a:r>
+            <a:r>
+              <a:rPr lang="en-US" i="1" dirty="0"/>
+              <a:t>a</a:t>
+            </a:r>
+            <a:r>
+              <a:rPr lang="en-US" baseline="-25000" dirty="0">
+                <a:ea typeface="Cambria Math"/>
+              </a:rPr>
+              <a:t>2 </a:t>
+            </a:r>
+            <a:r>
+              <a:rPr lang="en-US" dirty="0">
+                <a:ea typeface="Cambria Math" pitchFamily="18" charset="0"/>
+              </a:rPr>
+              <a:t> = 5 + 3 = 8</a:t>
+            </a:r>
+          </a:p>
+          <a:p>
+            <a:pPr lvl="1"/>
+            <a:r>
+              <a:rPr lang="en-US" i="1" dirty="0"/>
+              <a:t> a</a:t>
+            </a:r>
+            <a:r>
+              <a:rPr lang="en-US" baseline="-25000" dirty="0">
+                <a:ea typeface="Cambria Math"/>
+              </a:rPr>
+              <a:t>5</a:t>
+            </a:r>
+            <a:r>
+              <a:rPr lang="en-US" dirty="0">
+                <a:ea typeface="Cambria Math"/>
+              </a:rPr>
+              <a:t> </a:t>
+            </a:r>
+            <a:r>
+              <a:rPr lang="en-US" dirty="0">
+                <a:ea typeface="Cambria Math" pitchFamily="18" charset="0"/>
+              </a:rPr>
+              <a:t>= </a:t>
+            </a:r>
+            <a:r>
+              <a:rPr lang="en-US" i="1" dirty="0"/>
+              <a:t>a</a:t>
+            </a:r>
+            <a:r>
+              <a:rPr lang="en-US" baseline="-25000" dirty="0">
+                <a:ea typeface="Cambria Math"/>
+              </a:rPr>
+              <a:t>4 </a:t>
+            </a:r>
+            <a:r>
+              <a:rPr lang="en-US" dirty="0">
+                <a:ea typeface="Cambria Math" pitchFamily="18" charset="0"/>
+              </a:rPr>
+              <a:t> + </a:t>
+            </a:r>
+            <a:r>
+              <a:rPr lang="en-US" i="1" dirty="0"/>
+              <a:t>a</a:t>
+            </a:r>
+            <a:r>
+              <a:rPr lang="en-US" baseline="-25000" dirty="0">
+                <a:ea typeface="Cambria Math"/>
+              </a:rPr>
+              <a:t>3 </a:t>
+            </a:r>
+            <a:r>
+              <a:rPr lang="en-US" dirty="0">
+                <a:ea typeface="Cambria Math" pitchFamily="18" charset="0"/>
+              </a:rPr>
+              <a:t> = 8 + 5 = 13</a:t>
+            </a:r>
+          </a:p>
+          <a:p>
+            <a:pPr marL="0" indent="0">
+              <a:buNone/>
+            </a:pPr>
+            <a:r>
+              <a:rPr lang="en-US" dirty="0"/>
+              <a:t>Note that {</a:t>
+            </a:r>
+            <a:r>
+              <a:rPr lang="en-US" i="1" dirty="0"/>
+              <a:t>a</a:t>
+            </a:r>
+            <a:r>
+              <a:rPr lang="en-US" i="1" baseline="-25000" dirty="0"/>
+              <a:t>n </a:t>
+            </a:r>
+            <a:r>
+              <a:rPr lang="en-US" dirty="0"/>
+              <a:t>} satisfies the same recurrence relation as the Fibonacci sequence.</a:t>
+            </a:r>
+            <a:r>
+              <a:rPr lang="en-US" dirty="0">
+                <a:ea typeface="Cambria Math" pitchFamily="18" charset="0"/>
+              </a:rPr>
+              <a:t>      </a:t>
+            </a:r>
+            <a:endParaRPr lang="en-US" dirty="0"/>
+          </a:p>
+          <a:p>
+            <a:endParaRPr lang="en-US"/>
+          </a:p>
+        </p:txBody>
+      </p:sp>
+    </p:spTree>
+    <p:extLst>
+      <p:ext uri="{BB962C8B-B14F-4D97-AF65-F5344CB8AC3E}">
+        <p14:creationId xmlns:p14="http://schemas.microsoft.com/office/powerpoint/2010/main" val="3441717779"/>
       </p:ext>
     </p:extLst>
   </p:cSld>
@@ -28701,42 +29290,42 @@
 
 <file path=ppt/tags/tag14.xml><?xml version="1.0" encoding="utf-8"?>
 <p:tagLst xmlns:a="http://schemas.openxmlformats.org/drawingml/2006/main" xmlns:r="http://schemas.openxmlformats.org/officeDocument/2006/relationships" xmlns:p="http://schemas.openxmlformats.org/presentationml/2006/main">
-  <p:tag name="LATEXADDIN" val="\documentclass{article}&#10;\usepackage{amsmath}&#10;\pagestyle{empty}&#10;\begin{document}&#10;&#10;&#10;$a_n = \alpha_1 r_{1}^{n}+ \alpha_2 r_{2}^{m} + \cdots + \alpha_{k}r_{k}^{n}$&#10;&#10;\end{document}"/>
-  <p:tag name="IGUANATEXSIZE" val="27"/>
+  <p:tag name="LATEXADDIN" val="\documentclass{article}&#10;\usepackage{amsmath}&#10;\pagestyle{empty}&#10;\begin{document}&#10;&#10;&#10;$a_n = (\alpha_{1,0}+ \alpha_{1,1}n + \cdots + \alpha_{1,m_{1}- 1}n^{m_{1}-1})r_{1}^{n}$&#10;&#10;\end{document}"/>
+  <p:tag name="IGUANATEXSIZE" val="21"/>
 </p:tagLst>
 </file>
 
 <file path=ppt/tags/tag15.xml><?xml version="1.0" encoding="utf-8"?>
 <p:tagLst xmlns:a="http://schemas.openxmlformats.org/drawingml/2006/main" xmlns:r="http://schemas.openxmlformats.org/officeDocument/2006/relationships" xmlns:p="http://schemas.openxmlformats.org/presentationml/2006/main">
-  <p:tag name="LATEXADDIN" val="\documentclass{article}&#10;\usepackage{amsmath}&#10;\pagestyle{empty}&#10;\begin{document}&#10;&#10;&#10;$a_n = (\alpha_{1,0}+ \alpha_{1,1}n + \cdots + \alpha_{1,m_{1}- 1}n^{m_{1}-1})r_{1}^{n}$&#10;&#10;\end{document}"/>
+  <p:tag name="LATEXADDIN" val="\documentclass{article}&#10;\usepackage{amsmath}&#10;\pagestyle{empty}&#10;\begin{document}&#10;&#10;&#10;$ + (\alpha_{2,0}+ \alpha_{2,1}n + \cdots + \alpha_{2,{m_{2}- 1}}n^{m_{2}-1})r_{2}^{n}$&#10;&#10;\end{document}"/>
   <p:tag name="IGUANATEXSIZE" val="21"/>
 </p:tagLst>
 </file>
 
 <file path=ppt/tags/tag16.xml><?xml version="1.0" encoding="utf-8"?>
 <p:tagLst xmlns:a="http://schemas.openxmlformats.org/drawingml/2006/main" xmlns:r="http://schemas.openxmlformats.org/officeDocument/2006/relationships" xmlns:p="http://schemas.openxmlformats.org/presentationml/2006/main">
-  <p:tag name="LATEXADDIN" val="\documentclass{article}&#10;\usepackage{amsmath}&#10;\pagestyle{empty}&#10;\begin{document}&#10;&#10;&#10;$ + (\alpha_{2,0}+ \alpha_{2,1}n + \cdots + \alpha_{2,{m_{2}- 1}}n^{m_{2}-1})r_{2}^{n}$&#10;&#10;\end{document}"/>
+  <p:tag name="LATEXADDIN" val="\documentclass{article}&#10;\usepackage{amsmath}&#10;\pagestyle{empty}&#10;\begin{document}&#10;&#10;&#10;$ +\cdots +  (\alpha_{t,0}+ \alpha_{t,1}n + \cdots + \alpha_{t,m_{t}- 1}n^{m_{t}-1})r_{t}^{n}$&#10;&#10;\end{document}"/>
   <p:tag name="IGUANATEXSIZE" val="21"/>
 </p:tagLst>
 </file>
 
 <file path=ppt/tags/tag17.xml><?xml version="1.0" encoding="utf-8"?>
 <p:tagLst xmlns:a="http://schemas.openxmlformats.org/drawingml/2006/main" xmlns:r="http://schemas.openxmlformats.org/officeDocument/2006/relationships" xmlns:p="http://schemas.openxmlformats.org/presentationml/2006/main">
-  <p:tag name="LATEXADDIN" val="\documentclass{article}&#10;\usepackage{amsmath}&#10;\pagestyle{empty}&#10;\begin{document}&#10;&#10;&#10;$ +\cdots +  (\alpha_{t,0}+ \alpha_{t,1}n + \cdots + \alpha_{t,m_{t}- 1}n^{m_{t}-1})r_{t}^{n}$&#10;&#10;\end{document}"/>
-  <p:tag name="IGUANATEXSIZE" val="21"/>
+  <p:tag name="LATEXADDIN" val="\documentclass{article}&#10;\usepackage{amsmath}&#10;\pagestyle{empty}&#10;\begin{document}&#10;&#10;$$ G(x) = a_0 + a_1x + \cdots + a_{k}x^k + \cdots = \sum^{\infty}_{k = 0} a_kx^k .$$&#10;&#10;&#10;\end{document}"/>
+  <p:tag name="IGUANATEXSIZE" val="20"/>
 </p:tagLst>
 </file>
 
 <file path=ppt/tags/tag18.xml><?xml version="1.0" encoding="utf-8"?>
 <p:tagLst xmlns:a="http://schemas.openxmlformats.org/drawingml/2006/main" xmlns:r="http://schemas.openxmlformats.org/officeDocument/2006/relationships" xmlns:p="http://schemas.openxmlformats.org/presentationml/2006/main">
-  <p:tag name="LATEXADDIN" val="\documentclass{article}&#10;\usepackage{amsmath}&#10;\pagestyle{empty}&#10;\begin{document}&#10;&#10;$$ G(x) = a_0 + a_1x + \cdots + a_{k}x^k + \cdots = \sum^{\infty}_{k = 0} a_kx^k .$$&#10;&#10;&#10;\end{document}"/>
-  <p:tag name="IGUANATEXSIZE" val="20"/>
+  <p:tag name="LATEXADDIN" val="\documentclass{article}&#10;\usepackage{amsmath}&#10;\pagestyle{empty}&#10;\begin{document}&#10;&#10;$$\sum^{\infty}_{k = 0} 3x^k .$$&#10;&#10;&#10;\end{document}"/>
+  <p:tag name="IGUANATEXSIZE" val="15"/>
 </p:tagLst>
 </file>
 
 <file path=ppt/tags/tag19.xml><?xml version="1.0" encoding="utf-8"?>
 <p:tagLst xmlns:a="http://schemas.openxmlformats.org/drawingml/2006/main" xmlns:r="http://schemas.openxmlformats.org/officeDocument/2006/relationships" xmlns:p="http://schemas.openxmlformats.org/presentationml/2006/main">
-  <p:tag name="LATEXADDIN" val="\documentclass{article}&#10;\usepackage{amsmath}&#10;\pagestyle{empty}&#10;\begin{document}&#10;&#10;$$\sum^{\infty}_{k = 0} 3x^k .$$&#10;&#10;&#10;\end{document}"/>
+  <p:tag name="LATEXADDIN" val="\documentclass{article}&#10;\usepackage{amsmath}&#10;\pagestyle{empty}&#10;\begin{document}&#10;&#10;$$\sum^{\infty}_{k = 0} (k + 1)x^k .$$&#10;&#10;&#10;\end{document}"/>
   <p:tag name="IGUANATEXSIZE" val="15"/>
 </p:tagLst>
 </file>
@@ -28750,70 +29339,42 @@
 
 <file path=ppt/tags/tag20.xml><?xml version="1.0" encoding="utf-8"?>
 <p:tagLst xmlns:a="http://schemas.openxmlformats.org/drawingml/2006/main" xmlns:r="http://schemas.openxmlformats.org/officeDocument/2006/relationships" xmlns:p="http://schemas.openxmlformats.org/presentationml/2006/main">
-  <p:tag name="LATEXADDIN" val="\documentclass{article}&#10;\usepackage{amsmath}&#10;\pagestyle{empty}&#10;\begin{document}&#10;&#10;$$\sum^{\infty}_{k = 0} (k + 1)x^k .$$&#10;&#10;&#10;\end{document}"/>
+  <p:tag name="LATEXADDIN" val="\documentclass{article}&#10;\usepackage{amsmath}&#10;\pagestyle{empty}&#10;\begin{document}&#10;&#10;$$\sum^{\infty}_{k = 0} 2^{k}x^k .$$&#10;&#10;&#10;\end{document}"/>
   <p:tag name="IGUANATEXSIZE" val="15"/>
 </p:tagLst>
 </file>
 
 <file path=ppt/tags/tag21.xml><?xml version="1.0" encoding="utf-8"?>
 <p:tagLst xmlns:a="http://schemas.openxmlformats.org/drawingml/2006/main" xmlns:r="http://schemas.openxmlformats.org/officeDocument/2006/relationships" xmlns:p="http://schemas.openxmlformats.org/presentationml/2006/main">
-  <p:tag name="LATEXADDIN" val="\documentclass{article}&#10;\usepackage{amsmath}&#10;\pagestyle{empty}&#10;\begin{document}&#10;&#10;$$\sum^{\infty}_{k = 0} 2^{k}x^k .$$&#10;&#10;&#10;\end{document}"/>
-  <p:tag name="IGUANATEXSIZE" val="15"/>
-</p:tagLst>
-</file>
-
-<file path=ppt/tags/tag22.xml><?xml version="1.0" encoding="utf-8"?>
-<p:tagLst xmlns:a="http://schemas.openxmlformats.org/drawingml/2006/main" xmlns:r="http://schemas.openxmlformats.org/officeDocument/2006/relationships" xmlns:p="http://schemas.openxmlformats.org/presentationml/2006/main">
   <p:tag name="LATEXADDIN" val="\documentclass{article}&#10;\usepackage{amsmath}&#10;\pagestyle{empty}&#10;\begin{document}&#10;&#10;&#10;$|A \cup B| = |A| + |B| - |A \cap B|$&#10;&#10;\end{document}"/>
   <p:tag name="IGUANATEXSIZE" val="30"/>
 </p:tagLst>
 </file>
 
-<file path=ppt/tags/tag23.xml><?xml version="1.0" encoding="utf-8"?>
+<file path=ppt/tags/tag22.xml><?xml version="1.0" encoding="utf-8"?>
 <p:tagLst xmlns:a="http://schemas.openxmlformats.org/drawingml/2006/main" xmlns:r="http://schemas.openxmlformats.org/officeDocument/2006/relationships" xmlns:p="http://schemas.openxmlformats.org/presentationml/2006/main">
   <p:tag name="LATEXADDIN" val="\documentclass{article}&#10;\usepackage{amsmath}&#10;\pagestyle{empty}&#10;\begin{document}&#10;&#10;&#10;$$|A| + |B| + |C|  - |A \cap B| - |A \cap C| - |B \cap C| + |A \cap B \cap C|$$&#10;&#10;\end{document}"/>
   <p:tag name="IGUANATEXSIZE" val="25"/>
 </p:tagLst>
 </file>
 
-<file path=ppt/tags/tag24.xml><?xml version="1.0" encoding="utf-8"?>
+<file path=ppt/tags/tag23.xml><?xml version="1.0" encoding="utf-8"?>
 <p:tagLst xmlns:a="http://schemas.openxmlformats.org/drawingml/2006/main" xmlns:r="http://schemas.openxmlformats.org/officeDocument/2006/relationships" xmlns:p="http://schemas.openxmlformats.org/presentationml/2006/main">
   <p:tag name="LATEXADDIN" val="\documentclass{article}&#10;\usepackage{amsmath}&#10;\pagestyle{empty}&#10;\begin{document}&#10;&#10;&#10;$$ |A \cup B \cup C| =$$&#10;&#10;\end{document}"/>
   <p:tag name="IGUANATEXSIZE" val="30"/>
 </p:tagLst>
 </file>
 
-<file path=ppt/tags/tag25.xml><?xml version="1.0" encoding="utf-8"?>
+<file path=ppt/tags/tag24.xml><?xml version="1.0" encoding="utf-8"?>
 <p:tagLst xmlns:a="http://schemas.openxmlformats.org/drawingml/2006/main" xmlns:r="http://schemas.openxmlformats.org/officeDocument/2006/relationships" xmlns:p="http://schemas.openxmlformats.org/presentationml/2006/main">
-  <p:tag name="LATEXADDIN" val="\documentclass{article}&#10;\usepackage{amsmath}&#10;\pagestyle{empty}&#10;\begin{document}&#10;&#10;&#10;$$ |A_1 \cup A_2 \cup \dots \cup A_n| =$$&#10;&#10;\end{document}"/>
-  <p:tag name="IGUANATEXSIZE" val="30"/>
-</p:tagLst>
-</file>
-
-<file path=ppt/tags/tag26.xml><?xml version="1.0" encoding="utf-8"?>
-<p:tagLst xmlns:a="http://schemas.openxmlformats.org/drawingml/2006/main" xmlns:r="http://schemas.openxmlformats.org/officeDocument/2006/relationships" xmlns:p="http://schemas.openxmlformats.org/presentationml/2006/main">
-  <p:tag name="LATEXADDIN" val="\documentclass{article}&#10;\usepackage{amsmath}&#10;\pagestyle{empty}&#10;\begin{document}&#10;&#10;&#10;$$\sum_{1 \leq i \leq n} |A_i| - \sum_{1 \leq i \leq j \leq n} |A_i \cap A_j| +$$&#10;&#10;\end{document}"/>
-  <p:tag name="IGUANATEXSIZE" val="30"/>
-</p:tagLst>
-</file>
-
-<file path=ppt/tags/tag27.xml><?xml version="1.0" encoding="utf-8"?>
-<p:tagLst xmlns:a="http://schemas.openxmlformats.org/drawingml/2006/main" xmlns:r="http://schemas.openxmlformats.org/officeDocument/2006/relationships" xmlns:p="http://schemas.openxmlformats.org/presentationml/2006/main">
-  <p:tag name="LATEXADDIN" val="\documentclass{article}&#10;\usepackage{amsmath}&#10;\pagestyle{empty}&#10;\begin{document}&#10;&#10;&#10;$$\sum_{1 \leq i \leq j\leq k \leq n} |A_i \cap A_j \cap A_k| - ... + (-1)^{n+1}|A_1 \cap A_2 \cap \ldots \cap A_n|$$&#10;&#10;\end{document}"/>
-  <p:tag name="IGUANATEXSIZE" val="27"/>
-</p:tagLst>
-</file>
-
-<file path=ppt/tags/tag28.xml><?xml version="1.0" encoding="utf-8"?>
-<p:tagLst xmlns:a="http://schemas.openxmlformats.org/drawingml/2006/main" xmlns:r="http://schemas.openxmlformats.org/officeDocument/2006/relationships" xmlns:p="http://schemas.openxmlformats.org/presentationml/2006/main">
-  <p:tag name="LATEXADDIN" val="\documentclass{article}&#10;\usepackage{amsmath}&#10;\pagestyle{empty}&#10;\begin{document}&#10;&#10;&#10;$$n^m - C(n,1)(n - 1)^m + C(n,2)(n - 2)^m - \cdots + (-1)^{n -1} C(n,n -1)\cdot 1^m$$&#10;&#10;\end{document}"/>
+  <p:tag name="LATEXADDIN" val="\documentclass{article}&#10;\usepackage{amsmath}&#10;\pagestyle{empty}&#10;\begin{document}&#10;&#10;&#10;$$D_n = n! \left[ 1 - \frac{1}{1!} + \frac{1}{2!} - \frac{1}{3!} + \cdots + (-1)^{n}\frac{1}{n!} \right].$$&#10;&#10;\end{document}"/>
   <p:tag name="IGUANATEXSIZE" val="20"/>
 </p:tagLst>
 </file>
 
-<file path=ppt/tags/tag29.xml><?xml version="1.0" encoding="utf-8"?>
+<file path=ppt/tags/tag25.xml><?xml version="1.0" encoding="utf-8"?>
 <p:tagLst xmlns:a="http://schemas.openxmlformats.org/drawingml/2006/main" xmlns:r="http://schemas.openxmlformats.org/officeDocument/2006/relationships" xmlns:p="http://schemas.openxmlformats.org/presentationml/2006/main">
-  <p:tag name="LATEXADDIN" val="\documentclass{article}&#10;\usepackage{amsmath}&#10;\pagestyle{empty}&#10;\begin{document}&#10;&#10;&#10;$$D_n = n! \left[ 1 - \frac{1}{1!} + \frac{1}{2!} - \frac{1}{3!} + \cdots + (-1)^{n}\frac{1}{n!} \right].$$&#10;&#10;\end{document}"/>
+  <p:tag name="LATEXADDIN" val="\documentclass{article}&#10;\usepackage{amsmath}&#10;\pagestyle{empty}&#10;\begin{document}&#10;&#10;&#10;$$\frac{D_n}{n!} =  \left[ 1 - \frac{1}{1!} + \frac{1}{2!} - \frac{1}{3!} + \cdots + (-1)^{n}\frac{1}{n!} \right]$$&#10;&#10;\end{document}"/>
   <p:tag name="IGUANATEXSIZE" val="20"/>
 </p:tagLst>
 </file>
@@ -28822,13 +29383,6 @@
 <p:tagLst xmlns:a="http://schemas.openxmlformats.org/drawingml/2006/main" xmlns:r="http://schemas.openxmlformats.org/officeDocument/2006/relationships" xmlns:p="http://schemas.openxmlformats.org/presentationml/2006/main">
   <p:tag name="LATEXADDIN" val="\documentclass{article}&#10;\usepackage{amsmath}&#10;\pagestyle{empty}&#10;\begin{document}&#10;&#10;$$ = \sum_{k = 0}^{n-1} C_k C_{n-k -1}$$&#10;&#10;&#10;\end{document}"/>
   <p:tag name="IGUANATEXSIZE" val="15"/>
-</p:tagLst>
-</file>
-
-<file path=ppt/tags/tag30.xml><?xml version="1.0" encoding="utf-8"?>
-<p:tagLst xmlns:a="http://schemas.openxmlformats.org/drawingml/2006/main" xmlns:r="http://schemas.openxmlformats.org/officeDocument/2006/relationships" xmlns:p="http://schemas.openxmlformats.org/presentationml/2006/main">
-  <p:tag name="LATEXADDIN" val="\documentclass{article}&#10;\usepackage{amsmath}&#10;\pagestyle{empty}&#10;\begin{document}&#10;&#10;&#10;$$\frac{D_n}{n!} =  \left[ 1 - \frac{1}{1!} + \frac{1}{2!} - \frac{1}{3!} + \cdots + (-1)^{n}\frac{1}{n!} \right]$$&#10;&#10;\end{document}"/>
-  <p:tag name="IGUANATEXSIZE" val="20"/>
 </p:tagLst>
 </file>
 
